--- a/slides/leyun-intro.pptx
+++ b/slides/leyun-intro.pptx
@@ -4875,6 +4875,465 @@
           </a:p>
         </p:txBody>
       </p:sp>
+      <p:sp>
+        <p:nvSpPr>
+          <p:cNvPr id="9" name="Shape 6"/>
+          <p:cNvSpPr/>
+          <p:nvPr/>
+        </p:nvSpPr>
+        <p:spPr>
+          <a:xfrm>
+            <a:off x="457200" y="1572768"/>
+            <a:ext cx="2695194" cy="3840480"/>
+          </a:xfrm>
+          <a:prstGeom prst="roundRect">
+            <a:avLst>
+              <a:gd name="adj" fmla="val 3393"/>
+            </a:avLst>
+          </a:prstGeom>
+          <a:solidFill>
+            <a:srgbClr val="FAFBFC"/>
+          </a:solidFill>
+          <a:ln w="12700">
+            <a:solidFill>
+              <a:srgbClr val="E5E7EB"/>
+            </a:solidFill>
+            <a:prstDash val="solid"/>
+          </a:ln>
+        </p:spPr>
+      </p:sp>
+      <p:sp>
+        <p:nvSpPr>
+          <p:cNvPr id="10" name="Text 7"/>
+          <p:cNvSpPr/>
+          <p:nvPr/>
+        </p:nvSpPr>
+        <p:spPr>
+          <a:xfrm>
+            <a:off x="457200" y="1618488"/>
+            <a:ext cx="2695194" cy="2112264"/>
+          </a:xfrm>
+          <a:prstGeom prst="rect">
+            <a:avLst/>
+          </a:prstGeom>
+          <a:noFill/>
+          <a:ln/>
+        </p:spPr>
+        <p:txBody>
+          <a:bodyPr wrap="square" rtlCol="0" anchor="ctr"/>
+          <a:lstStyle/>
+          <a:p>
+            <a:pPr algn="ctr" indent="0" marL="0">
+              <a:buNone/>
+            </a:pPr>
+            <a:r>
+              <a:rPr lang="en-US" sz="3800" b="1" dirty="0">
+                <a:solidFill>
+                  <a:srgbClr val="F38020"/>
+                </a:solidFill>
+                <a:latin typeface="微軟正黑體" pitchFamily="34" charset="0"/>
+                <a:ea typeface="微軟正黑體" pitchFamily="34" charset="-122"/>
+                <a:cs typeface="微軟正黑體" pitchFamily="34" charset="-120"/>
+              </a:rPr>
+              <a:t>4+</a:t>
+            </a:r>
+            <a:endParaRPr lang="en-US" sz="3800" dirty="0"/>
+          </a:p>
+        </p:txBody>
+      </p:sp>
+      <p:sp>
+        <p:nvSpPr>
+          <p:cNvPr id="11" name="Text 8"/>
+          <p:cNvSpPr/>
+          <p:nvPr/>
+        </p:nvSpPr>
+        <p:spPr>
+          <a:xfrm>
+            <a:off x="457200" y="3877056"/>
+            <a:ext cx="2695194" cy="1344168"/>
+          </a:xfrm>
+          <a:prstGeom prst="rect">
+            <a:avLst/>
+          </a:prstGeom>
+          <a:noFill/>
+          <a:ln/>
+        </p:spPr>
+        <p:txBody>
+          <a:bodyPr wrap="square" rtlCol="0" anchor="t"/>
+          <a:lstStyle/>
+          <a:p>
+            <a:pPr algn="ctr" indent="0" marL="0">
+              <a:buNone/>
+            </a:pPr>
+            <a:r>
+              <a:rPr lang="en-US" sz="1100" dirty="0">
+                <a:solidFill>
+                  <a:srgbClr val="888888"/>
+                </a:solidFill>
+                <a:latin typeface="微軟正黑體" pitchFamily="34" charset="0"/>
+                <a:ea typeface="微軟正黑體" pitchFamily="34" charset="-122"/>
+                <a:cs typeface="微軟正黑體" pitchFamily="34" charset="-120"/>
+              </a:rPr>
+              <a:t>服務涵蓋產業</a:t>
+            </a:r>
+            <a:endParaRPr lang="en-US" sz="1100" dirty="0"/>
+          </a:p>
+        </p:txBody>
+      </p:sp>
+      <p:sp>
+        <p:nvSpPr>
+          <p:cNvPr id="12" name="Shape 9"/>
+          <p:cNvSpPr/>
+          <p:nvPr/>
+        </p:nvSpPr>
+        <p:spPr>
+          <a:xfrm>
+            <a:off x="3316986" y="1572768"/>
+            <a:ext cx="2695194" cy="3840480"/>
+          </a:xfrm>
+          <a:prstGeom prst="roundRect">
+            <a:avLst>
+              <a:gd name="adj" fmla="val 3393"/>
+            </a:avLst>
+          </a:prstGeom>
+          <a:solidFill>
+            <a:srgbClr val="FAFBFC"/>
+          </a:solidFill>
+          <a:ln w="12700">
+            <a:solidFill>
+              <a:srgbClr val="E5E7EB"/>
+            </a:solidFill>
+            <a:prstDash val="solid"/>
+          </a:ln>
+        </p:spPr>
+      </p:sp>
+      <p:sp>
+        <p:nvSpPr>
+          <p:cNvPr id="13" name="Text 10"/>
+          <p:cNvSpPr/>
+          <p:nvPr/>
+        </p:nvSpPr>
+        <p:spPr>
+          <a:xfrm>
+            <a:off x="3316986" y="1618488"/>
+            <a:ext cx="2695194" cy="2112264"/>
+          </a:xfrm>
+          <a:prstGeom prst="rect">
+            <a:avLst/>
+          </a:prstGeom>
+          <a:noFill/>
+          <a:ln/>
+        </p:spPr>
+        <p:txBody>
+          <a:bodyPr wrap="square" rtlCol="0" anchor="ctr"/>
+          <a:lstStyle/>
+          <a:p>
+            <a:pPr algn="ctr" indent="0" marL="0">
+              <a:buNone/>
+            </a:pPr>
+            <a:r>
+              <a:rPr lang="en-US" sz="3800" b="1" dirty="0">
+                <a:solidFill>
+                  <a:srgbClr val="10B981"/>
+                </a:solidFill>
+                <a:latin typeface="微軟正黑體" pitchFamily="34" charset="0"/>
+                <a:ea typeface="微軟正黑體" pitchFamily="34" charset="-122"/>
+                <a:cs typeface="微軟正黑體" pitchFamily="34" charset="-120"/>
+              </a:rPr>
+              <a:t>51+</a:t>
+            </a:r>
+            <a:endParaRPr lang="en-US" sz="3800" dirty="0"/>
+          </a:p>
+        </p:txBody>
+      </p:sp>
+      <p:sp>
+        <p:nvSpPr>
+          <p:cNvPr id="14" name="Text 11"/>
+          <p:cNvSpPr/>
+          <p:nvPr/>
+        </p:nvSpPr>
+        <p:spPr>
+          <a:xfrm>
+            <a:off x="3316986" y="3877056"/>
+            <a:ext cx="2695194" cy="1344168"/>
+          </a:xfrm>
+          <a:prstGeom prst="rect">
+            <a:avLst/>
+          </a:prstGeom>
+          <a:noFill/>
+          <a:ln/>
+        </p:spPr>
+        <p:txBody>
+          <a:bodyPr wrap="square" rtlCol="0" anchor="t"/>
+          <a:lstStyle/>
+          <a:p>
+            <a:pPr algn="ctr" indent="0" marL="0">
+              <a:buNone/>
+            </a:pPr>
+            <a:r>
+              <a:rPr lang="en-US" sz="1100" dirty="0">
+                <a:solidFill>
+                  <a:srgbClr val="888888"/>
+                </a:solidFill>
+                <a:latin typeface="微軟正黑體" pitchFamily="34" charset="0"/>
+                <a:ea typeface="微軟正黑體" pitchFamily="34" charset="-122"/>
+                <a:cs typeface="微軟正黑體" pitchFamily="34" charset="-120"/>
+              </a:rPr>
+              <a:t>管理 LLM 模型數</a:t>
+            </a:r>
+            <a:endParaRPr lang="en-US" sz="1100" dirty="0"/>
+          </a:p>
+        </p:txBody>
+      </p:sp>
+      <p:sp>
+        <p:nvSpPr>
+          <p:cNvPr id="15" name="Shape 12"/>
+          <p:cNvSpPr/>
+          <p:nvPr/>
+        </p:nvSpPr>
+        <p:spPr>
+          <a:xfrm>
+            <a:off x="6176772" y="1572768"/>
+            <a:ext cx="2695194" cy="3840480"/>
+          </a:xfrm>
+          <a:prstGeom prst="roundRect">
+            <a:avLst>
+              <a:gd name="adj" fmla="val 3393"/>
+            </a:avLst>
+          </a:prstGeom>
+          <a:solidFill>
+            <a:srgbClr val="FAFBFC"/>
+          </a:solidFill>
+          <a:ln w="12700">
+            <a:solidFill>
+              <a:srgbClr val="E5E7EB"/>
+            </a:solidFill>
+            <a:prstDash val="solid"/>
+          </a:ln>
+        </p:spPr>
+      </p:sp>
+      <p:sp>
+        <p:nvSpPr>
+          <p:cNvPr id="16" name="Text 13"/>
+          <p:cNvSpPr/>
+          <p:nvPr/>
+        </p:nvSpPr>
+        <p:spPr>
+          <a:xfrm>
+            <a:off x="6176772" y="1618488"/>
+            <a:ext cx="2695194" cy="2112264"/>
+          </a:xfrm>
+          <a:prstGeom prst="rect">
+            <a:avLst/>
+          </a:prstGeom>
+          <a:noFill/>
+          <a:ln/>
+        </p:spPr>
+        <p:txBody>
+          <a:bodyPr wrap="square" rtlCol="0" anchor="ctr"/>
+          <a:lstStyle/>
+          <a:p>
+            <a:pPr algn="ctr" indent="0" marL="0">
+              <a:buNone/>
+            </a:pPr>
+            <a:r>
+              <a:rPr lang="en-US" sz="3800" b="1" dirty="0">
+                <a:solidFill>
+                  <a:srgbClr val="1E5BC6"/>
+                </a:solidFill>
+                <a:latin typeface="微軟正黑體" pitchFamily="34" charset="0"/>
+                <a:ea typeface="微軟正黑體" pitchFamily="34" charset="-122"/>
+                <a:cs typeface="微軟正黑體" pitchFamily="34" charset="-120"/>
+              </a:rPr>
+              <a:t>300+</a:t>
+            </a:r>
+            <a:endParaRPr lang="en-US" sz="3800" dirty="0"/>
+          </a:p>
+        </p:txBody>
+      </p:sp>
+      <p:sp>
+        <p:nvSpPr>
+          <p:cNvPr id="17" name="Text 14"/>
+          <p:cNvSpPr/>
+          <p:nvPr/>
+        </p:nvSpPr>
+        <p:spPr>
+          <a:xfrm>
+            <a:off x="6176772" y="3877056"/>
+            <a:ext cx="2695194" cy="1344168"/>
+          </a:xfrm>
+          <a:prstGeom prst="rect">
+            <a:avLst/>
+          </a:prstGeom>
+          <a:noFill/>
+          <a:ln/>
+        </p:spPr>
+        <p:txBody>
+          <a:bodyPr wrap="square" rtlCol="0" anchor="t"/>
+          <a:lstStyle/>
+          <a:p>
+            <a:pPr algn="ctr" indent="0" marL="0">
+              <a:buNone/>
+            </a:pPr>
+            <a:r>
+              <a:rPr lang="en-US" sz="1100" dirty="0">
+                <a:solidFill>
+                  <a:srgbClr val="888888"/>
+                </a:solidFill>
+                <a:latin typeface="微軟正黑體" pitchFamily="34" charset="0"/>
+                <a:ea typeface="微軟正黑體" pitchFamily="34" charset="-122"/>
+                <a:cs typeface="微軟正黑體" pitchFamily="34" charset="-120"/>
+              </a:rPr>
+              <a:t>Cloudflare 全球 PoP</a:t>
+            </a:r>
+            <a:endParaRPr lang="en-US" sz="1100" dirty="0"/>
+          </a:p>
+        </p:txBody>
+      </p:sp>
+      <p:sp>
+        <p:nvSpPr>
+          <p:cNvPr id="18" name="Shape 15"/>
+          <p:cNvSpPr/>
+          <p:nvPr/>
+        </p:nvSpPr>
+        <p:spPr>
+          <a:xfrm>
+            <a:off x="9036558" y="1572768"/>
+            <a:ext cx="2695194" cy="3840480"/>
+          </a:xfrm>
+          <a:prstGeom prst="roundRect">
+            <a:avLst>
+              <a:gd name="adj" fmla="val 3393"/>
+            </a:avLst>
+          </a:prstGeom>
+          <a:solidFill>
+            <a:srgbClr val="FAFBFC"/>
+          </a:solidFill>
+          <a:ln w="12700">
+            <a:solidFill>
+              <a:srgbClr val="E5E7EB"/>
+            </a:solidFill>
+            <a:prstDash val="solid"/>
+          </a:ln>
+        </p:spPr>
+      </p:sp>
+      <p:sp>
+        <p:nvSpPr>
+          <p:cNvPr id="19" name="Text 16"/>
+          <p:cNvSpPr/>
+          <p:nvPr/>
+        </p:nvSpPr>
+        <p:spPr>
+          <a:xfrm>
+            <a:off x="9036558" y="1618488"/>
+            <a:ext cx="2695194" cy="2112264"/>
+          </a:xfrm>
+          <a:prstGeom prst="rect">
+            <a:avLst/>
+          </a:prstGeom>
+          <a:noFill/>
+          <a:ln/>
+        </p:spPr>
+        <p:txBody>
+          <a:bodyPr wrap="square" rtlCol="0" anchor="ctr"/>
+          <a:lstStyle/>
+          <a:p>
+            <a:pPr algn="ctr" indent="0" marL="0">
+              <a:buNone/>
+            </a:pPr>
+            <a:r>
+              <a:rPr lang="en-US" sz="3800" b="1" dirty="0">
+                <a:solidFill>
+                  <a:srgbClr val="8B5CF6"/>
+                </a:solidFill>
+                <a:latin typeface="微軟正黑體" pitchFamily="34" charset="0"/>
+                <a:ea typeface="微軟正黑體" pitchFamily="34" charset="-122"/>
+                <a:cs typeface="微軟正黑體" pitchFamily="34" charset="-120"/>
+              </a:rPr>
+              <a:t>3 地</a:t>
+            </a:r>
+            <a:endParaRPr lang="en-US" sz="3800" dirty="0"/>
+          </a:p>
+        </p:txBody>
+      </p:sp>
+      <p:sp>
+        <p:nvSpPr>
+          <p:cNvPr id="20" name="Text 17"/>
+          <p:cNvSpPr/>
+          <p:nvPr/>
+        </p:nvSpPr>
+        <p:spPr>
+          <a:xfrm>
+            <a:off x="9036558" y="3877056"/>
+            <a:ext cx="2695194" cy="1344168"/>
+          </a:xfrm>
+          <a:prstGeom prst="rect">
+            <a:avLst/>
+          </a:prstGeom>
+          <a:noFill/>
+          <a:ln/>
+        </p:spPr>
+        <p:txBody>
+          <a:bodyPr wrap="square" rtlCol="0" anchor="t"/>
+          <a:lstStyle/>
+          <a:p>
+            <a:pPr algn="ctr" indent="0" marL="0">
+              <a:buNone/>
+            </a:pPr>
+            <a:r>
+              <a:rPr lang="en-US" sz="1100" dirty="0">
+                <a:solidFill>
+                  <a:srgbClr val="888888"/>
+                </a:solidFill>
+                <a:latin typeface="微軟正黑體" pitchFamily="34" charset="0"/>
+                <a:ea typeface="微軟正黑體" pitchFamily="34" charset="-122"/>
+                <a:cs typeface="微軟正黑體" pitchFamily="34" charset="-120"/>
+              </a:rPr>
+              <a:t>海外 24/7 覆蓋</a:t>
+            </a:r>
+            <a:endParaRPr lang="en-US" sz="1100" dirty="0"/>
+          </a:p>
+        </p:txBody>
+      </p:sp>
+      <p:sp>
+        <p:nvSpPr>
+          <p:cNvPr id="21" name="Text 18"/>
+          <p:cNvSpPr/>
+          <p:nvPr/>
+        </p:nvSpPr>
+        <p:spPr>
+          <a:xfrm>
+            <a:off x="457200" y="5522976"/>
+            <a:ext cx="11274552" cy="411480"/>
+          </a:xfrm>
+          <a:prstGeom prst="rect">
+            <a:avLst/>
+          </a:prstGeom>
+          <a:noFill/>
+          <a:ln/>
+        </p:spPr>
+        <p:txBody>
+          <a:bodyPr wrap="square" rtlCol="0" anchor="ctr"/>
+          <a:lstStyle/>
+          <a:p>
+            <a:pPr indent="0" marL="0">
+              <a:buNone/>
+            </a:pPr>
+            <a:r>
+              <a:rPr lang="en-US" sz="1200" i="1" dirty="0">
+                <a:solidFill>
+                  <a:srgbClr val="444444"/>
+                </a:solidFill>
+                <a:latin typeface="微軟正黑體" pitchFamily="34" charset="0"/>
+                <a:ea typeface="微軟正黑體" pitchFamily="34" charset="-122"/>
+                <a:cs typeface="微軟正黑體" pitchFamily="34" charset="-120"/>
+              </a:rPr>
+              <a:t>製造、旅遊、物流、媒體娛樂多產業整合經驗 · AI Gateway 統一治理 51+ LLM 模型 · 台灣使用者延遲 &lt;5ms · 台灣白班 + 海外夜班不間斷技術支援</a:t>
+            </a:r>
+            <a:endParaRPr lang="en-US" sz="1200" dirty="0"/>
+          </a:p>
+        </p:txBody>
+      </p:sp>
     </p:spTree>
   </p:cSld>
   <p:clrMapOvr>
@@ -9261,9 +9720,501 @@
                 <a:ea typeface="微軟正黑體" pitchFamily="34" charset="-122"/>
                 <a:cs typeface="微軟正黑體" pitchFamily="34" charset="-120"/>
               </a:rPr>
-              <a:t>獲取免費諮詢與 30 天 PoC 試用</a:t>
+              <a:t>免費諮詢</a:t>
             </a:r>
             <a:endParaRPr lang="en-US" sz="2400" dirty="0"/>
+          </a:p>
+        </p:txBody>
+      </p:sp>
+      <p:sp>
+        <p:nvSpPr>
+          <p:cNvPr id="5" name="Text 3"/>
+          <p:cNvSpPr/>
+          <p:nvPr/>
+        </p:nvSpPr>
+        <p:spPr>
+          <a:xfrm>
+            <a:off x="457200" y="3200400"/>
+            <a:ext cx="365760" cy="365760"/>
+          </a:xfrm>
+          <a:prstGeom prst="rect">
+            <a:avLst/>
+          </a:prstGeom>
+          <a:noFill/>
+          <a:ln/>
+        </p:spPr>
+        <p:txBody>
+          <a:bodyPr wrap="square" rtlCol="0" anchor="ctr"/>
+          <a:lstStyle/>
+          <a:p>
+            <a:pPr indent="0" marL="0">
+              <a:buNone/>
+            </a:pPr>
+            <a:r>
+              <a:rPr lang="en-US" sz="1600" dirty="0">
+                <a:solidFill>
+                  <a:srgbClr val="FFFFFF"/>
+                </a:solidFill>
+                <a:latin typeface="微軟正黑體" pitchFamily="34" charset="0"/>
+                <a:ea typeface="微軟正黑體" pitchFamily="34" charset="-122"/>
+                <a:cs typeface="微軟正黑體" pitchFamily="34" charset="-120"/>
+              </a:rPr>
+              <a:t>☎</a:t>
+            </a:r>
+            <a:endParaRPr lang="en-US" sz="1600" dirty="0"/>
+          </a:p>
+        </p:txBody>
+      </p:sp>
+      <p:sp>
+        <p:nvSpPr>
+          <p:cNvPr id="6" name="Text 4"/>
+          <p:cNvSpPr/>
+          <p:nvPr/>
+        </p:nvSpPr>
+        <p:spPr>
+          <a:xfrm>
+            <a:off x="914400" y="3200400"/>
+            <a:ext cx="3200400" cy="365760"/>
+          </a:xfrm>
+          <a:prstGeom prst="rect">
+            <a:avLst/>
+          </a:prstGeom>
+          <a:noFill/>
+          <a:ln/>
+        </p:spPr>
+        <p:txBody>
+          <a:bodyPr wrap="square" rtlCol="0" anchor="ctr"/>
+          <a:lstStyle/>
+          <a:p>
+            <a:pPr indent="0" marL="0">
+              <a:buNone/>
+            </a:pPr>
+            <a:r>
+              <a:rPr lang="en-US" sz="1400" dirty="0">
+                <a:solidFill>
+                  <a:srgbClr val="FFFFFF"/>
+                </a:solidFill>
+                <a:latin typeface="微軟正黑體" pitchFamily="34" charset="0"/>
+                <a:ea typeface="微軟正黑體" pitchFamily="34" charset="-122"/>
+                <a:cs typeface="微軟正黑體" pitchFamily="34" charset="-120"/>
+              </a:rPr>
+              <a:t>+886-2-77220055</a:t>
+            </a:r>
+            <a:endParaRPr lang="en-US" sz="1400" dirty="0"/>
+          </a:p>
+        </p:txBody>
+      </p:sp>
+      <p:sp>
+        <p:nvSpPr>
+          <p:cNvPr id="7" name="Text 5"/>
+          <p:cNvSpPr/>
+          <p:nvPr/>
+        </p:nvSpPr>
+        <p:spPr>
+          <a:xfrm>
+            <a:off x="457200" y="3703320"/>
+            <a:ext cx="365760" cy="365760"/>
+          </a:xfrm>
+          <a:prstGeom prst="rect">
+            <a:avLst/>
+          </a:prstGeom>
+          <a:noFill/>
+          <a:ln/>
+        </p:spPr>
+        <p:txBody>
+          <a:bodyPr wrap="square" rtlCol="0" anchor="ctr"/>
+          <a:lstStyle/>
+          <a:p>
+            <a:pPr indent="0" marL="0">
+              <a:buNone/>
+            </a:pPr>
+            <a:r>
+              <a:rPr lang="en-US" sz="1600" dirty="0">
+                <a:solidFill>
+                  <a:srgbClr val="FFFFFF"/>
+                </a:solidFill>
+                <a:latin typeface="微軟正黑體" pitchFamily="34" charset="0"/>
+                <a:ea typeface="微軟正黑體" pitchFamily="34" charset="-122"/>
+                <a:cs typeface="微軟正黑體" pitchFamily="34" charset="-120"/>
+              </a:rPr>
+              <a:t>🌐</a:t>
+            </a:r>
+            <a:endParaRPr lang="en-US" sz="1600" dirty="0"/>
+          </a:p>
+        </p:txBody>
+      </p:sp>
+      <p:sp>
+        <p:nvSpPr>
+          <p:cNvPr id="8" name="Text 6"/>
+          <p:cNvSpPr/>
+          <p:nvPr/>
+        </p:nvSpPr>
+        <p:spPr>
+          <a:xfrm>
+            <a:off x="914400" y="3703320"/>
+            <a:ext cx="3200400" cy="365760"/>
+          </a:xfrm>
+          <a:prstGeom prst="rect">
+            <a:avLst/>
+          </a:prstGeom>
+          <a:noFill/>
+          <a:ln/>
+        </p:spPr>
+        <p:txBody>
+          <a:bodyPr wrap="square" rtlCol="0" anchor="ctr"/>
+          <a:lstStyle/>
+          <a:p>
+            <a:pPr indent="0" marL="0">
+              <a:buNone/>
+            </a:pPr>
+            <a:r>
+              <a:rPr lang="en-US" sz="1400" dirty="0">
+                <a:solidFill>
+                  <a:srgbClr val="FFFFFF"/>
+                </a:solidFill>
+                <a:latin typeface="微軟正黑體" pitchFamily="34" charset="0"/>
+                <a:ea typeface="微軟正黑體" pitchFamily="34" charset="-122"/>
+                <a:cs typeface="微軟正黑體" pitchFamily="34" charset="-120"/>
+              </a:rPr>
+              <a:t>www.leyun.cloud</a:t>
+            </a:r>
+            <a:endParaRPr lang="en-US" sz="1400" dirty="0"/>
+          </a:p>
+        </p:txBody>
+      </p:sp>
+      <p:sp>
+        <p:nvSpPr>
+          <p:cNvPr id="9" name="Text 7"/>
+          <p:cNvSpPr/>
+          <p:nvPr/>
+        </p:nvSpPr>
+        <p:spPr>
+          <a:xfrm>
+            <a:off x="457200" y="4206240"/>
+            <a:ext cx="365760" cy="365760"/>
+          </a:xfrm>
+          <a:prstGeom prst="rect">
+            <a:avLst/>
+          </a:prstGeom>
+          <a:noFill/>
+          <a:ln/>
+        </p:spPr>
+        <p:txBody>
+          <a:bodyPr wrap="square" rtlCol="0" anchor="ctr"/>
+          <a:lstStyle/>
+          <a:p>
+            <a:pPr indent="0" marL="0">
+              <a:buNone/>
+            </a:pPr>
+            <a:r>
+              <a:rPr lang="en-US" sz="1600" dirty="0">
+                <a:solidFill>
+                  <a:srgbClr val="FFFFFF"/>
+                </a:solidFill>
+                <a:latin typeface="微軟正黑體" pitchFamily="34" charset="0"/>
+                <a:ea typeface="微軟正黑體" pitchFamily="34" charset="-122"/>
+                <a:cs typeface="微軟正黑體" pitchFamily="34" charset="-120"/>
+              </a:rPr>
+              <a:t>✉</a:t>
+            </a:r>
+            <a:endParaRPr lang="en-US" sz="1600" dirty="0"/>
+          </a:p>
+        </p:txBody>
+      </p:sp>
+      <p:sp>
+        <p:nvSpPr>
+          <p:cNvPr id="10" name="Text 8"/>
+          <p:cNvSpPr/>
+          <p:nvPr/>
+        </p:nvSpPr>
+        <p:spPr>
+          <a:xfrm>
+            <a:off x="914400" y="4206240"/>
+            <a:ext cx="3200400" cy="365760"/>
+          </a:xfrm>
+          <a:prstGeom prst="rect">
+            <a:avLst/>
+          </a:prstGeom>
+          <a:noFill/>
+          <a:ln/>
+        </p:spPr>
+        <p:txBody>
+          <a:bodyPr wrap="square" rtlCol="0" anchor="ctr"/>
+          <a:lstStyle/>
+          <a:p>
+            <a:pPr indent="0" marL="0">
+              <a:buNone/>
+            </a:pPr>
+            <a:r>
+              <a:rPr lang="en-US" sz="1400" dirty="0">
+                <a:solidFill>
+                  <a:srgbClr val="FFFFFF"/>
+                </a:solidFill>
+                <a:latin typeface="微軟正黑體" pitchFamily="34" charset="0"/>
+                <a:ea typeface="微軟正黑體" pitchFamily="34" charset="-122"/>
+                <a:cs typeface="微軟正黑體" pitchFamily="34" charset="-120"/>
+              </a:rPr>
+              <a:t>service@leyun.cloud</a:t>
+            </a:r>
+            <a:endParaRPr lang="en-US" sz="1400" dirty="0"/>
+          </a:p>
+        </p:txBody>
+      </p:sp>
+      <p:sp>
+        <p:nvSpPr>
+          <p:cNvPr id="11" name="Text 9"/>
+          <p:cNvSpPr/>
+          <p:nvPr/>
+        </p:nvSpPr>
+        <p:spPr>
+          <a:xfrm>
+            <a:off x="5029200" y="1554480"/>
+            <a:ext cx="6675120" cy="292608"/>
+          </a:xfrm>
+          <a:prstGeom prst="rect">
+            <a:avLst/>
+          </a:prstGeom>
+          <a:noFill/>
+          <a:ln/>
+        </p:spPr>
+        <p:txBody>
+          <a:bodyPr wrap="square" rtlCol="0" anchor="ctr"/>
+          <a:lstStyle/>
+          <a:p>
+            <a:pPr indent="0" marL="0">
+              <a:buNone/>
+            </a:pPr>
+            <a:r>
+              <a:rPr lang="en-US" sz="1100" dirty="0">
+                <a:solidFill>
+                  <a:srgbClr val="888888"/>
+                </a:solidFill>
+                <a:latin typeface="微軟正黑體" pitchFamily="34" charset="0"/>
+                <a:ea typeface="微軟正黑體" pitchFamily="34" charset="-122"/>
+                <a:cs typeface="微軟正黑體" pitchFamily="34" charset="-120"/>
+              </a:rPr>
+              <a:t>樂雲智能股份有限公司 · LEYUN Intelligence Co., Ltd.</a:t>
+            </a:r>
+            <a:endParaRPr lang="en-US" sz="1100" dirty="0"/>
+          </a:p>
+        </p:txBody>
+      </p:sp>
+      <p:sp>
+        <p:nvSpPr>
+          <p:cNvPr id="12" name="Shape 10"/>
+          <p:cNvSpPr/>
+          <p:nvPr/>
+        </p:nvSpPr>
+        <p:spPr>
+          <a:xfrm>
+            <a:off x="5029200" y="2011680"/>
+            <a:ext cx="91440" cy="1828800"/>
+          </a:xfrm>
+          <a:prstGeom prst="rect">
+            <a:avLst/>
+          </a:prstGeom>
+          <a:solidFill>
+            <a:srgbClr val="F38020"/>
+          </a:solidFill>
+          <a:ln/>
+        </p:spPr>
+      </p:sp>
+      <p:sp>
+        <p:nvSpPr>
+          <p:cNvPr id="13" name="Text 11"/>
+          <p:cNvSpPr/>
+          <p:nvPr/>
+        </p:nvSpPr>
+        <p:spPr>
+          <a:xfrm>
+            <a:off x="5257800" y="2011680"/>
+            <a:ext cx="6492240" cy="1828800"/>
+          </a:xfrm>
+          <a:prstGeom prst="rect">
+            <a:avLst/>
+          </a:prstGeom>
+          <a:noFill/>
+          <a:ln/>
+        </p:spPr>
+        <p:txBody>
+          <a:bodyPr wrap="square" rtlCol="0" anchor="ctr"/>
+          <a:lstStyle/>
+          <a:p>
+            <a:pPr indent="0" marL="0">
+              <a:lnSpc>
+                <a:spcPct val="115000"/>
+              </a:lnSpc>
+              <a:buNone/>
+            </a:pPr>
+            <a:r>
+              <a:rPr lang="en-US" sz="2800" b="1" dirty="0">
+                <a:solidFill>
+                  <a:srgbClr val="1A1A1A"/>
+                </a:solidFill>
+                <a:latin typeface="微軟正黑體" pitchFamily="34" charset="0"/>
+                <a:ea typeface="微軟正黑體" pitchFamily="34" charset="-122"/>
+                <a:cs typeface="微軟正黑體" pitchFamily="34" charset="-120"/>
+              </a:rPr>
+              <a:t>獲取免費諮詢</a:t>
+            </a:r>
+            <a:endParaRPr lang="en-US" sz="2800" dirty="0"/>
+          </a:p>
+          <a:p>
+            <a:pPr indent="0" marL="0">
+              <a:lnSpc>
+                <a:spcPct val="115000"/>
+              </a:lnSpc>
+              <a:buNone/>
+            </a:pPr>
+            <a:r>
+              <a:rPr lang="en-US" sz="2800" b="1" dirty="0">
+                <a:solidFill>
+                  <a:srgbClr val="1A1A1A"/>
+                </a:solidFill>
+                <a:latin typeface="微軟正黑體" pitchFamily="34" charset="0"/>
+                <a:ea typeface="微軟正黑體" pitchFamily="34" charset="-122"/>
+                <a:cs typeface="微軟正黑體" pitchFamily="34" charset="-120"/>
+              </a:rPr>
+              <a:t>與 30 天 PoC 試用</a:t>
+            </a:r>
+            <a:endParaRPr lang="en-US" sz="2800" dirty="0"/>
+          </a:p>
+        </p:txBody>
+      </p:sp>
+      <p:sp>
+        <p:nvSpPr>
+          <p:cNvPr id="14" name="Text 12"/>
+          <p:cNvSpPr/>
+          <p:nvPr/>
+        </p:nvSpPr>
+        <p:spPr>
+          <a:xfrm>
+            <a:off x="5257800" y="3913632"/>
+            <a:ext cx="6492240" cy="457200"/>
+          </a:xfrm>
+          <a:prstGeom prst="rect">
+            <a:avLst/>
+          </a:prstGeom>
+          <a:noFill/>
+          <a:ln/>
+        </p:spPr>
+        <p:txBody>
+          <a:bodyPr wrap="square" rtlCol="0" anchor="ctr"/>
+          <a:lstStyle/>
+          <a:p>
+            <a:pPr indent="0" marL="0">
+              <a:buNone/>
+            </a:pPr>
+            <a:r>
+              <a:rPr lang="en-US" sz="1500" i="1" dirty="0">
+                <a:solidFill>
+                  <a:srgbClr val="444444"/>
+                </a:solidFill>
+                <a:latin typeface="微軟正黑體" pitchFamily="34" charset="0"/>
+                <a:ea typeface="微軟正黑體" pitchFamily="34" charset="-122"/>
+                <a:cs typeface="微軟正黑體" pitchFamily="34" charset="-120"/>
+              </a:rPr>
+              <a:t>本課程講師 Victor Lin · 解決方案事業部主管</a:t>
+            </a:r>
+            <a:endParaRPr lang="en-US" sz="1500" dirty="0"/>
+          </a:p>
+        </p:txBody>
+      </p:sp>
+      <p:sp>
+        <p:nvSpPr>
+          <p:cNvPr id="15" name="Shape 13"/>
+          <p:cNvSpPr/>
+          <p:nvPr/>
+        </p:nvSpPr>
+        <p:spPr>
+          <a:xfrm>
+            <a:off x="5029200" y="4617720"/>
+            <a:ext cx="64008" cy="384048"/>
+          </a:xfrm>
+          <a:prstGeom prst="rect">
+            <a:avLst/>
+          </a:prstGeom>
+          <a:solidFill>
+            <a:srgbClr val="F38020"/>
+          </a:solidFill>
+          <a:ln/>
+        </p:spPr>
+      </p:sp>
+      <p:sp>
+        <p:nvSpPr>
+          <p:cNvPr id="16" name="Text 14"/>
+          <p:cNvSpPr/>
+          <p:nvPr/>
+        </p:nvSpPr>
+        <p:spPr>
+          <a:xfrm>
+            <a:off x="5212080" y="4617720"/>
+            <a:ext cx="6492240" cy="384048"/>
+          </a:xfrm>
+          <a:prstGeom prst="rect">
+            <a:avLst/>
+          </a:prstGeom>
+          <a:noFill/>
+          <a:ln/>
+        </p:spPr>
+        <p:txBody>
+          <a:bodyPr wrap="square" rtlCol="0" anchor="ctr"/>
+          <a:lstStyle/>
+          <a:p>
+            <a:pPr indent="0" marL="0">
+              <a:buNone/>
+            </a:pPr>
+            <a:r>
+              <a:rPr lang="en-US" sz="1400" b="1" dirty="0">
+                <a:solidFill>
+                  <a:srgbClr val="F38020"/>
+                </a:solidFill>
+                <a:latin typeface="微軟正黑體" pitchFamily="34" charset="0"/>
+                <a:ea typeface="微軟正黑體" pitchFamily="34" charset="-122"/>
+                <a:cs typeface="微軟正黑體" pitchFamily="34" charset="-120"/>
+              </a:rPr>
+              <a:t>NEXT STEP — 申請 PoC 環境，或洽詢企業內訓客製化版本</a:t>
+            </a:r>
+            <a:endParaRPr lang="en-US" sz="1400" dirty="0"/>
+          </a:p>
+        </p:txBody>
+      </p:sp>
+      <p:sp>
+        <p:nvSpPr>
+          <p:cNvPr id="17" name="Text 15"/>
+          <p:cNvSpPr/>
+          <p:nvPr/>
+        </p:nvSpPr>
+        <p:spPr>
+          <a:xfrm>
+            <a:off x="5212080" y="5074920"/>
+            <a:ext cx="6492240" cy="320040"/>
+          </a:xfrm>
+          <a:prstGeom prst="rect">
+            <a:avLst/>
+          </a:prstGeom>
+          <a:noFill/>
+          <a:ln/>
+        </p:spPr>
+        <p:txBody>
+          <a:bodyPr wrap="square" rtlCol="0" anchor="ctr"/>
+          <a:lstStyle/>
+          <a:p>
+            <a:pPr indent="0" marL="0">
+              <a:buNone/>
+            </a:pPr>
+            <a:r>
+              <a:rPr lang="en-US" sz="1200" dirty="0">
+                <a:solidFill>
+                  <a:srgbClr val="888888"/>
+                </a:solidFill>
+                <a:latin typeface="微軟正黑體" pitchFamily="34" charset="0"/>
+                <a:ea typeface="微軟正黑體" pitchFamily="34" charset="-122"/>
+                <a:cs typeface="微軟正黑體" pitchFamily="34" charset="-120"/>
+              </a:rPr>
+              <a:t>直接 email：victor@leyun.com.tw  |  或週一至週五 09:00-18:00 來電</a:t>
+            </a:r>
+            <a:endParaRPr lang="en-US" sz="1200" dirty="0"/>
           </a:p>
         </p:txBody>
       </p:sp>

--- a/slides/leyun-intro.pptx
+++ b/slides/leyun-intro.pptx
@@ -10212,7 +10212,7 @@
                 <a:ea typeface="微軟正黑體" pitchFamily="34" charset="-122"/>
                 <a:cs typeface="微軟正黑體" pitchFamily="34" charset="-120"/>
               </a:rPr>
-              <a:t>直接 email：victor@leyun.com.tw  |  或週一至週五 09:00-18:00 來電</a:t>
+              <a:t>直接 email：victor@leyun.cloud  |  或週一至週五 09:00-18:00 來電</a:t>
             </a:r>
             <a:endParaRPr lang="en-US" sz="1200" dirty="0"/>
           </a:p>

--- a/slides/leyun-intro.pptx
+++ b/slides/leyun-intro.pptx
@@ -2252,7 +2252,7 @@
               <a:buNone/>
             </a:pPr>
             <a:r>
-              <a:rPr lang="en-US" sz="2600" b="1" dirty="0">
+              <a:rPr lang="en-US" sz="2200" b="1" dirty="0">
                 <a:solidFill>
                   <a:srgbClr val="F38020"/>
                 </a:solidFill>
@@ -2266,7 +2266,7 @@
               <a:buNone/>
             </a:pPr>
             <a:r>
-              <a:rPr lang="en-US" sz="2600" b="1" dirty="0">
+              <a:rPr lang="en-US" sz="2200" b="1" dirty="0">
                 <a:solidFill>
                   <a:srgbClr val="B0B0B0"/>
                 </a:solidFill>
@@ -2280,7 +2280,7 @@
               <a:buNone/>
             </a:pPr>
             <a:r>
-              <a:rPr lang="en-US" sz="2600" b="1" dirty="0">
+              <a:rPr lang="en-US" sz="2200" b="1" dirty="0">
                 <a:solidFill>
                   <a:srgbClr val="1A1A1A"/>
                 </a:solidFill>
@@ -2290,7 +2290,7 @@
               </a:rPr>
               <a:t>樂雲是誰：台灣資安雲端整合的領航者</a:t>
             </a:r>
-            <a:endParaRPr lang="en-US" sz="2600" dirty="0"/>
+            <a:endParaRPr lang="en-US" sz="2200" dirty="0"/>
           </a:p>
         </p:txBody>
       </p:sp>
@@ -2302,8 +2302,8 @@
         </p:nvSpPr>
         <p:spPr>
           <a:xfrm>
-            <a:off x="457200" y="886968"/>
-            <a:ext cx="4608576" cy="137160"/>
+            <a:off x="457200" y="1042416"/>
+            <a:ext cx="4078224" cy="109728"/>
           </a:xfrm>
           <a:prstGeom prst="rect">
             <a:avLst/>
@@ -2324,8 +2324,8 @@
         </p:nvSpPr>
         <p:spPr>
           <a:xfrm>
-            <a:off x="457200" y="1097280"/>
-            <a:ext cx="8686800" cy="320040"/>
+            <a:off x="457200" y="1225296"/>
+            <a:ext cx="8686800" cy="292608"/>
           </a:xfrm>
           <a:prstGeom prst="rect">
             <a:avLst/>
@@ -2402,12 +2402,12 @@
         </p:nvSpPr>
         <p:spPr>
           <a:xfrm>
-            <a:off x="457200" y="1572768"/>
-            <a:ext cx="11274552" cy="1600200"/>
+            <a:off x="457200" y="1645920"/>
+            <a:ext cx="11274552" cy="1478280"/>
           </a:xfrm>
           <a:prstGeom prst="roundRect">
             <a:avLst>
-              <a:gd name="adj" fmla="val 3429"/>
+              <a:gd name="adj" fmla="val 3711"/>
             </a:avLst>
           </a:prstGeom>
           <a:solidFill>
@@ -2429,8 +2429,8 @@
         </p:nvSpPr>
         <p:spPr>
           <a:xfrm>
-            <a:off x="457200" y="1572768"/>
-            <a:ext cx="502920" cy="1600200"/>
+            <a:off x="457200" y="1645920"/>
+            <a:ext cx="502920" cy="1478280"/>
           </a:xfrm>
           <a:prstGeom prst="rect">
             <a:avLst/>
@@ -2449,8 +2449,8 @@
         </p:nvSpPr>
         <p:spPr>
           <a:xfrm>
-            <a:off x="457200" y="1572768"/>
-            <a:ext cx="502920" cy="1600200"/>
+            <a:off x="457200" y="1645920"/>
+            <a:ext cx="502920" cy="1478280"/>
           </a:xfrm>
           <a:prstGeom prst="rect">
             <a:avLst/>
@@ -2488,7 +2488,7 @@
         </p:nvSpPr>
         <p:spPr>
           <a:xfrm>
-            <a:off x="1143000" y="1682496"/>
+            <a:off x="1143000" y="1755648"/>
             <a:ext cx="8988552" cy="320040"/>
           </a:xfrm>
           <a:prstGeom prst="rect">
@@ -2527,8 +2527,8 @@
         </p:nvSpPr>
         <p:spPr>
           <a:xfrm>
-            <a:off x="1143000" y="2029968"/>
-            <a:ext cx="8988552" cy="1051560"/>
+            <a:off x="1143000" y="2103120"/>
+            <a:ext cx="8988552" cy="929640"/>
           </a:xfrm>
           <a:prstGeom prst="rect">
             <a:avLst/>
@@ -2566,7 +2566,7 @@
         </p:nvSpPr>
         <p:spPr>
           <a:xfrm>
-            <a:off x="10314432" y="1984248"/>
+            <a:off x="10314432" y="1996440"/>
             <a:ext cx="1280160" cy="777240"/>
           </a:xfrm>
           <a:prstGeom prst="roundRect">
@@ -2593,7 +2593,7 @@
         </p:nvSpPr>
         <p:spPr>
           <a:xfrm>
-            <a:off x="10314432" y="2029968"/>
+            <a:off x="10314432" y="2042160"/>
             <a:ext cx="1280160" cy="256032"/>
           </a:xfrm>
           <a:prstGeom prst="rect">
@@ -2632,7 +2632,7 @@
         </p:nvSpPr>
         <p:spPr>
           <a:xfrm>
-            <a:off x="10314432" y="2258568"/>
+            <a:off x="10314432" y="2270760"/>
             <a:ext cx="1280160" cy="457200"/>
           </a:xfrm>
           <a:prstGeom prst="rect">
@@ -2671,12 +2671,12 @@
         </p:nvSpPr>
         <p:spPr>
           <a:xfrm>
-            <a:off x="457200" y="3310128"/>
-            <a:ext cx="11274552" cy="1600200"/>
+            <a:off x="457200" y="3261360"/>
+            <a:ext cx="11274552" cy="1478280"/>
           </a:xfrm>
           <a:prstGeom prst="roundRect">
             <a:avLst>
-              <a:gd name="adj" fmla="val 3429"/>
+              <a:gd name="adj" fmla="val 3711"/>
             </a:avLst>
           </a:prstGeom>
           <a:solidFill>
@@ -2698,8 +2698,8 @@
         </p:nvSpPr>
         <p:spPr>
           <a:xfrm>
-            <a:off x="457200" y="3310128"/>
-            <a:ext cx="502920" cy="1600200"/>
+            <a:off x="457200" y="3261360"/>
+            <a:ext cx="502920" cy="1478280"/>
           </a:xfrm>
           <a:prstGeom prst="rect">
             <a:avLst/>
@@ -2718,8 +2718,8 @@
         </p:nvSpPr>
         <p:spPr>
           <a:xfrm>
-            <a:off x="457200" y="3310128"/>
-            <a:ext cx="502920" cy="1600200"/>
+            <a:off x="457200" y="3261360"/>
+            <a:ext cx="502920" cy="1478280"/>
           </a:xfrm>
           <a:prstGeom prst="rect">
             <a:avLst/>
@@ -2757,7 +2757,7 @@
         </p:nvSpPr>
         <p:spPr>
           <a:xfrm>
-            <a:off x="1143000" y="3419856"/>
+            <a:off x="1143000" y="3371088"/>
             <a:ext cx="8988552" cy="320040"/>
           </a:xfrm>
           <a:prstGeom prst="rect">
@@ -2796,8 +2796,8 @@
         </p:nvSpPr>
         <p:spPr>
           <a:xfrm>
-            <a:off x="1143000" y="3767328"/>
-            <a:ext cx="8988552" cy="1051560"/>
+            <a:off x="1143000" y="3718560"/>
+            <a:ext cx="8988552" cy="929640"/>
           </a:xfrm>
           <a:prstGeom prst="rect">
             <a:avLst/>
@@ -2835,7 +2835,7 @@
         </p:nvSpPr>
         <p:spPr>
           <a:xfrm>
-            <a:off x="10314432" y="3721608"/>
+            <a:off x="10314432" y="3611880"/>
             <a:ext cx="1280160" cy="777240"/>
           </a:xfrm>
           <a:prstGeom prst="roundRect">
@@ -2862,7 +2862,7 @@
         </p:nvSpPr>
         <p:spPr>
           <a:xfrm>
-            <a:off x="10314432" y="3767328"/>
+            <a:off x="10314432" y="3657600"/>
             <a:ext cx="1280160" cy="256032"/>
           </a:xfrm>
           <a:prstGeom prst="rect">
@@ -2901,7 +2901,7 @@
         </p:nvSpPr>
         <p:spPr>
           <a:xfrm>
-            <a:off x="10314432" y="3995928"/>
+            <a:off x="10314432" y="3886200"/>
             <a:ext cx="1280160" cy="457200"/>
           </a:xfrm>
           <a:prstGeom prst="rect">
@@ -2940,12 +2940,12 @@
         </p:nvSpPr>
         <p:spPr>
           <a:xfrm>
-            <a:off x="457200" y="5047488"/>
-            <a:ext cx="11274552" cy="1600200"/>
+            <a:off x="457200" y="4876800"/>
+            <a:ext cx="11274552" cy="1478280"/>
           </a:xfrm>
           <a:prstGeom prst="roundRect">
             <a:avLst>
-              <a:gd name="adj" fmla="val 3429"/>
+              <a:gd name="adj" fmla="val 3711"/>
             </a:avLst>
           </a:prstGeom>
           <a:solidFill>
@@ -2967,14 +2967,14 @@
         </p:nvSpPr>
         <p:spPr>
           <a:xfrm>
-            <a:off x="457200" y="5047488"/>
-            <a:ext cx="502920" cy="1600200"/>
+            <a:off x="457200" y="4876800"/>
+            <a:ext cx="502920" cy="1478280"/>
           </a:xfrm>
           <a:prstGeom prst="rect">
             <a:avLst/>
           </a:prstGeom>
           <a:solidFill>
-            <a:srgbClr val="1E5BC6"/>
+            <a:srgbClr val="8B5CF6"/>
           </a:solidFill>
           <a:ln/>
         </p:spPr>
@@ -2987,8 +2987,8 @@
         </p:nvSpPr>
         <p:spPr>
           <a:xfrm>
-            <a:off x="457200" y="5047488"/>
-            <a:ext cx="502920" cy="1600200"/>
+            <a:off x="457200" y="4876800"/>
+            <a:ext cx="502920" cy="1478280"/>
           </a:xfrm>
           <a:prstGeom prst="rect">
             <a:avLst/>
@@ -3026,7 +3026,7 @@
         </p:nvSpPr>
         <p:spPr>
           <a:xfrm>
-            <a:off x="1143000" y="5157216"/>
+            <a:off x="1143000" y="4986528"/>
             <a:ext cx="8988552" cy="320040"/>
           </a:xfrm>
           <a:prstGeom prst="rect">
@@ -3051,7 +3051,7 @@
                 <a:ea typeface="微軟正黑體" pitchFamily="34" charset="-122"/>
                 <a:cs typeface="微軟正黑體" pitchFamily="34" charset="-120"/>
               </a:rPr>
-              <a:t>台灣在地顧問團隊 × PoC 免費試用</a:t>
+              <a:t>在地技術團隊 × 開源實作分享</a:t>
             </a:r>
             <a:endParaRPr lang="en-US" sz="1500" dirty="0"/>
           </a:p>
@@ -3065,8 +3065,8 @@
         </p:nvSpPr>
         <p:spPr>
           <a:xfrm>
-            <a:off x="1143000" y="5504688"/>
-            <a:ext cx="8988552" cy="1051560"/>
+            <a:off x="1143000" y="5334000"/>
+            <a:ext cx="8988552" cy="929640"/>
           </a:xfrm>
           <a:prstGeom prst="rect">
             <a:avLst/>
@@ -3090,7 +3090,7 @@
                 <a:ea typeface="微軟正黑體" pitchFamily="34" charset="-122"/>
                 <a:cs typeface="微軟正黑體" pitchFamily="34" charset="-120"/>
               </a:rPr>
-              <a:t>本地專屬顧問全程中文溝通，無語言與時差困擾。提供 30 天 PoC 免費試用，讓企業先驗證再採購，降低決策風險。</a:t>
+              <a:t>本地專屬技術團隊全程中文溝通，無語言與時差困擾。樂雲長期投入開源教材與技術社群，本課程即為公開教材的一部分。</a:t>
             </a:r>
             <a:endParaRPr lang="en-US" sz="1100" dirty="0"/>
           </a:p>
@@ -3104,7 +3104,7 @@
         </p:nvSpPr>
         <p:spPr>
           <a:xfrm>
-            <a:off x="10314432" y="5458968"/>
+            <a:off x="10314432" y="5227320"/>
             <a:ext cx="1280160" cy="777240"/>
           </a:xfrm>
           <a:prstGeom prst="roundRect">
@@ -3131,7 +3131,7 @@
         </p:nvSpPr>
         <p:spPr>
           <a:xfrm>
-            <a:off x="10314432" y="5504688"/>
+            <a:off x="10314432" y="5273040"/>
             <a:ext cx="1280160" cy="256032"/>
           </a:xfrm>
           <a:prstGeom prst="rect">
@@ -3156,7 +3156,7 @@
                 <a:ea typeface="微軟正黑體" pitchFamily="34" charset="-122"/>
                 <a:cs typeface="微軟正黑體" pitchFamily="34" charset="-120"/>
               </a:rPr>
-              <a:t>PoC 期間</a:t>
+              <a:t>開放原始碼</a:t>
             </a:r>
             <a:endParaRPr lang="en-US" sz="900" dirty="0"/>
           </a:p>
@@ -3170,7 +3170,7 @@
         </p:nvSpPr>
         <p:spPr>
           <a:xfrm>
-            <a:off x="10314432" y="5733288"/>
+            <a:off x="10314432" y="5501640"/>
             <a:ext cx="1280160" cy="457200"/>
           </a:xfrm>
           <a:prstGeom prst="rect">
@@ -3189,13 +3189,13 @@
             <a:r>
               <a:rPr lang="en-US" sz="2000" b="1" dirty="0">
                 <a:solidFill>
-                  <a:srgbClr val="1E5BC6"/>
-                </a:solidFill>
-                <a:latin typeface="微軟正黑體" pitchFamily="34" charset="0"/>
-                <a:ea typeface="微軟正黑體" pitchFamily="34" charset="-122"/>
-                <a:cs typeface="微軟正黑體" pitchFamily="34" charset="-120"/>
-              </a:rPr>
-              <a:t>30 天</a:t>
+                  <a:srgbClr val="8B5CF6"/>
+                </a:solidFill>
+                <a:latin typeface="微軟正黑體" pitchFamily="34" charset="0"/>
+                <a:ea typeface="微軟正黑體" pitchFamily="34" charset="-122"/>
+                <a:cs typeface="微軟正黑體" pitchFamily="34" charset="-120"/>
+              </a:rPr>
+              <a:t>MIT</a:t>
             </a:r>
             <a:endParaRPr lang="en-US" sz="2000" dirty="0"/>
           </a:p>
@@ -3334,7 +3334,7 @@
               <a:buNone/>
             </a:pPr>
             <a:r>
-              <a:rPr lang="en-US" sz="2600" b="1" dirty="0">
+              <a:rPr lang="en-US" sz="2000" b="1" dirty="0">
                 <a:solidFill>
                   <a:srgbClr val="F38020"/>
                 </a:solidFill>
@@ -3348,7 +3348,7 @@
               <a:buNone/>
             </a:pPr>
             <a:r>
-              <a:rPr lang="en-US" sz="2600" b="1" dirty="0">
+              <a:rPr lang="en-US" sz="2000" b="1" dirty="0">
                 <a:solidFill>
                   <a:srgbClr val="B0B0B0"/>
                 </a:solidFill>
@@ -3362,7 +3362,7 @@
               <a:buNone/>
             </a:pPr>
             <a:r>
-              <a:rPr lang="en-US" sz="2600" b="1" dirty="0">
+              <a:rPr lang="en-US" sz="2000" b="1" dirty="0">
                 <a:solidFill>
                   <a:srgbClr val="1A1A1A"/>
                 </a:solidFill>
@@ -3372,7 +3372,7 @@
               </a:rPr>
               <a:t>樂雲產品矩陣 — 覆蓋資安、雲端、AI 全鏈路</a:t>
             </a:r>
-            <a:endParaRPr lang="en-US" sz="2600" dirty="0"/>
+            <a:endParaRPr lang="en-US" sz="2000" dirty="0"/>
           </a:p>
         </p:txBody>
       </p:sp>
@@ -3384,8 +3384,8 @@
         </p:nvSpPr>
         <p:spPr>
           <a:xfrm>
-            <a:off x="457200" y="886968"/>
-            <a:ext cx="5779008" cy="137160"/>
+            <a:off x="457200" y="1042416"/>
+            <a:ext cx="5102352" cy="109728"/>
           </a:xfrm>
           <a:prstGeom prst="rect">
             <a:avLst/>
@@ -3406,8 +3406,8 @@
         </p:nvSpPr>
         <p:spPr>
           <a:xfrm>
-            <a:off x="457200" y="1097280"/>
-            <a:ext cx="8686800" cy="320040"/>
+            <a:off x="457200" y="1225296"/>
+            <a:ext cx="8686800" cy="292608"/>
           </a:xfrm>
           <a:prstGeom prst="rect">
             <a:avLst/>
@@ -4733,7 +4733,7 @@
               <a:buNone/>
             </a:pPr>
             <a:r>
-              <a:rPr lang="en-US" sz="2600" b="1" dirty="0">
+              <a:rPr lang="en-US" sz="2000" b="1" dirty="0">
                 <a:solidFill>
                   <a:srgbClr val="F38020"/>
                 </a:solidFill>
@@ -4747,7 +4747,7 @@
               <a:buNone/>
             </a:pPr>
             <a:r>
-              <a:rPr lang="en-US" sz="2600" b="1" dirty="0">
+              <a:rPr lang="en-US" sz="2000" b="1" dirty="0">
                 <a:solidFill>
                   <a:srgbClr val="B0B0B0"/>
                 </a:solidFill>
@@ -4761,7 +4761,7 @@
               <a:buNone/>
             </a:pPr>
             <a:r>
-              <a:rPr lang="en-US" sz="2600" b="1" dirty="0">
+              <a:rPr lang="en-US" sz="2000" b="1" dirty="0">
                 <a:solidFill>
                   <a:srgbClr val="1A1A1A"/>
                 </a:solidFill>
@@ -4771,7 +4771,7 @@
               </a:rPr>
               <a:t>樂雲現況指標（2026 Q2）</a:t>
             </a:r>
-            <a:endParaRPr lang="en-US" sz="2600" dirty="0"/>
+            <a:endParaRPr lang="en-US" sz="2000" dirty="0"/>
           </a:p>
         </p:txBody>
       </p:sp>
@@ -4783,8 +4783,8 @@
         </p:nvSpPr>
         <p:spPr>
           <a:xfrm>
-            <a:off x="457200" y="886968"/>
-            <a:ext cx="5486400" cy="137160"/>
+            <a:off x="457200" y="1042416"/>
+            <a:ext cx="4846320" cy="109728"/>
           </a:xfrm>
           <a:prstGeom prst="rect">
             <a:avLst/>
@@ -4805,8 +4805,8 @@
         </p:nvSpPr>
         <p:spPr>
           <a:xfrm>
-            <a:off x="457200" y="1097280"/>
-            <a:ext cx="8686800" cy="320040"/>
+            <a:off x="457200" y="1225296"/>
+            <a:ext cx="8686800" cy="292608"/>
           </a:xfrm>
           <a:prstGeom prst="rect">
             <a:avLst/>
@@ -4883,7 +4883,7 @@
         </p:nvSpPr>
         <p:spPr>
           <a:xfrm>
-            <a:off x="457200" y="1572768"/>
+            <a:off x="457200" y="1645920"/>
             <a:ext cx="2695194" cy="3840480"/>
           </a:xfrm>
           <a:prstGeom prst="roundRect">
@@ -4910,7 +4910,7 @@
         </p:nvSpPr>
         <p:spPr>
           <a:xfrm>
-            <a:off x="457200" y="1618488"/>
+            <a:off x="457200" y="1691640"/>
             <a:ext cx="2695194" cy="2112264"/>
           </a:xfrm>
           <a:prstGeom prst="rect">
@@ -4949,7 +4949,7 @@
         </p:nvSpPr>
         <p:spPr>
           <a:xfrm>
-            <a:off x="457200" y="3877056"/>
+            <a:off x="457200" y="3950208"/>
             <a:ext cx="2695194" cy="1344168"/>
           </a:xfrm>
           <a:prstGeom prst="rect">
@@ -4988,7 +4988,7 @@
         </p:nvSpPr>
         <p:spPr>
           <a:xfrm>
-            <a:off x="3316986" y="1572768"/>
+            <a:off x="3316986" y="1645920"/>
             <a:ext cx="2695194" cy="3840480"/>
           </a:xfrm>
           <a:prstGeom prst="roundRect">
@@ -5015,7 +5015,7 @@
         </p:nvSpPr>
         <p:spPr>
           <a:xfrm>
-            <a:off x="3316986" y="1618488"/>
+            <a:off x="3316986" y="1691640"/>
             <a:ext cx="2695194" cy="2112264"/>
           </a:xfrm>
           <a:prstGeom prst="rect">
@@ -5054,7 +5054,7 @@
         </p:nvSpPr>
         <p:spPr>
           <a:xfrm>
-            <a:off x="3316986" y="3877056"/>
+            <a:off x="3316986" y="3950208"/>
             <a:ext cx="2695194" cy="1344168"/>
           </a:xfrm>
           <a:prstGeom prst="rect">
@@ -5093,7 +5093,7 @@
         </p:nvSpPr>
         <p:spPr>
           <a:xfrm>
-            <a:off x="6176772" y="1572768"/>
+            <a:off x="6176772" y="1645920"/>
             <a:ext cx="2695194" cy="3840480"/>
           </a:xfrm>
           <a:prstGeom prst="roundRect">
@@ -5120,7 +5120,7 @@
         </p:nvSpPr>
         <p:spPr>
           <a:xfrm>
-            <a:off x="6176772" y="1618488"/>
+            <a:off x="6176772" y="1691640"/>
             <a:ext cx="2695194" cy="2112264"/>
           </a:xfrm>
           <a:prstGeom prst="rect">
@@ -5159,7 +5159,7 @@
         </p:nvSpPr>
         <p:spPr>
           <a:xfrm>
-            <a:off x="6176772" y="3877056"/>
+            <a:off x="6176772" y="3950208"/>
             <a:ext cx="2695194" cy="1344168"/>
           </a:xfrm>
           <a:prstGeom prst="rect">
@@ -5198,7 +5198,7 @@
         </p:nvSpPr>
         <p:spPr>
           <a:xfrm>
-            <a:off x="9036558" y="1572768"/>
+            <a:off x="9036558" y="1645920"/>
             <a:ext cx="2695194" cy="3840480"/>
           </a:xfrm>
           <a:prstGeom prst="roundRect">
@@ -5225,7 +5225,7 @@
         </p:nvSpPr>
         <p:spPr>
           <a:xfrm>
-            <a:off x="9036558" y="1618488"/>
+            <a:off x="9036558" y="1691640"/>
             <a:ext cx="2695194" cy="2112264"/>
           </a:xfrm>
           <a:prstGeom prst="rect">
@@ -5264,7 +5264,7 @@
         </p:nvSpPr>
         <p:spPr>
           <a:xfrm>
-            <a:off x="9036558" y="3877056"/>
+            <a:off x="9036558" y="3950208"/>
             <a:ext cx="2695194" cy="1344168"/>
           </a:xfrm>
           <a:prstGeom prst="rect">
@@ -5303,7 +5303,7 @@
         </p:nvSpPr>
         <p:spPr>
           <a:xfrm>
-            <a:off x="457200" y="5522976"/>
+            <a:off x="457200" y="5596128"/>
             <a:ext cx="11274552" cy="411480"/>
           </a:xfrm>
           <a:prstGeom prst="rect">
@@ -5467,7 +5467,7 @@
               <a:buNone/>
             </a:pPr>
             <a:r>
-              <a:rPr lang="en-US" sz="2600" b="1" dirty="0">
+              <a:rPr lang="en-US" sz="2000" b="1" dirty="0">
                 <a:solidFill>
                   <a:srgbClr val="F38020"/>
                 </a:solidFill>
@@ -5481,7 +5481,7 @@
               <a:buNone/>
             </a:pPr>
             <a:r>
-              <a:rPr lang="en-US" sz="2600" b="1" dirty="0">
+              <a:rPr lang="en-US" sz="2000" b="1" dirty="0">
                 <a:solidFill>
                   <a:srgbClr val="B0B0B0"/>
                 </a:solidFill>
@@ -5495,7 +5495,7 @@
               <a:buNone/>
             </a:pPr>
             <a:r>
-              <a:rPr lang="en-US" sz="2600" b="1" dirty="0">
+              <a:rPr lang="en-US" sz="2000" b="1" dirty="0">
                 <a:solidFill>
                   <a:srgbClr val="1A1A1A"/>
                 </a:solidFill>
@@ -5505,7 +5505,7 @@
               </a:rPr>
               <a:t>為什麼樂雲選擇 Cloudflare AI Gateway</a:t>
             </a:r>
-            <a:endParaRPr lang="en-US" sz="2600" dirty="0"/>
+            <a:endParaRPr lang="en-US" sz="2000" dirty="0"/>
           </a:p>
         </p:txBody>
       </p:sp>
@@ -5517,8 +5517,8 @@
         </p:nvSpPr>
         <p:spPr>
           <a:xfrm>
-            <a:off x="457200" y="886968"/>
-            <a:ext cx="8266176" cy="137160"/>
+            <a:off x="457200" y="1042416"/>
+            <a:ext cx="7278624" cy="109728"/>
           </a:xfrm>
           <a:prstGeom prst="rect">
             <a:avLst/>
@@ -5539,8 +5539,8 @@
         </p:nvSpPr>
         <p:spPr>
           <a:xfrm>
-            <a:off x="457200" y="1097280"/>
-            <a:ext cx="8686800" cy="320040"/>
+            <a:off x="457200" y="1225296"/>
+            <a:ext cx="8686800" cy="292608"/>
           </a:xfrm>
           <a:prstGeom prst="rect">
             <a:avLst/>
@@ -5564,7 +5564,7 @@
                 <a:ea typeface="微軟正黑體" pitchFamily="34" charset="-122"/>
                 <a:cs typeface="微軟正黑體" pitchFamily="34" charset="-120"/>
               </a:rPr>
-              <a:t>同類產品比較 — Cloudflare 在 Edge / Governance / TCO 三軸領先</a:t>
+              <a:t>同類產品比較 — Cloudflare 在 Edge / Governance / Open Ecosystem 三軸領先</a:t>
             </a:r>
             <a:endParaRPr lang="en-US" sz="1300" dirty="0"/>
           </a:p>
@@ -5617,8 +5617,8 @@
         </p:nvSpPr>
         <p:spPr>
           <a:xfrm>
-            <a:off x="457200" y="1508760"/>
-            <a:ext cx="3660648" cy="4617720"/>
+            <a:off x="457200" y="1645920"/>
+            <a:ext cx="3660648" cy="4160520"/>
           </a:xfrm>
           <a:prstGeom prst="rect">
             <a:avLst/>
@@ -5642,7 +5642,7 @@
         </p:nvSpPr>
         <p:spPr>
           <a:xfrm>
-            <a:off x="457200" y="1508760"/>
+            <a:off x="457200" y="1645920"/>
             <a:ext cx="3660648" cy="64008"/>
           </a:xfrm>
           <a:prstGeom prst="rect">
@@ -5662,7 +5662,7 @@
         </p:nvSpPr>
         <p:spPr>
           <a:xfrm>
-            <a:off x="457200" y="1645920"/>
+            <a:off x="457200" y="1783080"/>
             <a:ext cx="3660648" cy="457200"/>
           </a:xfrm>
           <a:prstGeom prst="rect">
@@ -5701,7 +5701,7 @@
         </p:nvSpPr>
         <p:spPr>
           <a:xfrm>
-            <a:off x="594360" y="2103120"/>
+            <a:off x="594360" y="2240280"/>
             <a:ext cx="3386328" cy="411480"/>
           </a:xfrm>
           <a:prstGeom prst="rect">
@@ -5740,7 +5740,7 @@
         </p:nvSpPr>
         <p:spPr>
           <a:xfrm>
-            <a:off x="594360" y="2468880"/>
+            <a:off x="594360" y="2606040"/>
             <a:ext cx="3386328" cy="347472"/>
           </a:xfrm>
           <a:prstGeom prst="rect">
@@ -5779,7 +5779,7 @@
         </p:nvSpPr>
         <p:spPr>
           <a:xfrm>
-            <a:off x="594360" y="2807208"/>
+            <a:off x="594360" y="2944368"/>
             <a:ext cx="3386328" cy="347472"/>
           </a:xfrm>
           <a:prstGeom prst="rect">
@@ -5818,7 +5818,7 @@
         </p:nvSpPr>
         <p:spPr>
           <a:xfrm>
-            <a:off x="731520" y="3227832"/>
+            <a:off x="731520" y="3364992"/>
             <a:ext cx="3112008" cy="27432"/>
           </a:xfrm>
           <a:prstGeom prst="rect">
@@ -5838,7 +5838,7 @@
         </p:nvSpPr>
         <p:spPr>
           <a:xfrm>
-            <a:off x="640080" y="3337560"/>
+            <a:off x="640080" y="3474720"/>
             <a:ext cx="3294888" cy="457200"/>
           </a:xfrm>
           <a:prstGeom prst="rect">
@@ -5877,7 +5877,7 @@
         </p:nvSpPr>
         <p:spPr>
           <a:xfrm>
-            <a:off x="640080" y="3840480"/>
+            <a:off x="640080" y="3977640"/>
             <a:ext cx="3294888" cy="457200"/>
           </a:xfrm>
           <a:prstGeom prst="rect">
@@ -5916,7 +5916,7 @@
         </p:nvSpPr>
         <p:spPr>
           <a:xfrm>
-            <a:off x="640080" y="4343400"/>
+            <a:off x="640080" y="4480560"/>
             <a:ext cx="3294888" cy="457200"/>
           </a:xfrm>
           <a:prstGeom prst="rect">
@@ -5955,7 +5955,7 @@
         </p:nvSpPr>
         <p:spPr>
           <a:xfrm>
-            <a:off x="640080" y="4846320"/>
+            <a:off x="640080" y="4983480"/>
             <a:ext cx="3294888" cy="457200"/>
           </a:xfrm>
           <a:prstGeom prst="rect">
@@ -5994,7 +5994,7 @@
         </p:nvSpPr>
         <p:spPr>
           <a:xfrm>
-            <a:off x="640080" y="5349240"/>
+            <a:off x="640080" y="5486400"/>
             <a:ext cx="3294888" cy="457200"/>
           </a:xfrm>
           <a:prstGeom prst="rect">
@@ -6033,7 +6033,7 @@
         </p:nvSpPr>
         <p:spPr>
           <a:xfrm>
-            <a:off x="640080" y="5349240"/>
+            <a:off x="640080" y="5029200"/>
             <a:ext cx="3294888" cy="658368"/>
           </a:xfrm>
           <a:prstGeom prst="rect">
@@ -6053,7 +6053,7 @@
         </p:nvSpPr>
         <p:spPr>
           <a:xfrm>
-            <a:off x="640080" y="5349240"/>
+            <a:off x="640080" y="5029200"/>
             <a:ext cx="3294888" cy="384048"/>
           </a:xfrm>
           <a:prstGeom prst="rect">
@@ -6092,7 +6092,7 @@
         </p:nvSpPr>
         <p:spPr>
           <a:xfrm>
-            <a:off x="640080" y="5715000"/>
+            <a:off x="640080" y="5394960"/>
             <a:ext cx="3294888" cy="292608"/>
           </a:xfrm>
           <a:prstGeom prst="rect">
@@ -6131,8 +6131,8 @@
         </p:nvSpPr>
         <p:spPr>
           <a:xfrm>
-            <a:off x="4264152" y="1508760"/>
-            <a:ext cx="3660648" cy="4617720"/>
+            <a:off x="4264152" y="1645920"/>
+            <a:ext cx="3660648" cy="4160520"/>
           </a:xfrm>
           <a:prstGeom prst="rect">
             <a:avLst/>
@@ -6156,7 +6156,7 @@
         </p:nvSpPr>
         <p:spPr>
           <a:xfrm>
-            <a:off x="4264152" y="1508760"/>
+            <a:off x="4264152" y="1645920"/>
             <a:ext cx="3660648" cy="64008"/>
           </a:xfrm>
           <a:prstGeom prst="rect">
@@ -6176,7 +6176,7 @@
         </p:nvSpPr>
         <p:spPr>
           <a:xfrm>
-            <a:off x="4264152" y="1645920"/>
+            <a:off x="4264152" y="1783080"/>
             <a:ext cx="3660648" cy="457200"/>
           </a:xfrm>
           <a:prstGeom prst="rect">
@@ -6215,7 +6215,7 @@
         </p:nvSpPr>
         <p:spPr>
           <a:xfrm>
-            <a:off x="4401312" y="2103120"/>
+            <a:off x="4401312" y="2240280"/>
             <a:ext cx="3386328" cy="411480"/>
           </a:xfrm>
           <a:prstGeom prst="rect">
@@ -6254,7 +6254,7 @@
         </p:nvSpPr>
         <p:spPr>
           <a:xfrm>
-            <a:off x="4401312" y="2468880"/>
+            <a:off x="4401312" y="2606040"/>
             <a:ext cx="3386328" cy="347472"/>
           </a:xfrm>
           <a:prstGeom prst="rect">
@@ -6293,7 +6293,7 @@
         </p:nvSpPr>
         <p:spPr>
           <a:xfrm>
-            <a:off x="4401312" y="2807208"/>
+            <a:off x="4401312" y="2944368"/>
             <a:ext cx="3386328" cy="347472"/>
           </a:xfrm>
           <a:prstGeom prst="rect">
@@ -6332,7 +6332,7 @@
         </p:nvSpPr>
         <p:spPr>
           <a:xfrm>
-            <a:off x="4538472" y="3227832"/>
+            <a:off x="4538472" y="3364992"/>
             <a:ext cx="3112008" cy="27432"/>
           </a:xfrm>
           <a:prstGeom prst="rect">
@@ -6352,7 +6352,7 @@
         </p:nvSpPr>
         <p:spPr>
           <a:xfrm>
-            <a:off x="4447032" y="3337560"/>
+            <a:off x="4447032" y="3474720"/>
             <a:ext cx="3294888" cy="457200"/>
           </a:xfrm>
           <a:prstGeom prst="rect">
@@ -6391,7 +6391,7 @@
         </p:nvSpPr>
         <p:spPr>
           <a:xfrm>
-            <a:off x="4447032" y="3840480"/>
+            <a:off x="4447032" y="3977640"/>
             <a:ext cx="3294888" cy="457200"/>
           </a:xfrm>
           <a:prstGeom prst="rect">
@@ -6430,7 +6430,7 @@
         </p:nvSpPr>
         <p:spPr>
           <a:xfrm>
-            <a:off x="4447032" y="4343400"/>
+            <a:off x="4447032" y="4480560"/>
             <a:ext cx="3294888" cy="457200"/>
           </a:xfrm>
           <a:prstGeom prst="rect">
@@ -6469,7 +6469,7 @@
         </p:nvSpPr>
         <p:spPr>
           <a:xfrm>
-            <a:off x="4447032" y="4846320"/>
+            <a:off x="4447032" y="4983480"/>
             <a:ext cx="3294888" cy="457200"/>
           </a:xfrm>
           <a:prstGeom prst="rect">
@@ -6508,7 +6508,7 @@
         </p:nvSpPr>
         <p:spPr>
           <a:xfrm>
-            <a:off x="4447032" y="5349240"/>
+            <a:off x="4447032" y="5486400"/>
             <a:ext cx="3294888" cy="457200"/>
           </a:xfrm>
           <a:prstGeom prst="rect">
@@ -6547,7 +6547,7 @@
         </p:nvSpPr>
         <p:spPr>
           <a:xfrm>
-            <a:off x="4447032" y="5349240"/>
+            <a:off x="4447032" y="5029200"/>
             <a:ext cx="3294888" cy="658368"/>
           </a:xfrm>
           <a:prstGeom prst="rect">
@@ -6567,7 +6567,7 @@
         </p:nvSpPr>
         <p:spPr>
           <a:xfrm>
-            <a:off x="4447032" y="5349240"/>
+            <a:off x="4447032" y="5029200"/>
             <a:ext cx="3294888" cy="384048"/>
           </a:xfrm>
           <a:prstGeom prst="rect">
@@ -6606,7 +6606,7 @@
         </p:nvSpPr>
         <p:spPr>
           <a:xfrm>
-            <a:off x="4447032" y="5715000"/>
+            <a:off x="4447032" y="5394960"/>
             <a:ext cx="3294888" cy="292608"/>
           </a:xfrm>
           <a:prstGeom prst="rect">
@@ -6645,7 +6645,7 @@
         </p:nvSpPr>
         <p:spPr>
           <a:xfrm>
-            <a:off x="5180076" y="1234440"/>
+            <a:off x="5180076" y="1371600"/>
             <a:ext cx="1828800" cy="320040"/>
           </a:xfrm>
           <a:prstGeom prst="rect">
@@ -6665,7 +6665,7 @@
         </p:nvSpPr>
         <p:spPr>
           <a:xfrm>
-            <a:off x="5180076" y="1234440"/>
+            <a:off x="5180076" y="1371600"/>
             <a:ext cx="1828800" cy="320040"/>
           </a:xfrm>
           <a:prstGeom prst="rect">
@@ -6704,8 +6704,8 @@
         </p:nvSpPr>
         <p:spPr>
           <a:xfrm>
-            <a:off x="8071104" y="1508760"/>
-            <a:ext cx="3660648" cy="4617720"/>
+            <a:off x="8071104" y="1645920"/>
+            <a:ext cx="3660648" cy="4160520"/>
           </a:xfrm>
           <a:prstGeom prst="rect">
             <a:avLst/>
@@ -6729,7 +6729,7 @@
         </p:nvSpPr>
         <p:spPr>
           <a:xfrm>
-            <a:off x="8071104" y="1508760"/>
+            <a:off x="8071104" y="1645920"/>
             <a:ext cx="3660648" cy="64008"/>
           </a:xfrm>
           <a:prstGeom prst="rect">
@@ -6749,7 +6749,7 @@
         </p:nvSpPr>
         <p:spPr>
           <a:xfrm>
-            <a:off x="8071104" y="1645920"/>
+            <a:off x="8071104" y="1783080"/>
             <a:ext cx="3660648" cy="457200"/>
           </a:xfrm>
           <a:prstGeom prst="rect">
@@ -6774,7 +6774,7 @@
                 <a:ea typeface="微軟正黑體" pitchFamily="34" charset="-122"/>
                 <a:cs typeface="微軟正黑體" pitchFamily="34" charset="-120"/>
               </a:rPr>
-              <a:t>💰</a:t>
+              <a:t>🌐</a:t>
             </a:r>
             <a:endParaRPr lang="en-US" sz="2000" dirty="0"/>
           </a:p>
@@ -6788,7 +6788,7 @@
         </p:nvSpPr>
         <p:spPr>
           <a:xfrm>
-            <a:off x="8208264" y="2103120"/>
+            <a:off x="8208264" y="2240280"/>
             <a:ext cx="3386328" cy="411480"/>
           </a:xfrm>
           <a:prstGeom prst="rect">
@@ -6827,7 +6827,7 @@
         </p:nvSpPr>
         <p:spPr>
           <a:xfrm>
-            <a:off x="8208264" y="2468880"/>
+            <a:off x="8208264" y="2606040"/>
             <a:ext cx="3386328" cy="347472"/>
           </a:xfrm>
           <a:prstGeom prst="rect">
@@ -6852,7 +6852,7 @@
                 <a:ea typeface="微軟正黑體" pitchFamily="34" charset="-122"/>
                 <a:cs typeface="微軟正黑體" pitchFamily="34" charset="-120"/>
               </a:rPr>
-              <a:t>TCO 最優</a:t>
+              <a:t>Open Ecosystem</a:t>
             </a:r>
             <a:endParaRPr lang="en-US" sz="1300" dirty="0"/>
           </a:p>
@@ -6866,7 +6866,7 @@
         </p:nvSpPr>
         <p:spPr>
           <a:xfrm>
-            <a:off x="8208264" y="2807208"/>
+            <a:off x="8208264" y="2944368"/>
             <a:ext cx="3386328" cy="347472"/>
           </a:xfrm>
           <a:prstGeom prst="rect">
@@ -6891,7 +6891,7 @@
                 <a:ea typeface="微軟正黑體" pitchFamily="34" charset="-122"/>
                 <a:cs typeface="微軟正黑體" pitchFamily="34" charset="-120"/>
               </a:rPr>
-              <a:t>免費 tier + 按用量計費</a:t>
+              <a:t>標準協議 + 多家 provider</a:t>
             </a:r>
             <a:endParaRPr lang="en-US" sz="1000" dirty="0"/>
           </a:p>
@@ -6905,7 +6905,7 @@
         </p:nvSpPr>
         <p:spPr>
           <a:xfrm>
-            <a:off x="8345424" y="3227832"/>
+            <a:off x="8345424" y="3364992"/>
             <a:ext cx="3112008" cy="27432"/>
           </a:xfrm>
           <a:prstGeom prst="rect">
@@ -6925,7 +6925,7 @@
         </p:nvSpPr>
         <p:spPr>
           <a:xfrm>
-            <a:off x="8253984" y="3337560"/>
+            <a:off x="8253984" y="3474720"/>
             <a:ext cx="3294888" cy="457200"/>
           </a:xfrm>
           <a:prstGeom prst="rect">
@@ -6950,7 +6950,7 @@
                 <a:ea typeface="微軟正黑體" pitchFamily="34" charset="-122"/>
                 <a:cs typeface="微軟正黑體" pitchFamily="34" charset="-120"/>
               </a:rPr>
-              <a:t>▸  Gateway 本身免費（10k req/day）</a:t>
+              <a:t>▸  MCP 標準工具呼叫協議</a:t>
             </a:r>
             <a:endParaRPr lang="en-US" sz="1100" dirty="0"/>
           </a:p>
@@ -6964,7 +6964,7 @@
         </p:nvSpPr>
         <p:spPr>
           <a:xfrm>
-            <a:off x="8253984" y="3840480"/>
+            <a:off x="8253984" y="3977640"/>
             <a:ext cx="3294888" cy="457200"/>
           </a:xfrm>
           <a:prstGeom prst="rect">
@@ -6989,7 +6989,7 @@
                 <a:ea typeface="微軟正黑體" pitchFamily="34" charset="-122"/>
                 <a:cs typeface="微軟正黑體" pitchFamily="34" charset="-120"/>
               </a:rPr>
-              <a:t>▸  Cache 命中 0 成本</a:t>
+              <a:t>▸  相容 OpenAI / Anthropic / Google</a:t>
             </a:r>
             <a:endParaRPr lang="en-US" sz="1100" dirty="0"/>
           </a:p>
@@ -7003,7 +7003,7 @@
         </p:nvSpPr>
         <p:spPr>
           <a:xfrm>
-            <a:off x="8253984" y="4343400"/>
+            <a:off x="8253984" y="4480560"/>
             <a:ext cx="3294888" cy="457200"/>
           </a:xfrm>
           <a:prstGeom prst="rect">
@@ -7028,7 +7028,7 @@
                 <a:ea typeface="微軟正黑體" pitchFamily="34" charset="-122"/>
                 <a:cs typeface="微軟正黑體" pitchFamily="34" charset="-120"/>
               </a:rPr>
-              <a:t>▸  無 minimum spend</a:t>
+              <a:t>▸  Workers AI 邊緣推論一併使用</a:t>
             </a:r>
             <a:endParaRPr lang="en-US" sz="1100" dirty="0"/>
           </a:p>
@@ -7042,7 +7042,7 @@
         </p:nvSpPr>
         <p:spPr>
           <a:xfrm>
-            <a:off x="8253984" y="4846320"/>
+            <a:off x="8253984" y="4983480"/>
             <a:ext cx="3294888" cy="457200"/>
           </a:xfrm>
           <a:prstGeom prst="rect">
@@ -7067,7 +7067,7 @@
                 <a:ea typeface="微軟正黑體" pitchFamily="34" charset="-122"/>
                 <a:cs typeface="微軟正黑體" pitchFamily="34" charset="-120"/>
               </a:rPr>
-              <a:t>▸  成本可視性 + 月度報告</a:t>
+              <a:t>▸  工具開發者社群活躍</a:t>
             </a:r>
             <a:endParaRPr lang="en-US" sz="1100" dirty="0"/>
           </a:p>
@@ -7081,7 +7081,7 @@
         </p:nvSpPr>
         <p:spPr>
           <a:xfrm>
-            <a:off x="8253984" y="5349240"/>
+            <a:off x="8253984" y="5486400"/>
             <a:ext cx="3294888" cy="457200"/>
           </a:xfrm>
           <a:prstGeom prst="rect">
@@ -7106,7 +7106,7 @@
                 <a:ea typeface="微軟正黑體" pitchFamily="34" charset="-122"/>
                 <a:cs typeface="微軟正黑體" pitchFamily="34" charset="-120"/>
               </a:rPr>
-              <a:t>▸  取代多家自建 LLM proxy</a:t>
+              <a:t>▸  完整官方文件 + 教學範例</a:t>
             </a:r>
             <a:endParaRPr lang="en-US" sz="1100" dirty="0"/>
           </a:p>
@@ -7120,7 +7120,7 @@
         </p:nvSpPr>
         <p:spPr>
           <a:xfrm>
-            <a:off x="8253984" y="5349240"/>
+            <a:off x="8253984" y="5029200"/>
             <a:ext cx="3294888" cy="658368"/>
           </a:xfrm>
           <a:prstGeom prst="rect">
@@ -7140,7 +7140,7 @@
         </p:nvSpPr>
         <p:spPr>
           <a:xfrm>
-            <a:off x="8253984" y="5349240"/>
+            <a:off x="8253984" y="5029200"/>
             <a:ext cx="3294888" cy="384048"/>
           </a:xfrm>
           <a:prstGeom prst="rect">
@@ -7165,7 +7165,7 @@
                 <a:ea typeface="Calibri" pitchFamily="34" charset="-122"/>
                 <a:cs typeface="Calibri" pitchFamily="34" charset="-120"/>
               </a:rPr>
-              <a:t>NT$0</a:t>
+              <a:t>MCP</a:t>
             </a:r>
             <a:endParaRPr lang="en-US" sz="1800" dirty="0"/>
           </a:p>
@@ -7179,7 +7179,7 @@
         </p:nvSpPr>
         <p:spPr>
           <a:xfrm>
-            <a:off x="8253984" y="5715000"/>
+            <a:off x="8253984" y="5394960"/>
             <a:ext cx="3294888" cy="292608"/>
           </a:xfrm>
           <a:prstGeom prst="rect">
@@ -7204,7 +7204,7 @@
                 <a:ea typeface="微軟正黑體" pitchFamily="34" charset="-122"/>
                 <a:cs typeface="微軟正黑體" pitchFamily="34" charset="-120"/>
               </a:rPr>
-              <a:t>Gateway 月費</a:t>
+              <a:t>開放協議</a:t>
             </a:r>
             <a:endParaRPr lang="en-US" sz="1000" dirty="0"/>
           </a:p>
@@ -7218,7 +7218,7 @@
         </p:nvSpPr>
         <p:spPr>
           <a:xfrm>
-            <a:off x="457200" y="6236208"/>
+            <a:off x="457200" y="5916168"/>
             <a:ext cx="11274552" cy="347472"/>
           </a:xfrm>
           <a:prstGeom prst="roundRect">
@@ -7240,7 +7240,7 @@
         </p:nvSpPr>
         <p:spPr>
           <a:xfrm>
-            <a:off x="457200" y="6236208"/>
+            <a:off x="457200" y="5916168"/>
             <a:ext cx="54864" cy="347472"/>
           </a:xfrm>
           <a:prstGeom prst="rect">
@@ -7260,7 +7260,7 @@
         </p:nvSpPr>
         <p:spPr>
           <a:xfrm>
-            <a:off x="640080" y="6236208"/>
+            <a:off x="640080" y="5916168"/>
             <a:ext cx="11000232" cy="347472"/>
           </a:xfrm>
           <a:prstGeom prst="rect">
@@ -7424,7 +7424,7 @@
               <a:buNone/>
             </a:pPr>
             <a:r>
-              <a:rPr lang="en-US" sz="2600" b="1" dirty="0">
+              <a:rPr lang="en-US" sz="2000" b="1" dirty="0">
                 <a:solidFill>
                   <a:srgbClr val="F38020"/>
                 </a:solidFill>
@@ -7432,13 +7432,13 @@
                 <a:ea typeface="Calibri" pitchFamily="34" charset="-122"/>
                 <a:cs typeface="Calibri" pitchFamily="34" charset="-120"/>
               </a:rPr>
-              <a:t>LEYUN AIGW SERVICE TIERS</a:t>
-            </a:r>
-            <a:pPr indent="0" marL="0">
-              <a:buNone/>
-            </a:pPr>
-            <a:r>
-              <a:rPr lang="en-US" sz="2600" b="1" dirty="0">
+              <a:t>TECH × BUSINESS MODEL</a:t>
+            </a:r>
+            <a:pPr indent="0" marL="0">
+              <a:buNone/>
+            </a:pPr>
+            <a:r>
+              <a:rPr lang="en-US" sz="2000" b="1" dirty="0">
                 <a:solidFill>
                   <a:srgbClr val="B0B0B0"/>
                 </a:solidFill>
@@ -7452,7 +7452,7 @@
               <a:buNone/>
             </a:pPr>
             <a:r>
-              <a:rPr lang="en-US" sz="2600" b="1" dirty="0">
+              <a:rPr lang="en-US" sz="2000" b="1" dirty="0">
                 <a:solidFill>
                   <a:srgbClr val="1A1A1A"/>
                 </a:solidFill>
@@ -7460,9 +7460,9 @@
                 <a:ea typeface="微軟正黑體" pitchFamily="34" charset="-122"/>
                 <a:cs typeface="微軟正黑體" pitchFamily="34" charset="-120"/>
               </a:rPr>
-              <a:t>樂雲 AI Gateway 商用方案三層分級</a:t>
-            </a:r>
-            <a:endParaRPr lang="en-US" sz="2600" dirty="0"/>
+              <a:t>樂雲 AI Gateway 的技術定位與商業模式</a:t>
+            </a:r>
+            <a:endParaRPr lang="en-US" sz="2000" dirty="0"/>
           </a:p>
         </p:txBody>
       </p:sp>
@@ -7474,8 +7474,8 @@
         </p:nvSpPr>
         <p:spPr>
           <a:xfrm>
-            <a:off x="457200" y="886968"/>
-            <a:ext cx="7095744" cy="137160"/>
+            <a:off x="457200" y="1042416"/>
+            <a:ext cx="6126480" cy="109728"/>
           </a:xfrm>
           <a:prstGeom prst="rect">
             <a:avLst/>
@@ -7496,8 +7496,8 @@
         </p:nvSpPr>
         <p:spPr>
           <a:xfrm>
-            <a:off x="457200" y="1097280"/>
-            <a:ext cx="8686800" cy="320040"/>
+            <a:off x="457200" y="1225296"/>
+            <a:ext cx="8686800" cy="292608"/>
           </a:xfrm>
           <a:prstGeom prst="rect">
             <a:avLst/>
@@ -7521,7 +7521,7 @@
                 <a:ea typeface="微軟正黑體" pitchFamily="34" charset="-122"/>
                 <a:cs typeface="微軟正黑體" pitchFamily="34" charset="-120"/>
               </a:rPr>
-              <a:t>對應企業 AI 治理成熟度的三年陪伴模型 — 從 PoC 到全廠</a:t>
+              <a:t>理解「為什麼這個技術可以變成可持續服務」— Cloud Native 時代的 B2B 軟體商業邏輯</a:t>
             </a:r>
             <a:endParaRPr lang="en-US" sz="1300" dirty="0"/>
           </a:p>
@@ -7574,18 +7574,18 @@
         </p:nvSpPr>
         <p:spPr>
           <a:xfrm>
-            <a:off x="457200" y="1554480"/>
-            <a:ext cx="3657600" cy="4297680"/>
+            <a:off x="457200" y="1691640"/>
+            <a:ext cx="5486400" cy="4389120"/>
           </a:xfrm>
           <a:prstGeom prst="roundRect">
             <a:avLst>
-              <a:gd name="adj" fmla="val 2500"/>
+              <a:gd name="adj" fmla="val 2083"/>
             </a:avLst>
           </a:prstGeom>
           <a:solidFill>
-            <a:srgbClr val="FFFFFF"/>
+            <a:srgbClr val="FAFBFC"/>
           </a:solidFill>
-          <a:ln w="12700">
+          <a:ln w="19050">
             <a:solidFill>
               <a:srgbClr val="10B981"/>
             </a:solidFill>
@@ -7595,14 +7595,93 @@
       </p:sp>
       <p:sp>
         <p:nvSpPr>
-          <p:cNvPr id="10" name="Text 7"/>
+          <p:cNvPr id="10" name="Shape 7"/>
           <p:cNvSpPr/>
           <p:nvPr/>
         </p:nvSpPr>
         <p:spPr>
           <a:xfrm>
             <a:off x="457200" y="1691640"/>
-            <a:ext cx="3657600" cy="457200"/>
+            <a:ext cx="5486400" cy="548640"/>
+          </a:xfrm>
+          <a:prstGeom prst="rect">
+            <a:avLst/>
+          </a:prstGeom>
+          <a:solidFill>
+            <a:srgbClr val="10B981"/>
+          </a:solidFill>
+          <a:ln/>
+        </p:spPr>
+      </p:sp>
+      <p:sp>
+        <p:nvSpPr>
+          <p:cNvPr id="11" name="Text 8"/>
+          <p:cNvSpPr/>
+          <p:nvPr/>
+        </p:nvSpPr>
+        <p:spPr>
+          <a:xfrm>
+            <a:off x="640080" y="1691640"/>
+            <a:ext cx="5120640" cy="548640"/>
+          </a:xfrm>
+          <a:prstGeom prst="rect">
+            <a:avLst/>
+          </a:prstGeom>
+          <a:noFill/>
+          <a:ln/>
+        </p:spPr>
+        <p:txBody>
+          <a:bodyPr wrap="square" rtlCol="0" anchor="ctr"/>
+          <a:lstStyle/>
+          <a:p>
+            <a:pPr indent="0" marL="0">
+              <a:buNone/>
+            </a:pPr>
+            <a:r>
+              <a:rPr lang="en-US" sz="1600" b="1" dirty="0">
+                <a:solidFill>
+                  <a:srgbClr val="FFFFFF"/>
+                </a:solidFill>
+                <a:latin typeface="微軟正黑體" pitchFamily="34" charset="0"/>
+                <a:ea typeface="微軟正黑體" pitchFamily="34" charset="-122"/>
+                <a:cs typeface="微軟正黑體" pitchFamily="34" charset="-120"/>
+              </a:rPr>
+              <a:t>🛠  技術角度</a:t>
+            </a:r>
+            <a:endParaRPr lang="en-US" sz="1600" dirty="0"/>
+          </a:p>
+        </p:txBody>
+      </p:sp>
+      <p:sp>
+        <p:nvSpPr>
+          <p:cNvPr id="12" name="Shape 9"/>
+          <p:cNvSpPr/>
+          <p:nvPr/>
+        </p:nvSpPr>
+        <p:spPr>
+          <a:xfrm>
+            <a:off x="640080" y="2423160"/>
+            <a:ext cx="292608" cy="292608"/>
+          </a:xfrm>
+          <a:prstGeom prst="ellipse">
+            <a:avLst/>
+          </a:prstGeom>
+          <a:solidFill>
+            <a:srgbClr val="10B981"/>
+          </a:solidFill>
+          <a:ln/>
+        </p:spPr>
+      </p:sp>
+      <p:sp>
+        <p:nvSpPr>
+          <p:cNvPr id="13" name="Text 10"/>
+          <p:cNvSpPr/>
+          <p:nvPr/>
+        </p:nvSpPr>
+        <p:spPr>
+          <a:xfrm>
+            <a:off x="640080" y="2423160"/>
+            <a:ext cx="292608" cy="292608"/>
           </a:xfrm>
           <a:prstGeom prst="rect">
             <a:avLst/>
@@ -7618,54 +7697,54 @@
               <a:buNone/>
             </a:pPr>
             <a:r>
-              <a:rPr lang="en-US" sz="2200" b="1" dirty="0">
-                <a:solidFill>
-                  <a:srgbClr val="10B981"/>
+              <a:rPr lang="en-US" sz="1200" b="1" dirty="0">
+                <a:solidFill>
+                  <a:srgbClr val="FFFFFF"/>
                 </a:solidFill>
                 <a:latin typeface="Calibri" pitchFamily="34" charset="0"/>
                 <a:ea typeface="Calibri" pitchFamily="34" charset="-122"/>
                 <a:cs typeface="Calibri" pitchFamily="34" charset="-120"/>
               </a:rPr>
-              <a:t>Basic</a:t>
-            </a:r>
-            <a:endParaRPr lang="en-US" sz="2200" dirty="0"/>
-          </a:p>
-        </p:txBody>
-      </p:sp>
-      <p:sp>
-        <p:nvSpPr>
-          <p:cNvPr id="11" name="Text 8"/>
-          <p:cNvSpPr/>
-          <p:nvPr/>
-        </p:nvSpPr>
-        <p:spPr>
-          <a:xfrm>
-            <a:off x="457200" y="2148840"/>
-            <a:ext cx="3657600" cy="274320"/>
-          </a:xfrm>
-          <a:prstGeom prst="rect">
-            <a:avLst/>
-          </a:prstGeom>
-          <a:noFill/>
-          <a:ln/>
-        </p:spPr>
-        <p:txBody>
-          <a:bodyPr wrap="square" rtlCol="0" anchor="ctr"/>
-          <a:lstStyle/>
-          <a:p>
-            <a:pPr algn="ctr" indent="0" marL="0">
-              <a:buNone/>
-            </a:pPr>
-            <a:r>
-              <a:rPr lang="en-US" sz="1300" dirty="0">
-                <a:solidFill>
-                  <a:srgbClr val="10B981"/>
-                </a:solidFill>
-                <a:latin typeface="微軟正黑體" pitchFamily="34" charset="0"/>
-                <a:ea typeface="微軟正黑體" pitchFamily="34" charset="-122"/>
-                <a:cs typeface="微軟正黑體" pitchFamily="34" charset="-120"/>
-              </a:rPr>
-              <a:t>合規啟航</a:t>
+              <a:t>1</a:t>
+            </a:r>
+            <a:endParaRPr lang="en-US" sz="1200" dirty="0"/>
+          </a:p>
+        </p:txBody>
+      </p:sp>
+      <p:sp>
+        <p:nvSpPr>
+          <p:cNvPr id="14" name="Text 11"/>
+          <p:cNvSpPr/>
+          <p:nvPr/>
+        </p:nvSpPr>
+        <p:spPr>
+          <a:xfrm>
+            <a:off x="1005840" y="2377440"/>
+            <a:ext cx="4754880" cy="292608"/>
+          </a:xfrm>
+          <a:prstGeom prst="rect">
+            <a:avLst/>
+          </a:prstGeom>
+          <a:noFill/>
+          <a:ln/>
+        </p:spPr>
+        <p:txBody>
+          <a:bodyPr wrap="square" rtlCol="0" anchor="ctr"/>
+          <a:lstStyle/>
+          <a:p>
+            <a:pPr indent="0" marL="0">
+              <a:buNone/>
+            </a:pPr>
+            <a:r>
+              <a:rPr lang="en-US" sz="1300" b="1" dirty="0">
+                <a:solidFill>
+                  <a:srgbClr val="1A1A1A"/>
+                </a:solidFill>
+                <a:latin typeface="微軟正黑體" pitchFamily="34" charset="0"/>
+                <a:ea typeface="微軟正黑體" pitchFamily="34" charset="-122"/>
+                <a:cs typeface="微軟正黑體" pitchFamily="34" charset="-120"/>
+              </a:rPr>
+              <a:t>Edge Native</a:t>
             </a:r>
             <a:endParaRPr lang="en-US" sz="1300" dirty="0"/>
           </a:p>
@@ -7673,16 +7752,55 @@
       </p:sp>
       <p:sp>
         <p:nvSpPr>
-          <p:cNvPr id="12" name="Shape 9"/>
-          <p:cNvSpPr/>
-          <p:nvPr/>
-        </p:nvSpPr>
-        <p:spPr>
-          <a:xfrm>
-            <a:off x="914400" y="2468880"/>
-            <a:ext cx="2743200" cy="18288"/>
-          </a:xfrm>
-          <a:prstGeom prst="rect">
+          <p:cNvPr id="15" name="Text 12"/>
+          <p:cNvSpPr/>
+          <p:nvPr/>
+        </p:nvSpPr>
+        <p:spPr>
+          <a:xfrm>
+            <a:off x="1005840" y="2670048"/>
+            <a:ext cx="4754880" cy="365760"/>
+          </a:xfrm>
+          <a:prstGeom prst="rect">
+            <a:avLst/>
+          </a:prstGeom>
+          <a:noFill/>
+          <a:ln/>
+        </p:spPr>
+        <p:txBody>
+          <a:bodyPr wrap="square" rtlCol="0" anchor="ctr"/>
+          <a:lstStyle/>
+          <a:p>
+            <a:pPr indent="0" marL="0">
+              <a:buNone/>
+            </a:pPr>
+            <a:r>
+              <a:rPr lang="en-US" sz="1050" dirty="0">
+                <a:solidFill>
+                  <a:srgbClr val="444444"/>
+                </a:solidFill>
+                <a:latin typeface="微軟正黑體" pitchFamily="34" charset="0"/>
+                <a:ea typeface="微軟正黑體" pitchFamily="34" charset="-122"/>
+                <a:cs typeface="微軟正黑體" pitchFamily="34" charset="-120"/>
+              </a:rPr>
+              <a:t>Worker + AI Gateway 在 300+ PoP 同步部署，無 cold start</a:t>
+            </a:r>
+            <a:endParaRPr lang="en-US" sz="1050" dirty="0"/>
+          </a:p>
+        </p:txBody>
+      </p:sp>
+      <p:sp>
+        <p:nvSpPr>
+          <p:cNvPr id="16" name="Shape 13"/>
+          <p:cNvSpPr/>
+          <p:nvPr/>
+        </p:nvSpPr>
+        <p:spPr>
+          <a:xfrm>
+            <a:off x="640080" y="3136392"/>
+            <a:ext cx="292608" cy="292608"/>
+          </a:xfrm>
+          <a:prstGeom prst="ellipse">
             <a:avLst/>
           </a:prstGeom>
           <a:solidFill>
@@ -7693,30 +7811,108 @@
       </p:sp>
       <p:sp>
         <p:nvSpPr>
-          <p:cNvPr id="13" name="Text 10"/>
-          <p:cNvSpPr/>
-          <p:nvPr/>
-        </p:nvSpPr>
-        <p:spPr>
-          <a:xfrm>
-            <a:off x="731520" y="2606040"/>
-            <a:ext cx="3108960" cy="320040"/>
-          </a:xfrm>
-          <a:prstGeom prst="rect">
-            <a:avLst/>
-          </a:prstGeom>
-          <a:noFill/>
-          <a:ln/>
-        </p:spPr>
-        <p:txBody>
-          <a:bodyPr wrap="square" rtlCol="0" anchor="ctr"/>
-          <a:lstStyle/>
-          <a:p>
-            <a:pPr indent="0" marL="0">
-              <a:buNone/>
-            </a:pPr>
-            <a:r>
-              <a:rPr lang="en-US" sz="1150" dirty="0">
+          <p:cNvPr id="17" name="Text 14"/>
+          <p:cNvSpPr/>
+          <p:nvPr/>
+        </p:nvSpPr>
+        <p:spPr>
+          <a:xfrm>
+            <a:off x="640080" y="3136392"/>
+            <a:ext cx="292608" cy="292608"/>
+          </a:xfrm>
+          <a:prstGeom prst="rect">
+            <a:avLst/>
+          </a:prstGeom>
+          <a:noFill/>
+          <a:ln/>
+        </p:spPr>
+        <p:txBody>
+          <a:bodyPr wrap="square" rtlCol="0" anchor="ctr"/>
+          <a:lstStyle/>
+          <a:p>
+            <a:pPr algn="ctr" indent="0" marL="0">
+              <a:buNone/>
+            </a:pPr>
+            <a:r>
+              <a:rPr lang="en-US" sz="1200" b="1" dirty="0">
+                <a:solidFill>
+                  <a:srgbClr val="FFFFFF"/>
+                </a:solidFill>
+                <a:latin typeface="Calibri" pitchFamily="34" charset="0"/>
+                <a:ea typeface="Calibri" pitchFamily="34" charset="-122"/>
+                <a:cs typeface="Calibri" pitchFamily="34" charset="-120"/>
+              </a:rPr>
+              <a:t>2</a:t>
+            </a:r>
+            <a:endParaRPr lang="en-US" sz="1200" dirty="0"/>
+          </a:p>
+        </p:txBody>
+      </p:sp>
+      <p:sp>
+        <p:nvSpPr>
+          <p:cNvPr id="18" name="Text 15"/>
+          <p:cNvSpPr/>
+          <p:nvPr/>
+        </p:nvSpPr>
+        <p:spPr>
+          <a:xfrm>
+            <a:off x="1005840" y="3090672"/>
+            <a:ext cx="4754880" cy="292608"/>
+          </a:xfrm>
+          <a:prstGeom prst="rect">
+            <a:avLst/>
+          </a:prstGeom>
+          <a:noFill/>
+          <a:ln/>
+        </p:spPr>
+        <p:txBody>
+          <a:bodyPr wrap="square" rtlCol="0" anchor="ctr"/>
+          <a:lstStyle/>
+          <a:p>
+            <a:pPr indent="0" marL="0">
+              <a:buNone/>
+            </a:pPr>
+            <a:r>
+              <a:rPr lang="en-US" sz="1300" b="1" dirty="0">
+                <a:solidFill>
+                  <a:srgbClr val="1A1A1A"/>
+                </a:solidFill>
+                <a:latin typeface="微軟正黑體" pitchFamily="34" charset="0"/>
+                <a:ea typeface="微軟正黑體" pitchFamily="34" charset="-122"/>
+                <a:cs typeface="微軟正黑體" pitchFamily="34" charset="-120"/>
+              </a:rPr>
+              <a:t>Stateless Gateway</a:t>
+            </a:r>
+            <a:endParaRPr lang="en-US" sz="1300" dirty="0"/>
+          </a:p>
+        </p:txBody>
+      </p:sp>
+      <p:sp>
+        <p:nvSpPr>
+          <p:cNvPr id="19" name="Text 16"/>
+          <p:cNvSpPr/>
+          <p:nvPr/>
+        </p:nvSpPr>
+        <p:spPr>
+          <a:xfrm>
+            <a:off x="1005840" y="3383280"/>
+            <a:ext cx="4754880" cy="365760"/>
+          </a:xfrm>
+          <a:prstGeom prst="rect">
+            <a:avLst/>
+          </a:prstGeom>
+          <a:noFill/>
+          <a:ln/>
+        </p:spPr>
+        <p:txBody>
+          <a:bodyPr wrap="square" rtlCol="0" anchor="ctr"/>
+          <a:lstStyle/>
+          <a:p>
+            <a:pPr indent="0" marL="0">
+              <a:buNone/>
+            </a:pPr>
+            <a:r>
+              <a:rPr lang="en-US" sz="1050" dirty="0">
                 <a:solidFill>
                   <a:srgbClr val="444444"/>
                 </a:solidFill>
@@ -7724,38 +7920,136 @@
                 <a:ea typeface="微軟正黑體" pitchFamily="34" charset="-122"/>
                 <a:cs typeface="微軟正黑體" pitchFamily="34" charset="-120"/>
               </a:rPr>
-              <a:t>✓ AI Gateway 部署 + Policy</a:t>
-            </a:r>
-            <a:endParaRPr lang="en-US" sz="1150" dirty="0"/>
-          </a:p>
-        </p:txBody>
-      </p:sp>
-      <p:sp>
-        <p:nvSpPr>
-          <p:cNvPr id="14" name="Text 11"/>
-          <p:cNvSpPr/>
-          <p:nvPr/>
-        </p:nvSpPr>
-        <p:spPr>
-          <a:xfrm>
-            <a:off x="731520" y="2971800"/>
-            <a:ext cx="3108960" cy="320040"/>
-          </a:xfrm>
-          <a:prstGeom prst="rect">
-            <a:avLst/>
-          </a:prstGeom>
-          <a:noFill/>
-          <a:ln/>
-        </p:spPr>
-        <p:txBody>
-          <a:bodyPr wrap="square" rtlCol="0" anchor="ctr"/>
-          <a:lstStyle/>
-          <a:p>
-            <a:pPr indent="0" marL="0">
-              <a:buNone/>
-            </a:pPr>
-            <a:r>
-              <a:rPr lang="en-US" sz="1150" dirty="0">
+              <a:t>BYOK + Policy 集中設定，Worker 端零 secret 滲漏</a:t>
+            </a:r>
+            <a:endParaRPr lang="en-US" sz="1050" dirty="0"/>
+          </a:p>
+        </p:txBody>
+      </p:sp>
+      <p:sp>
+        <p:nvSpPr>
+          <p:cNvPr id="20" name="Shape 17"/>
+          <p:cNvSpPr/>
+          <p:nvPr/>
+        </p:nvSpPr>
+        <p:spPr>
+          <a:xfrm>
+            <a:off x="640080" y="3849624"/>
+            <a:ext cx="292608" cy="292608"/>
+          </a:xfrm>
+          <a:prstGeom prst="ellipse">
+            <a:avLst/>
+          </a:prstGeom>
+          <a:solidFill>
+            <a:srgbClr val="10B981"/>
+          </a:solidFill>
+          <a:ln/>
+        </p:spPr>
+      </p:sp>
+      <p:sp>
+        <p:nvSpPr>
+          <p:cNvPr id="21" name="Text 18"/>
+          <p:cNvSpPr/>
+          <p:nvPr/>
+        </p:nvSpPr>
+        <p:spPr>
+          <a:xfrm>
+            <a:off x="640080" y="3849624"/>
+            <a:ext cx="292608" cy="292608"/>
+          </a:xfrm>
+          <a:prstGeom prst="rect">
+            <a:avLst/>
+          </a:prstGeom>
+          <a:noFill/>
+          <a:ln/>
+        </p:spPr>
+        <p:txBody>
+          <a:bodyPr wrap="square" rtlCol="0" anchor="ctr"/>
+          <a:lstStyle/>
+          <a:p>
+            <a:pPr algn="ctr" indent="0" marL="0">
+              <a:buNone/>
+            </a:pPr>
+            <a:r>
+              <a:rPr lang="en-US" sz="1200" b="1" dirty="0">
+                <a:solidFill>
+                  <a:srgbClr val="FFFFFF"/>
+                </a:solidFill>
+                <a:latin typeface="Calibri" pitchFamily="34" charset="0"/>
+                <a:ea typeface="Calibri" pitchFamily="34" charset="-122"/>
+                <a:cs typeface="Calibri" pitchFamily="34" charset="-120"/>
+              </a:rPr>
+              <a:t>3</a:t>
+            </a:r>
+            <a:endParaRPr lang="en-US" sz="1200" dirty="0"/>
+          </a:p>
+        </p:txBody>
+      </p:sp>
+      <p:sp>
+        <p:nvSpPr>
+          <p:cNvPr id="22" name="Text 19"/>
+          <p:cNvSpPr/>
+          <p:nvPr/>
+        </p:nvSpPr>
+        <p:spPr>
+          <a:xfrm>
+            <a:off x="1005840" y="3803904"/>
+            <a:ext cx="4754880" cy="292608"/>
+          </a:xfrm>
+          <a:prstGeom prst="rect">
+            <a:avLst/>
+          </a:prstGeom>
+          <a:noFill/>
+          <a:ln/>
+        </p:spPr>
+        <p:txBody>
+          <a:bodyPr wrap="square" rtlCol="0" anchor="ctr"/>
+          <a:lstStyle/>
+          <a:p>
+            <a:pPr indent="0" marL="0">
+              <a:buNone/>
+            </a:pPr>
+            <a:r>
+              <a:rPr lang="en-US" sz="1300" b="1" dirty="0">
+                <a:solidFill>
+                  <a:srgbClr val="1A1A1A"/>
+                </a:solidFill>
+                <a:latin typeface="微軟正黑體" pitchFamily="34" charset="0"/>
+                <a:ea typeface="微軟正黑體" pitchFamily="34" charset="-122"/>
+                <a:cs typeface="微軟正黑體" pitchFamily="34" charset="-120"/>
+              </a:rPr>
+              <a:t>Multi-Provider</a:t>
+            </a:r>
+            <a:endParaRPr lang="en-US" sz="1300" dirty="0"/>
+          </a:p>
+        </p:txBody>
+      </p:sp>
+      <p:sp>
+        <p:nvSpPr>
+          <p:cNvPr id="23" name="Text 20"/>
+          <p:cNvSpPr/>
+          <p:nvPr/>
+        </p:nvSpPr>
+        <p:spPr>
+          <a:xfrm>
+            <a:off x="1005840" y="4096512"/>
+            <a:ext cx="4754880" cy="365760"/>
+          </a:xfrm>
+          <a:prstGeom prst="rect">
+            <a:avLst/>
+          </a:prstGeom>
+          <a:noFill/>
+          <a:ln/>
+        </p:spPr>
+        <p:txBody>
+          <a:bodyPr wrap="square" rtlCol="0" anchor="ctr"/>
+          <a:lstStyle/>
+          <a:p>
+            <a:pPr indent="0" marL="0">
+              <a:buNone/>
+            </a:pPr>
+            <a:r>
+              <a:rPr lang="en-US" sz="1050" dirty="0">
                 <a:solidFill>
                   <a:srgbClr val="444444"/>
                 </a:solidFill>
@@ -7763,38 +8057,136 @@
                 <a:ea typeface="微軟正黑體" pitchFamily="34" charset="-122"/>
                 <a:cs typeface="微軟正黑體" pitchFamily="34" charset="-120"/>
               </a:rPr>
-              <a:t>✓ 單一部門試點</a:t>
-            </a:r>
-            <a:endParaRPr lang="en-US" sz="1150" dirty="0"/>
-          </a:p>
-        </p:txBody>
-      </p:sp>
-      <p:sp>
-        <p:nvSpPr>
-          <p:cNvPr id="15" name="Text 12"/>
-          <p:cNvSpPr/>
-          <p:nvPr/>
-        </p:nvSpPr>
-        <p:spPr>
-          <a:xfrm>
-            <a:off x="731520" y="3337560"/>
-            <a:ext cx="3108960" cy="320040"/>
-          </a:xfrm>
-          <a:prstGeom prst="rect">
-            <a:avLst/>
-          </a:prstGeom>
-          <a:noFill/>
-          <a:ln/>
-        </p:spPr>
-        <p:txBody>
-          <a:bodyPr wrap="square" rtlCol="0" anchor="ctr"/>
-          <a:lstStyle/>
-          <a:p>
-            <a:pPr indent="0" marL="0">
-              <a:buNone/>
-            </a:pPr>
-            <a:r>
-              <a:rPr lang="en-US" sz="1150" dirty="0">
+              <a:t>一個 URL 路徑切換 51+ LLM，模型選擇與商業耦合解開</a:t>
+            </a:r>
+            <a:endParaRPr lang="en-US" sz="1050" dirty="0"/>
+          </a:p>
+        </p:txBody>
+      </p:sp>
+      <p:sp>
+        <p:nvSpPr>
+          <p:cNvPr id="24" name="Shape 21"/>
+          <p:cNvSpPr/>
+          <p:nvPr/>
+        </p:nvSpPr>
+        <p:spPr>
+          <a:xfrm>
+            <a:off x="640080" y="4562856"/>
+            <a:ext cx="292608" cy="292608"/>
+          </a:xfrm>
+          <a:prstGeom prst="ellipse">
+            <a:avLst/>
+          </a:prstGeom>
+          <a:solidFill>
+            <a:srgbClr val="10B981"/>
+          </a:solidFill>
+          <a:ln/>
+        </p:spPr>
+      </p:sp>
+      <p:sp>
+        <p:nvSpPr>
+          <p:cNvPr id="25" name="Text 22"/>
+          <p:cNvSpPr/>
+          <p:nvPr/>
+        </p:nvSpPr>
+        <p:spPr>
+          <a:xfrm>
+            <a:off x="640080" y="4562856"/>
+            <a:ext cx="292608" cy="292608"/>
+          </a:xfrm>
+          <a:prstGeom prst="rect">
+            <a:avLst/>
+          </a:prstGeom>
+          <a:noFill/>
+          <a:ln/>
+        </p:spPr>
+        <p:txBody>
+          <a:bodyPr wrap="square" rtlCol="0" anchor="ctr"/>
+          <a:lstStyle/>
+          <a:p>
+            <a:pPr algn="ctr" indent="0" marL="0">
+              <a:buNone/>
+            </a:pPr>
+            <a:r>
+              <a:rPr lang="en-US" sz="1200" b="1" dirty="0">
+                <a:solidFill>
+                  <a:srgbClr val="FFFFFF"/>
+                </a:solidFill>
+                <a:latin typeface="Calibri" pitchFamily="34" charset="0"/>
+                <a:ea typeface="Calibri" pitchFamily="34" charset="-122"/>
+                <a:cs typeface="Calibri" pitchFamily="34" charset="-120"/>
+              </a:rPr>
+              <a:t>4</a:t>
+            </a:r>
+            <a:endParaRPr lang="en-US" sz="1200" dirty="0"/>
+          </a:p>
+        </p:txBody>
+      </p:sp>
+      <p:sp>
+        <p:nvSpPr>
+          <p:cNvPr id="26" name="Text 23"/>
+          <p:cNvSpPr/>
+          <p:nvPr/>
+        </p:nvSpPr>
+        <p:spPr>
+          <a:xfrm>
+            <a:off x="1005840" y="4517136"/>
+            <a:ext cx="4754880" cy="292608"/>
+          </a:xfrm>
+          <a:prstGeom prst="rect">
+            <a:avLst/>
+          </a:prstGeom>
+          <a:noFill/>
+          <a:ln/>
+        </p:spPr>
+        <p:txBody>
+          <a:bodyPr wrap="square" rtlCol="0" anchor="ctr"/>
+          <a:lstStyle/>
+          <a:p>
+            <a:pPr indent="0" marL="0">
+              <a:buNone/>
+            </a:pPr>
+            <a:r>
+              <a:rPr lang="en-US" sz="1300" b="1" dirty="0">
+                <a:solidFill>
+                  <a:srgbClr val="1A1A1A"/>
+                </a:solidFill>
+                <a:latin typeface="微軟正黑體" pitchFamily="34" charset="0"/>
+                <a:ea typeface="微軟正黑體" pitchFamily="34" charset="-122"/>
+                <a:cs typeface="微軟正黑體" pitchFamily="34" charset="-120"/>
+              </a:rPr>
+              <a:t>Open Protocol</a:t>
+            </a:r>
+            <a:endParaRPr lang="en-US" sz="1300" dirty="0"/>
+          </a:p>
+        </p:txBody>
+      </p:sp>
+      <p:sp>
+        <p:nvSpPr>
+          <p:cNvPr id="27" name="Text 24"/>
+          <p:cNvSpPr/>
+          <p:nvPr/>
+        </p:nvSpPr>
+        <p:spPr>
+          <a:xfrm>
+            <a:off x="1005840" y="4809744"/>
+            <a:ext cx="4754880" cy="365760"/>
+          </a:xfrm>
+          <a:prstGeom prst="rect">
+            <a:avLst/>
+          </a:prstGeom>
+          <a:noFill/>
+          <a:ln/>
+        </p:spPr>
+        <p:txBody>
+          <a:bodyPr wrap="square" rtlCol="0" anchor="ctr"/>
+          <a:lstStyle/>
+          <a:p>
+            <a:pPr indent="0" marL="0">
+              <a:buNone/>
+            </a:pPr>
+            <a:r>
+              <a:rPr lang="en-US" sz="1050" dirty="0">
                 <a:solidFill>
                   <a:srgbClr val="444444"/>
                 </a:solidFill>
@@ -7802,38 +8194,136 @@
                 <a:ea typeface="微軟正黑體" pitchFamily="34" charset="-122"/>
                 <a:cs typeface="微軟正黑體" pitchFamily="34" charset="-120"/>
               </a:rPr>
-              <a:t>✓ 基礎 Token 儀表板</a:t>
-            </a:r>
-            <a:endParaRPr lang="en-US" sz="1150" dirty="0"/>
-          </a:p>
-        </p:txBody>
-      </p:sp>
-      <p:sp>
-        <p:nvSpPr>
-          <p:cNvPr id="16" name="Text 13"/>
-          <p:cNvSpPr/>
-          <p:nvPr/>
-        </p:nvSpPr>
-        <p:spPr>
-          <a:xfrm>
-            <a:off x="731520" y="3703320"/>
-            <a:ext cx="3108960" cy="320040"/>
-          </a:xfrm>
-          <a:prstGeom prst="rect">
-            <a:avLst/>
-          </a:prstGeom>
-          <a:noFill/>
-          <a:ln/>
-        </p:spPr>
-        <p:txBody>
-          <a:bodyPr wrap="square" rtlCol="0" anchor="ctr"/>
-          <a:lstStyle/>
-          <a:p>
-            <a:pPr indent="0" marL="0">
-              <a:buNone/>
-            </a:pPr>
-            <a:r>
-              <a:rPr lang="en-US" sz="1150" dirty="0">
+              <a:t>MCP 標準化工具呼叫，agent 可跨廠商組合</a:t>
+            </a:r>
+            <a:endParaRPr lang="en-US" sz="1050" dirty="0"/>
+          </a:p>
+        </p:txBody>
+      </p:sp>
+      <p:sp>
+        <p:nvSpPr>
+          <p:cNvPr id="28" name="Shape 25"/>
+          <p:cNvSpPr/>
+          <p:nvPr/>
+        </p:nvSpPr>
+        <p:spPr>
+          <a:xfrm>
+            <a:off x="640080" y="5276088"/>
+            <a:ext cx="292608" cy="292608"/>
+          </a:xfrm>
+          <a:prstGeom prst="ellipse">
+            <a:avLst/>
+          </a:prstGeom>
+          <a:solidFill>
+            <a:srgbClr val="10B981"/>
+          </a:solidFill>
+          <a:ln/>
+        </p:spPr>
+      </p:sp>
+      <p:sp>
+        <p:nvSpPr>
+          <p:cNvPr id="29" name="Text 26"/>
+          <p:cNvSpPr/>
+          <p:nvPr/>
+        </p:nvSpPr>
+        <p:spPr>
+          <a:xfrm>
+            <a:off x="640080" y="5276088"/>
+            <a:ext cx="292608" cy="292608"/>
+          </a:xfrm>
+          <a:prstGeom prst="rect">
+            <a:avLst/>
+          </a:prstGeom>
+          <a:noFill/>
+          <a:ln/>
+        </p:spPr>
+        <p:txBody>
+          <a:bodyPr wrap="square" rtlCol="0" anchor="ctr"/>
+          <a:lstStyle/>
+          <a:p>
+            <a:pPr algn="ctr" indent="0" marL="0">
+              <a:buNone/>
+            </a:pPr>
+            <a:r>
+              <a:rPr lang="en-US" sz="1200" b="1" dirty="0">
+                <a:solidFill>
+                  <a:srgbClr val="FFFFFF"/>
+                </a:solidFill>
+                <a:latin typeface="Calibri" pitchFamily="34" charset="0"/>
+                <a:ea typeface="Calibri" pitchFamily="34" charset="-122"/>
+                <a:cs typeface="Calibri" pitchFamily="34" charset="-120"/>
+              </a:rPr>
+              <a:t>5</a:t>
+            </a:r>
+            <a:endParaRPr lang="en-US" sz="1200" dirty="0"/>
+          </a:p>
+        </p:txBody>
+      </p:sp>
+      <p:sp>
+        <p:nvSpPr>
+          <p:cNvPr id="30" name="Text 27"/>
+          <p:cNvSpPr/>
+          <p:nvPr/>
+        </p:nvSpPr>
+        <p:spPr>
+          <a:xfrm>
+            <a:off x="1005840" y="5230368"/>
+            <a:ext cx="4754880" cy="292608"/>
+          </a:xfrm>
+          <a:prstGeom prst="rect">
+            <a:avLst/>
+          </a:prstGeom>
+          <a:noFill/>
+          <a:ln/>
+        </p:spPr>
+        <p:txBody>
+          <a:bodyPr wrap="square" rtlCol="0" anchor="ctr"/>
+          <a:lstStyle/>
+          <a:p>
+            <a:pPr indent="0" marL="0">
+              <a:buNone/>
+            </a:pPr>
+            <a:r>
+              <a:rPr lang="en-US" sz="1300" b="1" dirty="0">
+                <a:solidFill>
+                  <a:srgbClr val="1A1A1A"/>
+                </a:solidFill>
+                <a:latin typeface="微軟正黑體" pitchFamily="34" charset="0"/>
+                <a:ea typeface="微軟正黑體" pitchFamily="34" charset="-122"/>
+                <a:cs typeface="微軟正黑體" pitchFamily="34" charset="-120"/>
+              </a:rPr>
+              <a:t>Observability First</a:t>
+            </a:r>
+            <a:endParaRPr lang="en-US" sz="1300" dirty="0"/>
+          </a:p>
+        </p:txBody>
+      </p:sp>
+      <p:sp>
+        <p:nvSpPr>
+          <p:cNvPr id="31" name="Text 28"/>
+          <p:cNvSpPr/>
+          <p:nvPr/>
+        </p:nvSpPr>
+        <p:spPr>
+          <a:xfrm>
+            <a:off x="1005840" y="5522976"/>
+            <a:ext cx="4754880" cy="365760"/>
+          </a:xfrm>
+          <a:prstGeom prst="rect">
+            <a:avLst/>
+          </a:prstGeom>
+          <a:noFill/>
+          <a:ln/>
+        </p:spPr>
+        <p:txBody>
+          <a:bodyPr wrap="square" rtlCol="0" anchor="ctr"/>
+          <a:lstStyle/>
+          <a:p>
+            <a:pPr indent="0" marL="0">
+              <a:buNone/>
+            </a:pPr>
+            <a:r>
+              <a:rPr lang="en-US" sz="1050" dirty="0">
                 <a:solidFill>
                   <a:srgbClr val="444444"/>
                 </a:solidFill>
@@ -7841,149 +8331,32 @@
                 <a:ea typeface="微軟正黑體" pitchFamily="34" charset="-122"/>
                 <a:cs typeface="微軟正黑體" pitchFamily="34" charset="-120"/>
               </a:rPr>
-              <a:t>✓ PoC 顧問支援 2 週</a:t>
-            </a:r>
-            <a:endParaRPr lang="en-US" sz="1150" dirty="0"/>
-          </a:p>
-        </p:txBody>
-      </p:sp>
-      <p:sp>
-        <p:nvSpPr>
-          <p:cNvPr id="17" name="Text 14"/>
-          <p:cNvSpPr/>
-          <p:nvPr/>
-        </p:nvSpPr>
-        <p:spPr>
-          <a:xfrm>
-            <a:off x="457200" y="4297680"/>
-            <a:ext cx="3657600" cy="457200"/>
-          </a:xfrm>
-          <a:prstGeom prst="rect">
-            <a:avLst/>
-          </a:prstGeom>
-          <a:noFill/>
-          <a:ln/>
-        </p:spPr>
-        <p:txBody>
-          <a:bodyPr wrap="square" rtlCol="0" anchor="ctr"/>
-          <a:lstStyle/>
-          <a:p>
-            <a:pPr algn="ctr" indent="0" marL="0">
-              <a:buNone/>
-            </a:pPr>
-            <a:r>
-              <a:rPr lang="en-US" sz="1800" b="1" dirty="0">
-                <a:solidFill>
-                  <a:srgbClr val="10B981"/>
-                </a:solidFill>
-                <a:latin typeface="微軟正黑體" pitchFamily="34" charset="0"/>
-                <a:ea typeface="微軟正黑體" pitchFamily="34" charset="-122"/>
-                <a:cs typeface="微軟正黑體" pitchFamily="34" charset="-120"/>
-              </a:rPr>
-              <a:t>NT$80-150萬/年</a:t>
-            </a:r>
-            <a:endParaRPr lang="en-US" sz="1800" dirty="0"/>
-          </a:p>
-        </p:txBody>
-      </p:sp>
-      <p:sp>
-        <p:nvSpPr>
-          <p:cNvPr id="18" name="Text 15"/>
-          <p:cNvSpPr/>
-          <p:nvPr/>
-        </p:nvSpPr>
-        <p:spPr>
-          <a:xfrm>
-            <a:off x="457200" y="4846320"/>
-            <a:ext cx="3657600" cy="228600"/>
-          </a:xfrm>
-          <a:prstGeom prst="rect">
-            <a:avLst/>
-          </a:prstGeom>
-          <a:noFill/>
-          <a:ln/>
-        </p:spPr>
-        <p:txBody>
-          <a:bodyPr wrap="square" rtlCol="0" anchor="ctr"/>
-          <a:lstStyle/>
-          <a:p>
-            <a:pPr algn="ctr" indent="0" marL="0">
-              <a:buNone/>
-            </a:pPr>
-            <a:r>
-              <a:rPr lang="en-US" sz="1000" b="1" dirty="0">
-                <a:solidFill>
-                  <a:srgbClr val="888888"/>
-                </a:solidFill>
-                <a:latin typeface="微軟正黑體" pitchFamily="34" charset="0"/>
-                <a:ea typeface="微軟正黑體" pitchFamily="34" charset="-122"/>
-                <a:cs typeface="微軟正黑體" pitchFamily="34" charset="-120"/>
-              </a:rPr>
-              <a:t>適用對象</a:t>
-            </a:r>
-            <a:endParaRPr lang="en-US" sz="1000" dirty="0"/>
-          </a:p>
-        </p:txBody>
-      </p:sp>
-      <p:sp>
-        <p:nvSpPr>
-          <p:cNvPr id="19" name="Text 16"/>
-          <p:cNvSpPr/>
-          <p:nvPr/>
-        </p:nvSpPr>
-        <p:spPr>
-          <a:xfrm>
-            <a:off x="640080" y="5074920"/>
-            <a:ext cx="3291840" cy="640080"/>
-          </a:xfrm>
-          <a:prstGeom prst="rect">
-            <a:avLst/>
-          </a:prstGeom>
-          <a:noFill/>
-          <a:ln/>
-        </p:spPr>
-        <p:txBody>
-          <a:bodyPr wrap="square" rtlCol="0" anchor="ctr"/>
-          <a:lstStyle/>
-          <a:p>
-            <a:pPr algn="ctr" indent="0" marL="0">
-              <a:buNone/>
-            </a:pPr>
-            <a:r>
-              <a:rPr lang="en-US" sz="1100" dirty="0">
-                <a:solidFill>
-                  <a:srgbClr val="444444"/>
-                </a:solidFill>
-                <a:latin typeface="微軟正黑體" pitchFamily="34" charset="0"/>
-                <a:ea typeface="微軟正黑體" pitchFamily="34" charset="-122"/>
-                <a:cs typeface="微軟正黑體" pitchFamily="34" charset="-120"/>
-              </a:rPr>
-              <a:t>預備導入 AI 治理的中小企業</a:t>
-            </a:r>
-            <a:endParaRPr lang="en-US" sz="1100" dirty="0"/>
-          </a:p>
-        </p:txBody>
-      </p:sp>
-      <p:sp>
-        <p:nvSpPr>
-          <p:cNvPr id="20" name="Shape 17"/>
-          <p:cNvSpPr/>
-          <p:nvPr/>
-        </p:nvSpPr>
-        <p:spPr>
-          <a:xfrm>
-            <a:off x="4270248" y="1554480"/>
-            <a:ext cx="3657600" cy="4297680"/>
+              <a:t>每次 inference 預設記錄 token / latency / cost</a:t>
+            </a:r>
+            <a:endParaRPr lang="en-US" sz="1050" dirty="0"/>
+          </a:p>
+        </p:txBody>
+      </p:sp>
+      <p:sp>
+        <p:nvSpPr>
+          <p:cNvPr id="32" name="Shape 29"/>
+          <p:cNvSpPr/>
+          <p:nvPr/>
+        </p:nvSpPr>
+        <p:spPr>
+          <a:xfrm>
+            <a:off x="6245352" y="1691640"/>
+            <a:ext cx="5486400" cy="4389120"/>
           </a:xfrm>
           <a:prstGeom prst="roundRect">
             <a:avLst>
-              <a:gd name="adj" fmla="val 2500"/>
+              <a:gd name="adj" fmla="val 2083"/>
             </a:avLst>
           </a:prstGeom>
           <a:solidFill>
-            <a:srgbClr val="F38020"/>
+            <a:srgbClr val="FAFBFC"/>
           </a:solidFill>
-          <a:ln w="25400">
+          <a:ln w="19050">
             <a:solidFill>
               <a:srgbClr val="F38020"/>
             </a:solidFill>
@@ -7993,14 +8366,93 @@
       </p:sp>
       <p:sp>
         <p:nvSpPr>
-          <p:cNvPr id="21" name="Text 18"/>
-          <p:cNvSpPr/>
-          <p:nvPr/>
-        </p:nvSpPr>
-        <p:spPr>
-          <a:xfrm>
-            <a:off x="4270248" y="1691640"/>
-            <a:ext cx="3657600" cy="457200"/>
+          <p:cNvPr id="33" name="Shape 30"/>
+          <p:cNvSpPr/>
+          <p:nvPr/>
+        </p:nvSpPr>
+        <p:spPr>
+          <a:xfrm>
+            <a:off x="6245352" y="1691640"/>
+            <a:ext cx="5486400" cy="548640"/>
+          </a:xfrm>
+          <a:prstGeom prst="rect">
+            <a:avLst/>
+          </a:prstGeom>
+          <a:solidFill>
+            <a:srgbClr val="F38020"/>
+          </a:solidFill>
+          <a:ln/>
+        </p:spPr>
+      </p:sp>
+      <p:sp>
+        <p:nvSpPr>
+          <p:cNvPr id="34" name="Text 31"/>
+          <p:cNvSpPr/>
+          <p:nvPr/>
+        </p:nvSpPr>
+        <p:spPr>
+          <a:xfrm>
+            <a:off x="6428232" y="1691640"/>
+            <a:ext cx="5120640" cy="548640"/>
+          </a:xfrm>
+          <a:prstGeom prst="rect">
+            <a:avLst/>
+          </a:prstGeom>
+          <a:noFill/>
+          <a:ln/>
+        </p:spPr>
+        <p:txBody>
+          <a:bodyPr wrap="square" rtlCol="0" anchor="ctr"/>
+          <a:lstStyle/>
+          <a:p>
+            <a:pPr indent="0" marL="0">
+              <a:buNone/>
+            </a:pPr>
+            <a:r>
+              <a:rPr lang="en-US" sz="1600" b="1" dirty="0">
+                <a:solidFill>
+                  <a:srgbClr val="FFFFFF"/>
+                </a:solidFill>
+                <a:latin typeface="微軟正黑體" pitchFamily="34" charset="0"/>
+                <a:ea typeface="微軟正黑體" pitchFamily="34" charset="-122"/>
+                <a:cs typeface="微軟正黑體" pitchFamily="34" charset="-120"/>
+              </a:rPr>
+              <a:t>💼  商業模式</a:t>
+            </a:r>
+            <a:endParaRPr lang="en-US" sz="1600" dirty="0"/>
+          </a:p>
+        </p:txBody>
+      </p:sp>
+      <p:sp>
+        <p:nvSpPr>
+          <p:cNvPr id="35" name="Shape 32"/>
+          <p:cNvSpPr/>
+          <p:nvPr/>
+        </p:nvSpPr>
+        <p:spPr>
+          <a:xfrm>
+            <a:off x="6428232" y="2423160"/>
+            <a:ext cx="292608" cy="292608"/>
+          </a:xfrm>
+          <a:prstGeom prst="ellipse">
+            <a:avLst/>
+          </a:prstGeom>
+          <a:solidFill>
+            <a:srgbClr val="F38020"/>
+          </a:solidFill>
+          <a:ln/>
+        </p:spPr>
+      </p:sp>
+      <p:sp>
+        <p:nvSpPr>
+          <p:cNvPr id="36" name="Text 33"/>
+          <p:cNvSpPr/>
+          <p:nvPr/>
+        </p:nvSpPr>
+        <p:spPr>
+          <a:xfrm>
+            <a:off x="6428232" y="2423160"/>
+            <a:ext cx="292608" cy="292608"/>
           </a:xfrm>
           <a:prstGeom prst="rect">
             <a:avLst/>
@@ -8016,7 +8468,7 @@
               <a:buNone/>
             </a:pPr>
             <a:r>
-              <a:rPr lang="en-US" sz="2200" b="1" dirty="0">
+              <a:rPr lang="en-US" sz="1200" b="1" dirty="0">
                 <a:solidFill>
                   <a:srgbClr val="FFFFFF"/>
                 </a:solidFill>
@@ -8024,22 +8476,120 @@
                 <a:ea typeface="Calibri" pitchFamily="34" charset="-122"/>
                 <a:cs typeface="Calibri" pitchFamily="34" charset="-120"/>
               </a:rPr>
-              <a:t>Advanced</a:t>
-            </a:r>
-            <a:endParaRPr lang="en-US" sz="2200" dirty="0"/>
-          </a:p>
-        </p:txBody>
-      </p:sp>
-      <p:sp>
-        <p:nvSpPr>
-          <p:cNvPr id="22" name="Text 19"/>
-          <p:cNvSpPr/>
-          <p:nvPr/>
-        </p:nvSpPr>
-        <p:spPr>
-          <a:xfrm>
-            <a:off x="4270248" y="2148840"/>
-            <a:ext cx="3657600" cy="274320"/>
+              <a:t>1</a:t>
+            </a:r>
+            <a:endParaRPr lang="en-US" sz="1200" dirty="0"/>
+          </a:p>
+        </p:txBody>
+      </p:sp>
+      <p:sp>
+        <p:nvSpPr>
+          <p:cNvPr id="37" name="Text 34"/>
+          <p:cNvSpPr/>
+          <p:nvPr/>
+        </p:nvSpPr>
+        <p:spPr>
+          <a:xfrm>
+            <a:off x="6793992" y="2377440"/>
+            <a:ext cx="4754880" cy="292608"/>
+          </a:xfrm>
+          <a:prstGeom prst="rect">
+            <a:avLst/>
+          </a:prstGeom>
+          <a:noFill/>
+          <a:ln/>
+        </p:spPr>
+        <p:txBody>
+          <a:bodyPr wrap="square" rtlCol="0" anchor="ctr"/>
+          <a:lstStyle/>
+          <a:p>
+            <a:pPr indent="0" marL="0">
+              <a:buNone/>
+            </a:pPr>
+            <a:r>
+              <a:rPr lang="en-US" sz="1300" b="1" dirty="0">
+                <a:solidFill>
+                  <a:srgbClr val="1A1A1A"/>
+                </a:solidFill>
+                <a:latin typeface="微軟正黑體" pitchFamily="34" charset="0"/>
+                <a:ea typeface="微軟正黑體" pitchFamily="34" charset="-122"/>
+                <a:cs typeface="微軟正黑體" pitchFamily="34" charset="-120"/>
+              </a:rPr>
+              <a:t>Usage-Based Pricing</a:t>
+            </a:r>
+            <a:endParaRPr lang="en-US" sz="1300" dirty="0"/>
+          </a:p>
+        </p:txBody>
+      </p:sp>
+      <p:sp>
+        <p:nvSpPr>
+          <p:cNvPr id="38" name="Text 35"/>
+          <p:cNvSpPr/>
+          <p:nvPr/>
+        </p:nvSpPr>
+        <p:spPr>
+          <a:xfrm>
+            <a:off x="6793992" y="2670048"/>
+            <a:ext cx="4754880" cy="365760"/>
+          </a:xfrm>
+          <a:prstGeom prst="rect">
+            <a:avLst/>
+          </a:prstGeom>
+          <a:noFill/>
+          <a:ln/>
+        </p:spPr>
+        <p:txBody>
+          <a:bodyPr wrap="square" rtlCol="0" anchor="ctr"/>
+          <a:lstStyle/>
+          <a:p>
+            <a:pPr indent="0" marL="0">
+              <a:buNone/>
+            </a:pPr>
+            <a:r>
+              <a:rPr lang="en-US" sz="1050" dirty="0">
+                <a:solidFill>
+                  <a:srgbClr val="444444"/>
+                </a:solidFill>
+                <a:latin typeface="微軟正黑體" pitchFamily="34" charset="0"/>
+                <a:ea typeface="微軟正黑體" pitchFamily="34" charset="-122"/>
+                <a:cs typeface="微軟正黑體" pitchFamily="34" charset="-120"/>
+              </a:rPr>
+              <a:t>依 token 量計費，客戶 CAPEX → OPEX 轉換</a:t>
+            </a:r>
+            <a:endParaRPr lang="en-US" sz="1050" dirty="0"/>
+          </a:p>
+        </p:txBody>
+      </p:sp>
+      <p:sp>
+        <p:nvSpPr>
+          <p:cNvPr id="39" name="Shape 36"/>
+          <p:cNvSpPr/>
+          <p:nvPr/>
+        </p:nvSpPr>
+        <p:spPr>
+          <a:xfrm>
+            <a:off x="6428232" y="3136392"/>
+            <a:ext cx="292608" cy="292608"/>
+          </a:xfrm>
+          <a:prstGeom prst="ellipse">
+            <a:avLst/>
+          </a:prstGeom>
+          <a:solidFill>
+            <a:srgbClr val="F38020"/>
+          </a:solidFill>
+          <a:ln/>
+        </p:spPr>
+      </p:sp>
+      <p:sp>
+        <p:nvSpPr>
+          <p:cNvPr id="40" name="Text 37"/>
+          <p:cNvSpPr/>
+          <p:nvPr/>
+        </p:nvSpPr>
+        <p:spPr>
+          <a:xfrm>
+            <a:off x="6428232" y="3136392"/>
+            <a:ext cx="292608" cy="292608"/>
           </a:xfrm>
           <a:prstGeom prst="rect">
             <a:avLst/>
@@ -8055,389 +8605,128 @@
               <a:buNone/>
             </a:pPr>
             <a:r>
-              <a:rPr lang="en-US" sz="1300" dirty="0">
+              <a:rPr lang="en-US" sz="1200" b="1" dirty="0">
                 <a:solidFill>
                   <a:srgbClr val="FFFFFF"/>
-                </a:solidFill>
-                <a:latin typeface="微軟正黑體" pitchFamily="34" charset="0"/>
-                <a:ea typeface="微軟正黑體" pitchFamily="34" charset="-122"/>
-                <a:cs typeface="微軟正黑體" pitchFamily="34" charset="-120"/>
-              </a:rPr>
-              <a:t>全廠擴展</a:t>
-            </a:r>
-            <a:endParaRPr lang="en-US" sz="1300" dirty="0"/>
-          </a:p>
-        </p:txBody>
-      </p:sp>
-      <p:sp>
-        <p:nvSpPr>
-          <p:cNvPr id="23" name="Shape 20"/>
-          <p:cNvSpPr/>
-          <p:nvPr/>
-        </p:nvSpPr>
-        <p:spPr>
-          <a:xfrm>
-            <a:off x="4727448" y="2468880"/>
-            <a:ext cx="2743200" cy="18288"/>
-          </a:xfrm>
-          <a:prstGeom prst="rect">
-            <a:avLst/>
-          </a:prstGeom>
-          <a:solidFill>
-            <a:srgbClr val="FFFFFF"/>
-          </a:solidFill>
-          <a:ln/>
-        </p:spPr>
-      </p:sp>
-      <p:sp>
-        <p:nvSpPr>
-          <p:cNvPr id="24" name="Text 21"/>
-          <p:cNvSpPr/>
-          <p:nvPr/>
-        </p:nvSpPr>
-        <p:spPr>
-          <a:xfrm>
-            <a:off x="4544568" y="2606040"/>
-            <a:ext cx="3108960" cy="320040"/>
-          </a:xfrm>
-          <a:prstGeom prst="rect">
-            <a:avLst/>
-          </a:prstGeom>
-          <a:noFill/>
-          <a:ln/>
-        </p:spPr>
-        <p:txBody>
-          <a:bodyPr wrap="square" rtlCol="0" anchor="ctr"/>
-          <a:lstStyle/>
-          <a:p>
-            <a:pPr indent="0" marL="0">
-              <a:buNone/>
-            </a:pPr>
-            <a:r>
-              <a:rPr lang="en-US" sz="1150" dirty="0">
-                <a:solidFill>
-                  <a:srgbClr val="FFFFFF"/>
-                </a:solidFill>
-                <a:latin typeface="微軟正黑體" pitchFamily="34" charset="0"/>
-                <a:ea typeface="微軟正黑體" pitchFamily="34" charset="-122"/>
-                <a:cs typeface="微軟正黑體" pitchFamily="34" charset="-120"/>
-              </a:rPr>
-              <a:t>✓ 多部門 Policy 分級</a:t>
-            </a:r>
-            <a:endParaRPr lang="en-US" sz="1150" dirty="0"/>
-          </a:p>
-        </p:txBody>
-      </p:sp>
-      <p:sp>
-        <p:nvSpPr>
-          <p:cNvPr id="25" name="Text 22"/>
-          <p:cNvSpPr/>
-          <p:nvPr/>
-        </p:nvSpPr>
-        <p:spPr>
-          <a:xfrm>
-            <a:off x="4544568" y="2971800"/>
-            <a:ext cx="3108960" cy="320040"/>
-          </a:xfrm>
-          <a:prstGeom prst="rect">
-            <a:avLst/>
-          </a:prstGeom>
-          <a:noFill/>
-          <a:ln/>
-        </p:spPr>
-        <p:txBody>
-          <a:bodyPr wrap="square" rtlCol="0" anchor="ctr"/>
-          <a:lstStyle/>
-          <a:p>
-            <a:pPr indent="0" marL="0">
-              <a:buNone/>
-            </a:pPr>
-            <a:r>
-              <a:rPr lang="en-US" sz="1150" dirty="0">
-                <a:solidFill>
-                  <a:srgbClr val="FFFFFF"/>
-                </a:solidFill>
-                <a:latin typeface="微軟正黑體" pitchFamily="34" charset="0"/>
-                <a:ea typeface="微軟正黑體" pitchFamily="34" charset="-122"/>
-                <a:cs typeface="微軟正黑體" pitchFamily="34" charset="-120"/>
-              </a:rPr>
-              <a:t>✓ 完整 Guardrails 規則</a:t>
-            </a:r>
-            <a:endParaRPr lang="en-US" sz="1150" dirty="0"/>
-          </a:p>
-        </p:txBody>
-      </p:sp>
-      <p:sp>
-        <p:nvSpPr>
-          <p:cNvPr id="26" name="Text 23"/>
-          <p:cNvSpPr/>
-          <p:nvPr/>
-        </p:nvSpPr>
-        <p:spPr>
-          <a:xfrm>
-            <a:off x="4544568" y="3337560"/>
-            <a:ext cx="3108960" cy="320040"/>
-          </a:xfrm>
-          <a:prstGeom prst="rect">
-            <a:avLst/>
-          </a:prstGeom>
-          <a:noFill/>
-          <a:ln/>
-        </p:spPr>
-        <p:txBody>
-          <a:bodyPr wrap="square" rtlCol="0" anchor="ctr"/>
-          <a:lstStyle/>
-          <a:p>
-            <a:pPr indent="0" marL="0">
-              <a:buNone/>
-            </a:pPr>
-            <a:r>
-              <a:rPr lang="en-US" sz="1150" dirty="0">
-                <a:solidFill>
-                  <a:srgbClr val="FFFFFF"/>
-                </a:solidFill>
-                <a:latin typeface="微軟正黑體" pitchFamily="34" charset="0"/>
-                <a:ea typeface="微軟正黑體" pitchFamily="34" charset="-122"/>
-                <a:cs typeface="微軟正黑體" pitchFamily="34" charset="-120"/>
-              </a:rPr>
-              <a:t>✓ 成本分攤儀表板</a:t>
-            </a:r>
-            <a:endParaRPr lang="en-US" sz="1150" dirty="0"/>
-          </a:p>
-        </p:txBody>
-      </p:sp>
-      <p:sp>
-        <p:nvSpPr>
-          <p:cNvPr id="27" name="Text 24"/>
-          <p:cNvSpPr/>
-          <p:nvPr/>
-        </p:nvSpPr>
-        <p:spPr>
-          <a:xfrm>
-            <a:off x="4544568" y="3703320"/>
-            <a:ext cx="3108960" cy="320040"/>
-          </a:xfrm>
-          <a:prstGeom prst="rect">
-            <a:avLst/>
-          </a:prstGeom>
-          <a:noFill/>
-          <a:ln/>
-        </p:spPr>
-        <p:txBody>
-          <a:bodyPr wrap="square" rtlCol="0" anchor="ctr"/>
-          <a:lstStyle/>
-          <a:p>
-            <a:pPr indent="0" marL="0">
-              <a:buNone/>
-            </a:pPr>
-            <a:r>
-              <a:rPr lang="en-US" sz="1150" dirty="0">
-                <a:solidFill>
-                  <a:srgbClr val="FFFFFF"/>
-                </a:solidFill>
-                <a:latin typeface="微軟正黑體" pitchFamily="34" charset="0"/>
-                <a:ea typeface="微軟正黑體" pitchFamily="34" charset="-122"/>
-                <a:cs typeface="微軟正黑體" pitchFamily="34" charset="-120"/>
-              </a:rPr>
-              <a:t>✓ 客製化稽核 Workflow</a:t>
-            </a:r>
-            <a:endParaRPr lang="en-US" sz="1150" dirty="0"/>
-          </a:p>
-        </p:txBody>
-      </p:sp>
-      <p:sp>
-        <p:nvSpPr>
-          <p:cNvPr id="28" name="Text 25"/>
-          <p:cNvSpPr/>
-          <p:nvPr/>
-        </p:nvSpPr>
-        <p:spPr>
-          <a:xfrm>
-            <a:off x="4270248" y="4297680"/>
-            <a:ext cx="3657600" cy="457200"/>
-          </a:xfrm>
-          <a:prstGeom prst="rect">
-            <a:avLst/>
-          </a:prstGeom>
-          <a:noFill/>
-          <a:ln/>
-        </p:spPr>
-        <p:txBody>
-          <a:bodyPr wrap="square" rtlCol="0" anchor="ctr"/>
-          <a:lstStyle/>
-          <a:p>
-            <a:pPr algn="ctr" indent="0" marL="0">
-              <a:buNone/>
-            </a:pPr>
-            <a:r>
-              <a:rPr lang="en-US" sz="1800" b="1" dirty="0">
-                <a:solidFill>
-                  <a:srgbClr val="FFFFFF"/>
-                </a:solidFill>
-                <a:latin typeface="微軟正黑體" pitchFamily="34" charset="0"/>
-                <a:ea typeface="微軟正黑體" pitchFamily="34" charset="-122"/>
-                <a:cs typeface="微軟正黑體" pitchFamily="34" charset="-120"/>
-              </a:rPr>
-              <a:t>NT$400-600萬/年</a:t>
-            </a:r>
-            <a:endParaRPr lang="en-US" sz="1800" dirty="0"/>
-          </a:p>
-        </p:txBody>
-      </p:sp>
-      <p:sp>
-        <p:nvSpPr>
-          <p:cNvPr id="29" name="Text 26"/>
-          <p:cNvSpPr/>
-          <p:nvPr/>
-        </p:nvSpPr>
-        <p:spPr>
-          <a:xfrm>
-            <a:off x="4270248" y="4846320"/>
-            <a:ext cx="3657600" cy="228600"/>
-          </a:xfrm>
-          <a:prstGeom prst="rect">
-            <a:avLst/>
-          </a:prstGeom>
-          <a:noFill/>
-          <a:ln/>
-        </p:spPr>
-        <p:txBody>
-          <a:bodyPr wrap="square" rtlCol="0" anchor="ctr"/>
-          <a:lstStyle/>
-          <a:p>
-            <a:pPr algn="ctr" indent="0" marL="0">
-              <a:buNone/>
-            </a:pPr>
-            <a:r>
-              <a:rPr lang="en-US" sz="1000" b="1" dirty="0">
-                <a:solidFill>
-                  <a:srgbClr val="FFFFFF"/>
-                </a:solidFill>
-                <a:latin typeface="微軟正黑體" pitchFamily="34" charset="0"/>
-                <a:ea typeface="微軟正黑體" pitchFamily="34" charset="-122"/>
-                <a:cs typeface="微軟正黑體" pitchFamily="34" charset="-120"/>
-              </a:rPr>
-              <a:t>適用對象</a:t>
-            </a:r>
-            <a:endParaRPr lang="en-US" sz="1000" dirty="0"/>
-          </a:p>
-        </p:txBody>
-      </p:sp>
-      <p:sp>
-        <p:nvSpPr>
-          <p:cNvPr id="30" name="Text 27"/>
-          <p:cNvSpPr/>
-          <p:nvPr/>
-        </p:nvSpPr>
-        <p:spPr>
-          <a:xfrm>
-            <a:off x="4453128" y="5074920"/>
-            <a:ext cx="3291840" cy="640080"/>
-          </a:xfrm>
-          <a:prstGeom prst="rect">
-            <a:avLst/>
-          </a:prstGeom>
-          <a:noFill/>
-          <a:ln/>
-        </p:spPr>
-        <p:txBody>
-          <a:bodyPr wrap="square" rtlCol="0" anchor="ctr"/>
-          <a:lstStyle/>
-          <a:p>
-            <a:pPr algn="ctr" indent="0" marL="0">
-              <a:buNone/>
-            </a:pPr>
-            <a:r>
-              <a:rPr lang="en-US" sz="1100" dirty="0">
-                <a:solidFill>
-                  <a:srgbClr val="FFFFFF"/>
-                </a:solidFill>
-                <a:latin typeface="微軟正黑體" pitchFamily="34" charset="0"/>
-                <a:ea typeface="微軟正黑體" pitchFamily="34" charset="-122"/>
-                <a:cs typeface="微軟正黑體" pitchFamily="34" charset="-120"/>
-              </a:rPr>
-              <a:t>已有 AI 工具但失控的中型企業</a:t>
-            </a:r>
-            <a:endParaRPr lang="en-US" sz="1100" dirty="0"/>
-          </a:p>
-        </p:txBody>
-      </p:sp>
-      <p:sp>
-        <p:nvSpPr>
-          <p:cNvPr id="31" name="Shape 28"/>
-          <p:cNvSpPr/>
-          <p:nvPr/>
-        </p:nvSpPr>
-        <p:spPr>
-          <a:xfrm>
-            <a:off x="8083296" y="1554480"/>
-            <a:ext cx="3657600" cy="4297680"/>
-          </a:xfrm>
-          <a:prstGeom prst="roundRect">
-            <a:avLst>
-              <a:gd name="adj" fmla="val 2500"/>
-            </a:avLst>
-          </a:prstGeom>
-          <a:solidFill>
-            <a:srgbClr val="FFFFFF"/>
-          </a:solidFill>
-          <a:ln w="12700">
-            <a:solidFill>
-              <a:srgbClr val="8B5CF6"/>
-            </a:solidFill>
-            <a:prstDash val="solid"/>
-          </a:ln>
-        </p:spPr>
-      </p:sp>
-      <p:sp>
-        <p:nvSpPr>
-          <p:cNvPr id="32" name="Text 29"/>
-          <p:cNvSpPr/>
-          <p:nvPr/>
-        </p:nvSpPr>
-        <p:spPr>
-          <a:xfrm>
-            <a:off x="8083296" y="1691640"/>
-            <a:ext cx="3657600" cy="457200"/>
-          </a:xfrm>
-          <a:prstGeom prst="rect">
-            <a:avLst/>
-          </a:prstGeom>
-          <a:noFill/>
-          <a:ln/>
-        </p:spPr>
-        <p:txBody>
-          <a:bodyPr wrap="square" rtlCol="0" anchor="ctr"/>
-          <a:lstStyle/>
-          <a:p>
-            <a:pPr algn="ctr" indent="0" marL="0">
-              <a:buNone/>
-            </a:pPr>
-            <a:r>
-              <a:rPr lang="en-US" sz="2200" b="1" dirty="0">
-                <a:solidFill>
-                  <a:srgbClr val="8B5CF6"/>
                 </a:solidFill>
                 <a:latin typeface="Calibri" pitchFamily="34" charset="0"/>
                 <a:ea typeface="Calibri" pitchFamily="34" charset="-122"/>
                 <a:cs typeface="Calibri" pitchFamily="34" charset="-120"/>
               </a:rPr>
-              <a:t>Premium</a:t>
-            </a:r>
-            <a:endParaRPr lang="en-US" sz="2200" dirty="0"/>
-          </a:p>
-        </p:txBody>
-      </p:sp>
-      <p:sp>
-        <p:nvSpPr>
-          <p:cNvPr id="33" name="Text 30"/>
-          <p:cNvSpPr/>
-          <p:nvPr/>
-        </p:nvSpPr>
-        <p:spPr>
-          <a:xfrm>
-            <a:off x="8083296" y="2148840"/>
-            <a:ext cx="3657600" cy="274320"/>
+              <a:t>2</a:t>
+            </a:r>
+            <a:endParaRPr lang="en-US" sz="1200" dirty="0"/>
+          </a:p>
+        </p:txBody>
+      </p:sp>
+      <p:sp>
+        <p:nvSpPr>
+          <p:cNvPr id="41" name="Text 38"/>
+          <p:cNvSpPr/>
+          <p:nvPr/>
+        </p:nvSpPr>
+        <p:spPr>
+          <a:xfrm>
+            <a:off x="6793992" y="3090672"/>
+            <a:ext cx="4754880" cy="292608"/>
+          </a:xfrm>
+          <a:prstGeom prst="rect">
+            <a:avLst/>
+          </a:prstGeom>
+          <a:noFill/>
+          <a:ln/>
+        </p:spPr>
+        <p:txBody>
+          <a:bodyPr wrap="square" rtlCol="0" anchor="ctr"/>
+          <a:lstStyle/>
+          <a:p>
+            <a:pPr indent="0" marL="0">
+              <a:buNone/>
+            </a:pPr>
+            <a:r>
+              <a:rPr lang="en-US" sz="1300" b="1" dirty="0">
+                <a:solidFill>
+                  <a:srgbClr val="1A1A1A"/>
+                </a:solidFill>
+                <a:latin typeface="微軟正黑體" pitchFamily="34" charset="0"/>
+                <a:ea typeface="微軟正黑體" pitchFamily="34" charset="-122"/>
+                <a:cs typeface="微軟正黑體" pitchFamily="34" charset="-120"/>
+              </a:rPr>
+              <a:t>Land &amp; Expand</a:t>
+            </a:r>
+            <a:endParaRPr lang="en-US" sz="1300" dirty="0"/>
+          </a:p>
+        </p:txBody>
+      </p:sp>
+      <p:sp>
+        <p:nvSpPr>
+          <p:cNvPr id="42" name="Text 39"/>
+          <p:cNvSpPr/>
+          <p:nvPr/>
+        </p:nvSpPr>
+        <p:spPr>
+          <a:xfrm>
+            <a:off x="6793992" y="3383280"/>
+            <a:ext cx="4754880" cy="365760"/>
+          </a:xfrm>
+          <a:prstGeom prst="rect">
+            <a:avLst/>
+          </a:prstGeom>
+          <a:noFill/>
+          <a:ln/>
+        </p:spPr>
+        <p:txBody>
+          <a:bodyPr wrap="square" rtlCol="0" anchor="ctr"/>
+          <a:lstStyle/>
+          <a:p>
+            <a:pPr indent="0" marL="0">
+              <a:buNone/>
+            </a:pPr>
+            <a:r>
+              <a:rPr lang="en-US" sz="1050" dirty="0">
+                <a:solidFill>
+                  <a:srgbClr val="444444"/>
+                </a:solidFill>
+                <a:latin typeface="微軟正黑體" pitchFamily="34" charset="0"/>
+                <a:ea typeface="微軟正黑體" pitchFamily="34" charset="-122"/>
+                <a:cs typeface="微軟正黑體" pitchFamily="34" charset="-120"/>
+              </a:rPr>
+              <a:t>AI Gateway 為入口，後續擴展 ZTNA / SOC / MSSP</a:t>
+            </a:r>
+            <a:endParaRPr lang="en-US" sz="1050" dirty="0"/>
+          </a:p>
+        </p:txBody>
+      </p:sp>
+      <p:sp>
+        <p:nvSpPr>
+          <p:cNvPr id="43" name="Shape 40"/>
+          <p:cNvSpPr/>
+          <p:nvPr/>
+        </p:nvSpPr>
+        <p:spPr>
+          <a:xfrm>
+            <a:off x="6428232" y="3849624"/>
+            <a:ext cx="292608" cy="292608"/>
+          </a:xfrm>
+          <a:prstGeom prst="ellipse">
+            <a:avLst/>
+          </a:prstGeom>
+          <a:solidFill>
+            <a:srgbClr val="F38020"/>
+          </a:solidFill>
+          <a:ln/>
+        </p:spPr>
+      </p:sp>
+      <p:sp>
+        <p:nvSpPr>
+          <p:cNvPr id="44" name="Text 41"/>
+          <p:cNvSpPr/>
+          <p:nvPr/>
+        </p:nvSpPr>
+        <p:spPr>
+          <a:xfrm>
+            <a:off x="6428232" y="3849624"/>
+            <a:ext cx="292608" cy="292608"/>
           </a:xfrm>
           <a:prstGeom prst="rect">
             <a:avLst/>
@@ -8453,15 +8742,54 @@
               <a:buNone/>
             </a:pPr>
             <a:r>
-              <a:rPr lang="en-US" sz="1300" dirty="0">
-                <a:solidFill>
-                  <a:srgbClr val="8B5CF6"/>
-                </a:solidFill>
-                <a:latin typeface="微軟正黑體" pitchFamily="34" charset="0"/>
-                <a:ea typeface="微軟正黑體" pitchFamily="34" charset="-122"/>
-                <a:cs typeface="微軟正黑體" pitchFamily="34" charset="-120"/>
-              </a:rPr>
-              <a:t>戰略治理</a:t>
+              <a:rPr lang="en-US" sz="1200" b="1" dirty="0">
+                <a:solidFill>
+                  <a:srgbClr val="FFFFFF"/>
+                </a:solidFill>
+                <a:latin typeface="Calibri" pitchFamily="34" charset="0"/>
+                <a:ea typeface="Calibri" pitchFamily="34" charset="-122"/>
+                <a:cs typeface="Calibri" pitchFamily="34" charset="-120"/>
+              </a:rPr>
+              <a:t>3</a:t>
+            </a:r>
+            <a:endParaRPr lang="en-US" sz="1200" dirty="0"/>
+          </a:p>
+        </p:txBody>
+      </p:sp>
+      <p:sp>
+        <p:nvSpPr>
+          <p:cNvPr id="45" name="Text 42"/>
+          <p:cNvSpPr/>
+          <p:nvPr/>
+        </p:nvSpPr>
+        <p:spPr>
+          <a:xfrm>
+            <a:off x="6793992" y="3803904"/>
+            <a:ext cx="4754880" cy="292608"/>
+          </a:xfrm>
+          <a:prstGeom prst="rect">
+            <a:avLst/>
+          </a:prstGeom>
+          <a:noFill/>
+          <a:ln/>
+        </p:spPr>
+        <p:txBody>
+          <a:bodyPr wrap="square" rtlCol="0" anchor="ctr"/>
+          <a:lstStyle/>
+          <a:p>
+            <a:pPr indent="0" marL="0">
+              <a:buNone/>
+            </a:pPr>
+            <a:r>
+              <a:rPr lang="en-US" sz="1300" b="1" dirty="0">
+                <a:solidFill>
+                  <a:srgbClr val="1A1A1A"/>
+                </a:solidFill>
+                <a:latin typeface="微軟正黑體" pitchFamily="34" charset="0"/>
+                <a:ea typeface="微軟正黑體" pitchFamily="34" charset="-122"/>
+                <a:cs typeface="微軟正黑體" pitchFamily="34" charset="-120"/>
+              </a:rPr>
+              <a:t>MSSP / ARR 模型</a:t>
             </a:r>
             <a:endParaRPr lang="en-US" sz="1300" dirty="0"/>
           </a:p>
@@ -8469,50 +8797,167 @@
       </p:sp>
       <p:sp>
         <p:nvSpPr>
-          <p:cNvPr id="34" name="Shape 31"/>
-          <p:cNvSpPr/>
-          <p:nvPr/>
-        </p:nvSpPr>
-        <p:spPr>
-          <a:xfrm>
-            <a:off x="8540496" y="2468880"/>
-            <a:ext cx="2743200" cy="18288"/>
-          </a:xfrm>
-          <a:prstGeom prst="rect">
+          <p:cNvPr id="46" name="Text 43"/>
+          <p:cNvSpPr/>
+          <p:nvPr/>
+        </p:nvSpPr>
+        <p:spPr>
+          <a:xfrm>
+            <a:off x="6793992" y="4096512"/>
+            <a:ext cx="4754880" cy="365760"/>
+          </a:xfrm>
+          <a:prstGeom prst="rect">
+            <a:avLst/>
+          </a:prstGeom>
+          <a:noFill/>
+          <a:ln/>
+        </p:spPr>
+        <p:txBody>
+          <a:bodyPr wrap="square" rtlCol="0" anchor="ctr"/>
+          <a:lstStyle/>
+          <a:p>
+            <a:pPr indent="0" marL="0">
+              <a:buNone/>
+            </a:pPr>
+            <a:r>
+              <a:rPr lang="en-US" sz="1050" dirty="0">
+                <a:solidFill>
+                  <a:srgbClr val="444444"/>
+                </a:solidFill>
+                <a:latin typeface="微軟正黑體" pitchFamily="34" charset="0"/>
+                <a:ea typeface="微軟正黑體" pitchFamily="34" charset="-122"/>
+                <a:cs typeface="微軟正黑體" pitchFamily="34" charset="-120"/>
+              </a:rPr>
+              <a:t>月費訂閱 + 託管監控，建立可預測現金流</a:t>
+            </a:r>
+            <a:endParaRPr lang="en-US" sz="1050" dirty="0"/>
+          </a:p>
+        </p:txBody>
+      </p:sp>
+      <p:sp>
+        <p:nvSpPr>
+          <p:cNvPr id="47" name="Shape 44"/>
+          <p:cNvSpPr/>
+          <p:nvPr/>
+        </p:nvSpPr>
+        <p:spPr>
+          <a:xfrm>
+            <a:off x="6428232" y="4562856"/>
+            <a:ext cx="292608" cy="292608"/>
+          </a:xfrm>
+          <a:prstGeom prst="ellipse">
             <a:avLst/>
           </a:prstGeom>
           <a:solidFill>
-            <a:srgbClr val="8B5CF6"/>
+            <a:srgbClr val="F38020"/>
           </a:solidFill>
           <a:ln/>
         </p:spPr>
       </p:sp>
       <p:sp>
         <p:nvSpPr>
-          <p:cNvPr id="35" name="Text 32"/>
-          <p:cNvSpPr/>
-          <p:nvPr/>
-        </p:nvSpPr>
-        <p:spPr>
-          <a:xfrm>
-            <a:off x="8357616" y="2606040"/>
-            <a:ext cx="3108960" cy="320040"/>
-          </a:xfrm>
-          <a:prstGeom prst="rect">
-            <a:avLst/>
-          </a:prstGeom>
-          <a:noFill/>
-          <a:ln/>
-        </p:spPr>
-        <p:txBody>
-          <a:bodyPr wrap="square" rtlCol="0" anchor="ctr"/>
-          <a:lstStyle/>
-          <a:p>
-            <a:pPr indent="0" marL="0">
-              <a:buNone/>
-            </a:pPr>
-            <a:r>
-              <a:rPr lang="en-US" sz="1150" dirty="0">
+          <p:cNvPr id="48" name="Text 45"/>
+          <p:cNvSpPr/>
+          <p:nvPr/>
+        </p:nvSpPr>
+        <p:spPr>
+          <a:xfrm>
+            <a:off x="6428232" y="4562856"/>
+            <a:ext cx="292608" cy="292608"/>
+          </a:xfrm>
+          <a:prstGeom prst="rect">
+            <a:avLst/>
+          </a:prstGeom>
+          <a:noFill/>
+          <a:ln/>
+        </p:spPr>
+        <p:txBody>
+          <a:bodyPr wrap="square" rtlCol="0" anchor="ctr"/>
+          <a:lstStyle/>
+          <a:p>
+            <a:pPr algn="ctr" indent="0" marL="0">
+              <a:buNone/>
+            </a:pPr>
+            <a:r>
+              <a:rPr lang="en-US" sz="1200" b="1" dirty="0">
+                <a:solidFill>
+                  <a:srgbClr val="FFFFFF"/>
+                </a:solidFill>
+                <a:latin typeface="Calibri" pitchFamily="34" charset="0"/>
+                <a:ea typeface="Calibri" pitchFamily="34" charset="-122"/>
+                <a:cs typeface="Calibri" pitchFamily="34" charset="-120"/>
+              </a:rPr>
+              <a:t>4</a:t>
+            </a:r>
+            <a:endParaRPr lang="en-US" sz="1200" dirty="0"/>
+          </a:p>
+        </p:txBody>
+      </p:sp>
+      <p:sp>
+        <p:nvSpPr>
+          <p:cNvPr id="49" name="Text 46"/>
+          <p:cNvSpPr/>
+          <p:nvPr/>
+        </p:nvSpPr>
+        <p:spPr>
+          <a:xfrm>
+            <a:off x="6793992" y="4517136"/>
+            <a:ext cx="4754880" cy="292608"/>
+          </a:xfrm>
+          <a:prstGeom prst="rect">
+            <a:avLst/>
+          </a:prstGeom>
+          <a:noFill/>
+          <a:ln/>
+        </p:spPr>
+        <p:txBody>
+          <a:bodyPr wrap="square" rtlCol="0" anchor="ctr"/>
+          <a:lstStyle/>
+          <a:p>
+            <a:pPr indent="0" marL="0">
+              <a:buNone/>
+            </a:pPr>
+            <a:r>
+              <a:rPr lang="en-US" sz="1300" b="1" dirty="0">
+                <a:solidFill>
+                  <a:srgbClr val="1A1A1A"/>
+                </a:solidFill>
+                <a:latin typeface="微軟正黑體" pitchFamily="34" charset="0"/>
+                <a:ea typeface="微軟正黑體" pitchFamily="34" charset="-122"/>
+                <a:cs typeface="微軟正黑體" pitchFamily="34" charset="-120"/>
+              </a:rPr>
+              <a:t>Marketplace Ecosystem</a:t>
+            </a:r>
+            <a:endParaRPr lang="en-US" sz="1300" dirty="0"/>
+          </a:p>
+        </p:txBody>
+      </p:sp>
+      <p:sp>
+        <p:nvSpPr>
+          <p:cNvPr id="50" name="Text 47"/>
+          <p:cNvSpPr/>
+          <p:nvPr/>
+        </p:nvSpPr>
+        <p:spPr>
+          <a:xfrm>
+            <a:off x="6793992" y="4809744"/>
+            <a:ext cx="4754880" cy="365760"/>
+          </a:xfrm>
+          <a:prstGeom prst="rect">
+            <a:avLst/>
+          </a:prstGeom>
+          <a:noFill/>
+          <a:ln/>
+        </p:spPr>
+        <p:txBody>
+          <a:bodyPr wrap="square" rtlCol="0" anchor="ctr"/>
+          <a:lstStyle/>
+          <a:p>
+            <a:pPr indent="0" marL="0">
+              <a:buNone/>
+            </a:pPr>
+            <a:r>
+              <a:rPr lang="en-US" sz="1050" dirty="0">
                 <a:solidFill>
                   <a:srgbClr val="444444"/>
                 </a:solidFill>
@@ -8520,38 +8965,136 @@
                 <a:ea typeface="微軟正黑體" pitchFamily="34" charset="-122"/>
                 <a:cs typeface="微軟正黑體" pitchFamily="34" charset="-120"/>
               </a:rPr>
-              <a:t>✓ Advanced 全部 + 24/7 SOC</a:t>
-            </a:r>
-            <a:endParaRPr lang="en-US" sz="1150" dirty="0"/>
-          </a:p>
-        </p:txBody>
-      </p:sp>
-      <p:sp>
-        <p:nvSpPr>
-          <p:cNvPr id="36" name="Text 33"/>
-          <p:cNvSpPr/>
-          <p:nvPr/>
-        </p:nvSpPr>
-        <p:spPr>
-          <a:xfrm>
-            <a:off x="8357616" y="2971800"/>
-            <a:ext cx="3108960" cy="320040"/>
-          </a:xfrm>
-          <a:prstGeom prst="rect">
-            <a:avLst/>
-          </a:prstGeom>
-          <a:noFill/>
-          <a:ln/>
-        </p:spPr>
-        <p:txBody>
-          <a:bodyPr wrap="square" rtlCol="0" anchor="ctr"/>
-          <a:lstStyle/>
-          <a:p>
-            <a:pPr indent="0" marL="0">
-              <a:buNone/>
-            </a:pPr>
-            <a:r>
-              <a:rPr lang="en-US" sz="1150" dirty="0">
+              <a:t>CF 一級夥伴生態，享受技術更新紅利</a:t>
+            </a:r>
+            <a:endParaRPr lang="en-US" sz="1050" dirty="0"/>
+          </a:p>
+        </p:txBody>
+      </p:sp>
+      <p:sp>
+        <p:nvSpPr>
+          <p:cNvPr id="51" name="Shape 48"/>
+          <p:cNvSpPr/>
+          <p:nvPr/>
+        </p:nvSpPr>
+        <p:spPr>
+          <a:xfrm>
+            <a:off x="6428232" y="5276088"/>
+            <a:ext cx="292608" cy="292608"/>
+          </a:xfrm>
+          <a:prstGeom prst="ellipse">
+            <a:avLst/>
+          </a:prstGeom>
+          <a:solidFill>
+            <a:srgbClr val="F38020"/>
+          </a:solidFill>
+          <a:ln/>
+        </p:spPr>
+      </p:sp>
+      <p:sp>
+        <p:nvSpPr>
+          <p:cNvPr id="52" name="Text 49"/>
+          <p:cNvSpPr/>
+          <p:nvPr/>
+        </p:nvSpPr>
+        <p:spPr>
+          <a:xfrm>
+            <a:off x="6428232" y="5276088"/>
+            <a:ext cx="292608" cy="292608"/>
+          </a:xfrm>
+          <a:prstGeom prst="rect">
+            <a:avLst/>
+          </a:prstGeom>
+          <a:noFill/>
+          <a:ln/>
+        </p:spPr>
+        <p:txBody>
+          <a:bodyPr wrap="square" rtlCol="0" anchor="ctr"/>
+          <a:lstStyle/>
+          <a:p>
+            <a:pPr algn="ctr" indent="0" marL="0">
+              <a:buNone/>
+            </a:pPr>
+            <a:r>
+              <a:rPr lang="en-US" sz="1200" b="1" dirty="0">
+                <a:solidFill>
+                  <a:srgbClr val="FFFFFF"/>
+                </a:solidFill>
+                <a:latin typeface="Calibri" pitchFamily="34" charset="0"/>
+                <a:ea typeface="Calibri" pitchFamily="34" charset="-122"/>
+                <a:cs typeface="Calibri" pitchFamily="34" charset="-120"/>
+              </a:rPr>
+              <a:t>5</a:t>
+            </a:r>
+            <a:endParaRPr lang="en-US" sz="1200" dirty="0"/>
+          </a:p>
+        </p:txBody>
+      </p:sp>
+      <p:sp>
+        <p:nvSpPr>
+          <p:cNvPr id="53" name="Text 50"/>
+          <p:cNvSpPr/>
+          <p:nvPr/>
+        </p:nvSpPr>
+        <p:spPr>
+          <a:xfrm>
+            <a:off x="6793992" y="5230368"/>
+            <a:ext cx="4754880" cy="292608"/>
+          </a:xfrm>
+          <a:prstGeom prst="rect">
+            <a:avLst/>
+          </a:prstGeom>
+          <a:noFill/>
+          <a:ln/>
+        </p:spPr>
+        <p:txBody>
+          <a:bodyPr wrap="square" rtlCol="0" anchor="ctr"/>
+          <a:lstStyle/>
+          <a:p>
+            <a:pPr indent="0" marL="0">
+              <a:buNone/>
+            </a:pPr>
+            <a:r>
+              <a:rPr lang="en-US" sz="1300" b="1" dirty="0">
+                <a:solidFill>
+                  <a:srgbClr val="1A1A1A"/>
+                </a:solidFill>
+                <a:latin typeface="微軟正黑體" pitchFamily="34" charset="0"/>
+                <a:ea typeface="微軟正黑體" pitchFamily="34" charset="-122"/>
+                <a:cs typeface="微軟正黑體" pitchFamily="34" charset="-120"/>
+              </a:rPr>
+              <a:t>Cross-sell 漏斗</a:t>
+            </a:r>
+            <a:endParaRPr lang="en-US" sz="1300" dirty="0"/>
+          </a:p>
+        </p:txBody>
+      </p:sp>
+      <p:sp>
+        <p:nvSpPr>
+          <p:cNvPr id="54" name="Text 51"/>
+          <p:cNvSpPr/>
+          <p:nvPr/>
+        </p:nvSpPr>
+        <p:spPr>
+          <a:xfrm>
+            <a:off x="6793992" y="5522976"/>
+            <a:ext cx="4754880" cy="365760"/>
+          </a:xfrm>
+          <a:prstGeom prst="rect">
+            <a:avLst/>
+          </a:prstGeom>
+          <a:noFill/>
+          <a:ln/>
+        </p:spPr>
+        <p:txBody>
+          <a:bodyPr wrap="square" rtlCol="0" anchor="ctr"/>
+          <a:lstStyle/>
+          <a:p>
+            <a:pPr indent="0" marL="0">
+              <a:buNone/>
+            </a:pPr>
+            <a:r>
+              <a:rPr lang="en-US" sz="1050" dirty="0">
                 <a:solidFill>
                   <a:srgbClr val="444444"/>
                 </a:solidFill>
@@ -8559,204 +9102,9 @@
                 <a:ea typeface="微軟正黑體" pitchFamily="34" charset="-122"/>
                 <a:cs typeface="微軟正黑體" pitchFamily="34" charset="-120"/>
               </a:rPr>
-              <a:t>✓ 專屬 TAM 技術窗口</a:t>
-            </a:r>
-            <a:endParaRPr lang="en-US" sz="1150" dirty="0"/>
-          </a:p>
-        </p:txBody>
-      </p:sp>
-      <p:sp>
-        <p:nvSpPr>
-          <p:cNvPr id="37" name="Text 34"/>
-          <p:cNvSpPr/>
-          <p:nvPr/>
-        </p:nvSpPr>
-        <p:spPr>
-          <a:xfrm>
-            <a:off x="8357616" y="3337560"/>
-            <a:ext cx="3108960" cy="320040"/>
-          </a:xfrm>
-          <a:prstGeom prst="rect">
-            <a:avLst/>
-          </a:prstGeom>
-          <a:noFill/>
-          <a:ln/>
-        </p:spPr>
-        <p:txBody>
-          <a:bodyPr wrap="square" rtlCol="0" anchor="ctr"/>
-          <a:lstStyle/>
-          <a:p>
-            <a:pPr indent="0" marL="0">
-              <a:buNone/>
-            </a:pPr>
-            <a:r>
-              <a:rPr lang="en-US" sz="1150" dirty="0">
-                <a:solidFill>
-                  <a:srgbClr val="444444"/>
-                </a:solidFill>
-                <a:latin typeface="微軟正黑體" pitchFamily="34" charset="0"/>
-                <a:ea typeface="微軟正黑體" pitchFamily="34" charset="-122"/>
-                <a:cs typeface="微軟正黑體" pitchFamily="34" charset="-120"/>
-              </a:rPr>
-              <a:t>✓ 季度資安健診</a:t>
-            </a:r>
-            <a:endParaRPr lang="en-US" sz="1150" dirty="0"/>
-          </a:p>
-        </p:txBody>
-      </p:sp>
-      <p:sp>
-        <p:nvSpPr>
-          <p:cNvPr id="38" name="Text 35"/>
-          <p:cNvSpPr/>
-          <p:nvPr/>
-        </p:nvSpPr>
-        <p:spPr>
-          <a:xfrm>
-            <a:off x="8357616" y="3703320"/>
-            <a:ext cx="3108960" cy="320040"/>
-          </a:xfrm>
-          <a:prstGeom prst="rect">
-            <a:avLst/>
-          </a:prstGeom>
-          <a:noFill/>
-          <a:ln/>
-        </p:spPr>
-        <p:txBody>
-          <a:bodyPr wrap="square" rtlCol="0" anchor="ctr"/>
-          <a:lstStyle/>
-          <a:p>
-            <a:pPr indent="0" marL="0">
-              <a:buNone/>
-            </a:pPr>
-            <a:r>
-              <a:rPr lang="en-US" sz="1150" dirty="0">
-                <a:solidFill>
-                  <a:srgbClr val="444444"/>
-                </a:solidFill>
-                <a:latin typeface="微軟正黑體" pitchFamily="34" charset="0"/>
-                <a:ea typeface="微軟正黑體" pitchFamily="34" charset="-122"/>
-                <a:cs typeface="微軟正黑體" pitchFamily="34" charset="-120"/>
-              </a:rPr>
-              <a:t>✓ 與 ZTNA + Intezer 整合</a:t>
-            </a:r>
-            <a:endParaRPr lang="en-US" sz="1150" dirty="0"/>
-          </a:p>
-        </p:txBody>
-      </p:sp>
-      <p:sp>
-        <p:nvSpPr>
-          <p:cNvPr id="39" name="Text 36"/>
-          <p:cNvSpPr/>
-          <p:nvPr/>
-        </p:nvSpPr>
-        <p:spPr>
-          <a:xfrm>
-            <a:off x="8083296" y="4297680"/>
-            <a:ext cx="3657600" cy="457200"/>
-          </a:xfrm>
-          <a:prstGeom prst="rect">
-            <a:avLst/>
-          </a:prstGeom>
-          <a:noFill/>
-          <a:ln/>
-        </p:spPr>
-        <p:txBody>
-          <a:bodyPr wrap="square" rtlCol="0" anchor="ctr"/>
-          <a:lstStyle/>
-          <a:p>
-            <a:pPr algn="ctr" indent="0" marL="0">
-              <a:buNone/>
-            </a:pPr>
-            <a:r>
-              <a:rPr lang="en-US" sz="1800" b="1" dirty="0">
-                <a:solidFill>
-                  <a:srgbClr val="8B5CF6"/>
-                </a:solidFill>
-                <a:latin typeface="微軟正黑體" pitchFamily="34" charset="0"/>
-                <a:ea typeface="微軟正黑體" pitchFamily="34" charset="-122"/>
-                <a:cs typeface="微軟正黑體" pitchFamily="34" charset="-120"/>
-              </a:rPr>
-              <a:t>NT$800-1,200萬/年</a:t>
-            </a:r>
-            <a:endParaRPr lang="en-US" sz="1800" dirty="0"/>
-          </a:p>
-        </p:txBody>
-      </p:sp>
-      <p:sp>
-        <p:nvSpPr>
-          <p:cNvPr id="40" name="Text 37"/>
-          <p:cNvSpPr/>
-          <p:nvPr/>
-        </p:nvSpPr>
-        <p:spPr>
-          <a:xfrm>
-            <a:off x="8083296" y="4846320"/>
-            <a:ext cx="3657600" cy="228600"/>
-          </a:xfrm>
-          <a:prstGeom prst="rect">
-            <a:avLst/>
-          </a:prstGeom>
-          <a:noFill/>
-          <a:ln/>
-        </p:spPr>
-        <p:txBody>
-          <a:bodyPr wrap="square" rtlCol="0" anchor="ctr"/>
-          <a:lstStyle/>
-          <a:p>
-            <a:pPr algn="ctr" indent="0" marL="0">
-              <a:buNone/>
-            </a:pPr>
-            <a:r>
-              <a:rPr lang="en-US" sz="1000" b="1" dirty="0">
-                <a:solidFill>
-                  <a:srgbClr val="888888"/>
-                </a:solidFill>
-                <a:latin typeface="微軟正黑體" pitchFamily="34" charset="0"/>
-                <a:ea typeface="微軟正黑體" pitchFamily="34" charset="-122"/>
-                <a:cs typeface="微軟正黑體" pitchFamily="34" charset="-120"/>
-              </a:rPr>
-              <a:t>適用對象</a:t>
-            </a:r>
-            <a:endParaRPr lang="en-US" sz="1000" dirty="0"/>
-          </a:p>
-        </p:txBody>
-      </p:sp>
-      <p:sp>
-        <p:nvSpPr>
-          <p:cNvPr id="41" name="Text 38"/>
-          <p:cNvSpPr/>
-          <p:nvPr/>
-        </p:nvSpPr>
-        <p:spPr>
-          <a:xfrm>
-            <a:off x="8266176" y="5074920"/>
-            <a:ext cx="3291840" cy="640080"/>
-          </a:xfrm>
-          <a:prstGeom prst="rect">
-            <a:avLst/>
-          </a:prstGeom>
-          <a:noFill/>
-          <a:ln/>
-        </p:spPr>
-        <p:txBody>
-          <a:bodyPr wrap="square" rtlCol="0" anchor="ctr"/>
-          <a:lstStyle/>
-          <a:p>
-            <a:pPr algn="ctr" indent="0" marL="0">
-              <a:buNone/>
-            </a:pPr>
-            <a:r>
-              <a:rPr lang="en-US" sz="1100" dirty="0">
-                <a:solidFill>
-                  <a:srgbClr val="444444"/>
-                </a:solidFill>
-                <a:latin typeface="微軟正黑體" pitchFamily="34" charset="0"/>
-                <a:ea typeface="微軟正黑體" pitchFamily="34" charset="-122"/>
-                <a:cs typeface="微軟正黑體" pitchFamily="34" charset="-120"/>
-              </a:rPr>
-              <a:t>大型企業 / 金融 / 製造業旗艦</a:t>
-            </a:r>
-            <a:endParaRPr lang="en-US" sz="1100" dirty="0"/>
+              <a:t>從 AI 治理切入 → 帶出整體資安解決方案</a:t>
+            </a:r>
+            <a:endParaRPr lang="en-US" sz="1050" dirty="0"/>
           </a:p>
         </p:txBody>
       </p:sp>
@@ -8893,7 +9241,7 @@
               <a:buNone/>
             </a:pPr>
             <a:r>
-              <a:rPr lang="en-US" sz="2600" b="1" dirty="0">
+              <a:rPr lang="en-US" sz="2000" b="1" dirty="0">
                 <a:solidFill>
                   <a:srgbClr val="F38020"/>
                 </a:solidFill>
@@ -8901,13 +9249,13 @@
                 <a:ea typeface="Calibri" pitchFamily="34" charset="-122"/>
                 <a:cs typeface="Calibri" pitchFamily="34" charset="-120"/>
               </a:rPr>
-              <a:t>WHERE THIS COURSE FITS</a:t>
-            </a:r>
-            <a:pPr indent="0" marL="0">
-              <a:buNone/>
-            </a:pPr>
-            <a:r>
-              <a:rPr lang="en-US" sz="2600" b="1" dirty="0">
+              <a:t>WHAT YOU TAKE HOME</a:t>
+            </a:r>
+            <a:pPr indent="0" marL="0">
+              <a:buNone/>
+            </a:pPr>
+            <a:r>
+              <a:rPr lang="en-US" sz="2000" b="1" dirty="0">
                 <a:solidFill>
                   <a:srgbClr val="B0B0B0"/>
                 </a:solidFill>
@@ -8921,7 +9269,7 @@
               <a:buNone/>
             </a:pPr>
             <a:r>
-              <a:rPr lang="en-US" sz="2600" b="1" dirty="0">
+              <a:rPr lang="en-US" sz="2000" b="1" dirty="0">
                 <a:solidFill>
                   <a:srgbClr val="1A1A1A"/>
                 </a:solidFill>
@@ -8929,9 +9277,9 @@
                 <a:ea typeface="微軟正黑體" pitchFamily="34" charset="-122"/>
                 <a:cs typeface="微軟正黑體" pitchFamily="34" charset="-120"/>
               </a:rPr>
-              <a:t>這堂課在樂雲整體戰略中的位置</a:t>
-            </a:r>
-            <a:endParaRPr lang="en-US" sz="2600" dirty="0"/>
+              <a:t>碩士生視角：這堂課你會帶走什麼？</a:t>
+            </a:r>
+            <a:endParaRPr lang="en-US" sz="2000" dirty="0"/>
           </a:p>
         </p:txBody>
       </p:sp>
@@ -8943,8 +9291,8 @@
         </p:nvSpPr>
         <p:spPr>
           <a:xfrm>
-            <a:off x="457200" y="886968"/>
-            <a:ext cx="5632704" cy="137160"/>
+            <a:off x="457200" y="1042416"/>
+            <a:ext cx="4718304" cy="109728"/>
           </a:xfrm>
           <a:prstGeom prst="rect">
             <a:avLst/>
@@ -8965,8 +9313,8 @@
         </p:nvSpPr>
         <p:spPr>
           <a:xfrm>
-            <a:off x="457200" y="1097280"/>
-            <a:ext cx="8686800" cy="320040"/>
+            <a:off x="457200" y="1225296"/>
+            <a:ext cx="8686800" cy="292608"/>
           </a:xfrm>
           <a:prstGeom prst="rect">
             <a:avLst/>
@@ -8990,7 +9338,7 @@
                 <a:ea typeface="微軟正黑體" pitchFamily="34" charset="-122"/>
                 <a:cs typeface="微軟正黑體" pitchFamily="34" charset="-120"/>
               </a:rPr>
-              <a:t>本課程是樂雲「以教育帶動商用」策略的一環 — 學員即未來潛在合作夥伴</a:t>
+              <a:t>一個能跑的開源骨架 + 一套可遷移到任何雲平台的設計概念 + 後續可深入的研究地圖</a:t>
             </a:r>
             <a:endParaRPr lang="en-US" sz="1300" dirty="0"/>
           </a:p>
@@ -9043,7 +9391,7 @@
         </p:nvSpPr>
         <p:spPr>
           <a:xfrm>
-            <a:off x="457200" y="1508760"/>
+            <a:off x="457200" y="1783080"/>
             <a:ext cx="5577840" cy="365760"/>
           </a:xfrm>
           <a:prstGeom prst="rect">
@@ -9068,7 +9416,7 @@
                 <a:ea typeface="微軟正黑體" pitchFamily="34" charset="-122"/>
                 <a:cs typeface="微軟正黑體" pitchFamily="34" charset="-120"/>
               </a:rPr>
-              <a:t>課程提供的給學員</a:t>
+              <a:t>🎓  可帶走的技能與資產</a:t>
             </a:r>
             <a:endParaRPr lang="en-US" sz="1600" dirty="0"/>
           </a:p>
@@ -9082,7 +9430,7 @@
         </p:nvSpPr>
         <p:spPr>
           <a:xfrm>
-            <a:off x="457200" y="1965960"/>
+            <a:off x="457200" y="2240280"/>
             <a:ext cx="5577840" cy="457200"/>
           </a:xfrm>
           <a:prstGeom prst="rect">
@@ -9121,7 +9469,7 @@
         </p:nvSpPr>
         <p:spPr>
           <a:xfrm>
-            <a:off x="457200" y="2468880"/>
+            <a:off x="457200" y="2743200"/>
             <a:ext cx="5577840" cy="457200"/>
           </a:xfrm>
           <a:prstGeom prst="rect">
@@ -9146,7 +9494,7 @@
                 <a:ea typeface="微軟正黑體" pitchFamily="34" charset="-122"/>
                 <a:cs typeface="微軟正黑體" pitchFamily="34" charset="-120"/>
               </a:rPr>
-              <a:t>✓ 自己帳號上的 AI Gateway PoC 環境</a:t>
+              <a:t>✓ 部署到自己 CF 帳號的 AI Gateway 實作經驗</a:t>
             </a:r>
             <a:endParaRPr lang="en-US" sz="1300" dirty="0"/>
           </a:p>
@@ -9160,7 +9508,7 @@
         </p:nvSpPr>
         <p:spPr>
           <a:xfrm>
-            <a:off x="457200" y="2971800"/>
+            <a:off x="457200" y="3246120"/>
             <a:ext cx="5577840" cy="457200"/>
           </a:xfrm>
           <a:prstGeom prst="rect">
@@ -9199,7 +9547,7 @@
         </p:nvSpPr>
         <p:spPr>
           <a:xfrm>
-            <a:off x="457200" y="3474720"/>
+            <a:off x="457200" y="3749040"/>
             <a:ext cx="5577840" cy="457200"/>
           </a:xfrm>
           <a:prstGeom prst="rect">
@@ -9224,7 +9572,7 @@
                 <a:ea typeface="微軟正黑體" pitchFamily="34" charset="-122"/>
                 <a:cs typeface="微軟正黑體" pitchFamily="34" charset="-120"/>
               </a:rPr>
-              <a:t>✓ 後續自學的延伸方向地圖（RAG / Telegram / 多租戶）</a:t>
+              <a:t>✓ 邊緣運算 × 多模型 routing 的系統設計思維</a:t>
             </a:r>
             <a:endParaRPr lang="en-US" sz="1300" dirty="0"/>
           </a:p>
@@ -9238,7 +9586,7 @@
         </p:nvSpPr>
         <p:spPr>
           <a:xfrm>
-            <a:off x="457200" y="3977640"/>
+            <a:off x="457200" y="4251960"/>
             <a:ext cx="5577840" cy="457200"/>
           </a:xfrm>
           <a:prstGeom prst="rect">
@@ -9263,7 +9611,7 @@
                 <a:ea typeface="微軟正黑體" pitchFamily="34" charset="-122"/>
                 <a:cs typeface="微軟正黑體" pitchFamily="34" charset="-120"/>
               </a:rPr>
-              <a:t>✓ 樂雲商用方案聯絡窗口（Basic / Advanced / Premium）</a:t>
+              <a:t>✓ MCP 協議與 agentic loop 的程式碼級理解</a:t>
             </a:r>
             <a:endParaRPr lang="en-US" sz="1300" dirty="0"/>
           </a:p>
@@ -9277,7 +9625,7 @@
         </p:nvSpPr>
         <p:spPr>
           <a:xfrm>
-            <a:off x="6309360" y="1508760"/>
+            <a:off x="6309360" y="1783080"/>
             <a:ext cx="5486400" cy="365760"/>
           </a:xfrm>
           <a:prstGeom prst="rect">
@@ -9302,7 +9650,7 @@
                 <a:ea typeface="微軟正黑體" pitchFamily="34" charset="-122"/>
                 <a:cs typeface="微軟正黑體" pitchFamily="34" charset="-120"/>
               </a:rPr>
-              <a:t>樂雲後續可協助的延伸服務</a:t>
+              <a:t>🔬  延伸可探索的研究方向</a:t>
             </a:r>
             <a:endParaRPr lang="en-US" sz="1600" dirty="0"/>
           </a:p>
@@ -9316,7 +9664,7 @@
         </p:nvSpPr>
         <p:spPr>
           <a:xfrm>
-            <a:off x="6309360" y="1965960"/>
+            <a:off x="6309360" y="2240280"/>
             <a:ext cx="5486400" cy="457200"/>
           </a:xfrm>
           <a:prstGeom prst="rect">
@@ -9341,7 +9689,7 @@
                 <a:ea typeface="微軟正黑體" pitchFamily="34" charset="-122"/>
                 <a:cs typeface="微軟正黑體" pitchFamily="34" charset="-120"/>
               </a:rPr>
-              <a:t>🛠️ PoC 30 天免費試用（更完整環境）</a:t>
+              <a:t>🧠 LLM Routing：依語意分流到不同 model</a:t>
             </a:r>
             <a:endParaRPr lang="en-US" sz="1300" dirty="0"/>
           </a:p>
@@ -9355,7 +9703,7 @@
         </p:nvSpPr>
         <p:spPr>
           <a:xfrm>
-            <a:off x="6309360" y="2468880"/>
+            <a:off x="6309360" y="2743200"/>
             <a:ext cx="5486400" cy="457200"/>
           </a:xfrm>
           <a:prstGeom prst="rect">
@@ -9380,7 +9728,7 @@
                 <a:ea typeface="微軟正黑體" pitchFamily="34" charset="-122"/>
                 <a:cs typeface="微軟正黑體" pitchFamily="34" charset="-120"/>
               </a:rPr>
-              <a:t>🏢 企業內訓客製化版本（含貴公司案例）</a:t>
+              <a:t>⚡ Cost-aware Caching：精準命中 vs 模糊命中</a:t>
             </a:r>
             <a:endParaRPr lang="en-US" sz="1300" dirty="0"/>
           </a:p>
@@ -9394,7 +9742,7 @@
         </p:nvSpPr>
         <p:spPr>
           <a:xfrm>
-            <a:off x="6309360" y="2971800"/>
+            <a:off x="6309360" y="3246120"/>
             <a:ext cx="5486400" cy="457200"/>
           </a:xfrm>
           <a:prstGeom prst="rect">
@@ -9419,7 +9767,7 @@
                 <a:ea typeface="微軟正黑體" pitchFamily="34" charset="-122"/>
                 <a:cs typeface="微軟正黑體" pitchFamily="34" charset="-120"/>
               </a:rPr>
-              <a:t>🤝 商用方案導入（Basic / Advanced / Premium）</a:t>
+              <a:t>🛡️ Guardrail 評估：誤判率 / 漏報率分析</a:t>
             </a:r>
             <a:endParaRPr lang="en-US" sz="1300" dirty="0"/>
           </a:p>
@@ -9433,7 +9781,7 @@
         </p:nvSpPr>
         <p:spPr>
           <a:xfrm>
-            <a:off x="6309360" y="3474720"/>
+            <a:off x="6309360" y="3749040"/>
             <a:ext cx="5486400" cy="457200"/>
           </a:xfrm>
           <a:prstGeom prst="rect">
@@ -9458,7 +9806,7 @@
                 <a:ea typeface="微軟正黑體" pitchFamily="34" charset="-122"/>
                 <a:cs typeface="微軟正黑體" pitchFamily="34" charset="-120"/>
               </a:rPr>
-              <a:t>☎️ 顧問諮詢服務（資安治理、雲端架構評估）</a:t>
+              <a:t>🔁 Agentic Loop 安全性：tool injection 防護</a:t>
             </a:r>
             <a:endParaRPr lang="en-US" sz="1300" dirty="0"/>
           </a:p>
@@ -9472,7 +9820,7 @@
         </p:nvSpPr>
         <p:spPr>
           <a:xfrm>
-            <a:off x="6309360" y="3977640"/>
+            <a:off x="6309360" y="4251960"/>
             <a:ext cx="5486400" cy="457200"/>
           </a:xfrm>
           <a:prstGeom prst="rect">
@@ -9497,7 +9845,7 @@
                 <a:ea typeface="微軟正黑體" pitchFamily="34" charset="-122"/>
                 <a:cs typeface="微軟正黑體" pitchFamily="34" charset="-120"/>
               </a:rPr>
-              <a:t>📚 與 Cloudflare 原廠聯合舉辦的進階課程</a:t>
+              <a:t>📊 多租戶治理：邊緣端 policy enforcement</a:t>
             </a:r>
             <a:endParaRPr lang="en-US" sz="1300" dirty="0"/>
           </a:p>
@@ -9511,12 +9859,12 @@
         </p:nvSpPr>
         <p:spPr>
           <a:xfrm>
-            <a:off x="457200" y="5806440"/>
-            <a:ext cx="11274552" cy="365760"/>
+            <a:off x="457200" y="5989320"/>
+            <a:ext cx="11274552" cy="347472"/>
           </a:xfrm>
           <a:prstGeom prst="roundRect">
             <a:avLst>
-              <a:gd name="adj" fmla="val 15000"/>
+              <a:gd name="adj" fmla="val 15789"/>
             </a:avLst>
           </a:prstGeom>
           <a:solidFill>
@@ -9533,8 +9881,8 @@
         </p:nvSpPr>
         <p:spPr>
           <a:xfrm>
-            <a:off x="457200" y="5806440"/>
-            <a:ext cx="54864" cy="365760"/>
+            <a:off x="457200" y="5989320"/>
+            <a:ext cx="54864" cy="347472"/>
           </a:xfrm>
           <a:prstGeom prst="rect">
             <a:avLst/>
@@ -9553,8 +9901,8 @@
         </p:nvSpPr>
         <p:spPr>
           <a:xfrm>
-            <a:off x="640080" y="5806440"/>
-            <a:ext cx="11000232" cy="365760"/>
+            <a:off x="640080" y="5989320"/>
+            <a:ext cx="11000232" cy="347472"/>
           </a:xfrm>
           <a:prstGeom prst="rect">
             <a:avLst/>
@@ -9578,7 +9926,7 @@
                 <a:ea typeface="微軟正黑體" pitchFamily="34" charset="-122"/>
                 <a:cs typeface="微軟正黑體" pitchFamily="34" charset="-120"/>
               </a:rPr>
-              <a:t>今天教的是「免費自建版本」，明天樂雲可以幫您升級成「商用治理版本」— 這就是樂雲的差異化價值。</a:t>
+              <a:t>本課程的程式碼骨架可作為碩士論文 / 期末專題的起點 — 你可以基於它探索 LLM 系統研究、邊緣 AI 架構或多 agent 協作議題。</a:t>
             </a:r>
             <a:endParaRPr lang="en-US" sz="1100" dirty="0"/>
           </a:p>
@@ -9720,7 +10068,7 @@
                 <a:ea typeface="微軟正黑體" pitchFamily="34" charset="-122"/>
                 <a:cs typeface="微軟正黑體" pitchFamily="34" charset="-120"/>
               </a:rPr>
-              <a:t>免費諮詢</a:t>
+              <a:t>技術交流</a:t>
             </a:r>
             <a:endParaRPr lang="en-US" sz="2400" dirty="0"/>
           </a:p>
@@ -9954,7 +10302,7 @@
                 <a:ea typeface="微軟正黑體" pitchFamily="34" charset="-122"/>
                 <a:cs typeface="微軟正黑體" pitchFamily="34" charset="-120"/>
               </a:rPr>
-              <a:t>service@leyun.cloud</a:t>
+              <a:t>victor@leyun.cloud</a:t>
             </a:r>
             <a:endParaRPr lang="en-US" sz="1400" dirty="0"/>
           </a:p>
@@ -10055,7 +10403,7 @@
                 <a:ea typeface="微軟正黑體" pitchFamily="34" charset="-122"/>
                 <a:cs typeface="微軟正黑體" pitchFamily="34" charset="-120"/>
               </a:rPr>
-              <a:t>獲取免費諮詢</a:t>
+              <a:t>Repo 持續開放</a:t>
             </a:r>
             <a:endParaRPr lang="en-US" sz="2800" dirty="0"/>
           </a:p>
@@ -10075,7 +10423,7 @@
                 <a:ea typeface="微軟正黑體" pitchFamily="34" charset="-122"/>
                 <a:cs typeface="微軟正黑體" pitchFamily="34" charset="-120"/>
               </a:rPr>
-              <a:t>與 30 天 PoC 試用</a:t>
+              <a:t>歡迎延伸研究</a:t>
             </a:r>
             <a:endParaRPr lang="en-US" sz="2800" dirty="0"/>
           </a:p>
@@ -10114,7 +10462,7 @@
                 <a:ea typeface="微軟正黑體" pitchFamily="34" charset="-122"/>
                 <a:cs typeface="微軟正黑體" pitchFamily="34" charset="-120"/>
               </a:rPr>
-              <a:t>本課程講師 Victor Lin · 解決方案事業部主管</a:t>
+              <a:t>本課程講師 Victor Lin · 企業客戶解決方案事業部主管</a:t>
             </a:r>
             <a:endParaRPr lang="en-US" sz="1500" dirty="0"/>
           </a:p>
@@ -10173,7 +10521,7 @@
                 <a:ea typeface="微軟正黑體" pitchFamily="34" charset="-122"/>
                 <a:cs typeface="微軟正黑體" pitchFamily="34" charset="-120"/>
               </a:rPr>
-              <a:t>NEXT STEP — 申請 PoC 環境，或洽詢企業內訓客製化版本</a:t>
+              <a:t>NEXT STEP — 課後問題、PR 貢獻或研究議題討論皆歡迎來信</a:t>
             </a:r>
             <a:endParaRPr lang="en-US" sz="1400" dirty="0"/>
           </a:p>
@@ -10212,7 +10560,7 @@
                 <a:ea typeface="微軟正黑體" pitchFamily="34" charset="-122"/>
                 <a:cs typeface="微軟正黑體" pitchFamily="34" charset="-120"/>
               </a:rPr>
-              <a:t>直接 email：victor@leyun.cloud  |  或週一至週五 09:00-18:00 來電</a:t>
+              <a:t>github.com/victor80122/cloudflare-aigw-course · MIT License · 任意衍生</a:t>
             </a:r>
             <a:endParaRPr lang="en-US" sz="1200" dirty="0"/>
           </a:p>

--- a/slides/leyun-intro.pptx
+++ b/slides/leyun-intro.pptx
@@ -5839,7 +5839,7 @@
         <p:spPr>
           <a:xfrm>
             <a:off x="640080" y="3474720"/>
-            <a:ext cx="3294888" cy="457200"/>
+            <a:ext cx="3294888" cy="365760"/>
           </a:xfrm>
           <a:prstGeom prst="rect">
             <a:avLst/>
@@ -5877,8 +5877,8 @@
         </p:nvSpPr>
         <p:spPr>
           <a:xfrm>
-            <a:off x="640080" y="3977640"/>
-            <a:ext cx="3294888" cy="457200"/>
+            <a:off x="640080" y="3886200"/>
+            <a:ext cx="3294888" cy="365760"/>
           </a:xfrm>
           <a:prstGeom prst="rect">
             <a:avLst/>
@@ -5916,8 +5916,8 @@
         </p:nvSpPr>
         <p:spPr>
           <a:xfrm>
-            <a:off x="640080" y="4480560"/>
-            <a:ext cx="3294888" cy="457200"/>
+            <a:off x="640080" y="4297680"/>
+            <a:ext cx="3294888" cy="365760"/>
           </a:xfrm>
           <a:prstGeom prst="rect">
             <a:avLst/>
@@ -5941,7 +5941,7 @@
                 <a:ea typeface="微軟正黑體" pitchFamily="34" charset="-122"/>
                 <a:cs typeface="微軟正黑體" pitchFamily="34" charset="-120"/>
               </a:rPr>
-              <a:t>▸  Anycast 自動路由</a:t>
+              <a:t>▸  與 Workers / D1 / KV 原生整合</a:t>
             </a:r>
             <a:endParaRPr lang="en-US" sz="1100" dirty="0"/>
           </a:p>
@@ -5955,8 +5955,8 @@
         </p:nvSpPr>
         <p:spPr>
           <a:xfrm>
-            <a:off x="640080" y="4983480"/>
-            <a:ext cx="3294888" cy="457200"/>
+            <a:off x="640080" y="4709160"/>
+            <a:ext cx="3294888" cy="365760"/>
           </a:xfrm>
           <a:prstGeom prst="rect">
             <a:avLst/>
@@ -5980,7 +5980,7 @@
                 <a:ea typeface="微軟正黑體" pitchFamily="34" charset="-122"/>
                 <a:cs typeface="微軟正黑體" pitchFamily="34" charset="-120"/>
               </a:rPr>
-              <a:t>▸  與 Workers / D1 / KV 原生整合</a:t>
+              <a:t>▸  無 Cold Start 顧慮</a:t>
             </a:r>
             <a:endParaRPr lang="en-US" sz="1100" dirty="0"/>
           </a:p>
@@ -5988,53 +5988,14 @@
       </p:sp>
       <p:sp>
         <p:nvSpPr>
-          <p:cNvPr id="20" name="Text 17"/>
-          <p:cNvSpPr/>
-          <p:nvPr/>
-        </p:nvSpPr>
-        <p:spPr>
-          <a:xfrm>
-            <a:off x="640080" y="5486400"/>
-            <a:ext cx="3294888" cy="457200"/>
-          </a:xfrm>
-          <a:prstGeom prst="rect">
-            <a:avLst/>
-          </a:prstGeom>
-          <a:noFill/>
-          <a:ln/>
-        </p:spPr>
-        <p:txBody>
-          <a:bodyPr wrap="square" rtlCol="0" anchor="ctr"/>
-          <a:lstStyle/>
-          <a:p>
-            <a:pPr indent="0" marL="0">
-              <a:buNone/>
-            </a:pPr>
-            <a:r>
-              <a:rPr lang="en-US" sz="1100" dirty="0">
-                <a:solidFill>
-                  <a:srgbClr val="444444"/>
-                </a:solidFill>
-                <a:latin typeface="微軟正黑體" pitchFamily="34" charset="0"/>
-                <a:ea typeface="微軟正黑體" pitchFamily="34" charset="-122"/>
-                <a:cs typeface="微軟正黑體" pitchFamily="34" charset="-120"/>
-              </a:rPr>
-              <a:t>▸  無 Cold Start 顧慮</a:t>
-            </a:r>
-            <a:endParaRPr lang="en-US" sz="1100" dirty="0"/>
-          </a:p>
-        </p:txBody>
-      </p:sp>
-      <p:sp>
-        <p:nvSpPr>
-          <p:cNvPr id="21" name="Shape 18"/>
-          <p:cNvSpPr/>
-          <p:nvPr/>
-        </p:nvSpPr>
-        <p:spPr>
-          <a:xfrm>
-            <a:off x="640080" y="5029200"/>
-            <a:ext cx="3294888" cy="658368"/>
+          <p:cNvPr id="20" name="Shape 17"/>
+          <p:cNvSpPr/>
+          <p:nvPr/>
+        </p:nvSpPr>
+        <p:spPr>
+          <a:xfrm>
+            <a:off x="640080" y="5212080"/>
+            <a:ext cx="3294888" cy="502920"/>
           </a:xfrm>
           <a:prstGeom prst="rect">
             <a:avLst/>
@@ -6047,14 +6008,14 @@
       </p:sp>
       <p:sp>
         <p:nvSpPr>
-          <p:cNvPr id="22" name="Text 19"/>
-          <p:cNvSpPr/>
-          <p:nvPr/>
-        </p:nvSpPr>
-        <p:spPr>
-          <a:xfrm>
-            <a:off x="640080" y="5029200"/>
-            <a:ext cx="3294888" cy="384048"/>
+          <p:cNvPr id="21" name="Text 18"/>
+          <p:cNvSpPr/>
+          <p:nvPr/>
+        </p:nvSpPr>
+        <p:spPr>
+          <a:xfrm>
+            <a:off x="640080" y="5212080"/>
+            <a:ext cx="3294888" cy="292608"/>
           </a:xfrm>
           <a:prstGeom prst="rect">
             <a:avLst/>
@@ -6070,7 +6031,7 @@
               <a:buNone/>
             </a:pPr>
             <a:r>
-              <a:rPr lang="en-US" sz="1800" b="1" dirty="0">
+              <a:rPr lang="en-US" sz="1600" b="1" dirty="0">
                 <a:solidFill>
                   <a:srgbClr val="FFFFFF"/>
                 </a:solidFill>
@@ -6080,20 +6041,20 @@
               </a:rPr>
               <a:t>&lt;5ms</a:t>
             </a:r>
-            <a:endParaRPr lang="en-US" sz="1800" dirty="0"/>
-          </a:p>
-        </p:txBody>
-      </p:sp>
-      <p:sp>
-        <p:nvSpPr>
-          <p:cNvPr id="23" name="Text 20"/>
-          <p:cNvSpPr/>
-          <p:nvPr/>
-        </p:nvSpPr>
-        <p:spPr>
-          <a:xfrm>
-            <a:off x="640080" y="5394960"/>
-            <a:ext cx="3294888" cy="292608"/>
+            <a:endParaRPr lang="en-US" sz="1600" dirty="0"/>
+          </a:p>
+        </p:txBody>
+      </p:sp>
+      <p:sp>
+        <p:nvSpPr>
+          <p:cNvPr id="22" name="Text 19"/>
+          <p:cNvSpPr/>
+          <p:nvPr/>
+        </p:nvSpPr>
+        <p:spPr>
+          <a:xfrm>
+            <a:off x="640080" y="5486400"/>
+            <a:ext cx="3294888" cy="237744"/>
           </a:xfrm>
           <a:prstGeom prst="rect">
             <a:avLst/>
@@ -6109,7 +6070,7 @@
               <a:buNone/>
             </a:pPr>
             <a:r>
-              <a:rPr lang="en-US" sz="1000" dirty="0">
+              <a:rPr lang="en-US" sz="900" dirty="0">
                 <a:solidFill>
                   <a:srgbClr val="FFFFFF"/>
                 </a:solidFill>
@@ -6119,13 +6080,13 @@
               </a:rPr>
               <a:t>台灣平均延遲</a:t>
             </a:r>
-            <a:endParaRPr lang="en-US" sz="1000" dirty="0"/>
-          </a:p>
-        </p:txBody>
-      </p:sp>
-      <p:sp>
-        <p:nvSpPr>
-          <p:cNvPr id="24" name="Shape 21"/>
+            <a:endParaRPr lang="en-US" sz="900" dirty="0"/>
+          </a:p>
+        </p:txBody>
+      </p:sp>
+      <p:sp>
+        <p:nvSpPr>
+          <p:cNvPr id="23" name="Shape 20"/>
           <p:cNvSpPr/>
           <p:nvPr/>
         </p:nvSpPr>
@@ -6150,7 +6111,7 @@
       </p:sp>
       <p:sp>
         <p:nvSpPr>
-          <p:cNvPr id="25" name="Shape 22"/>
+          <p:cNvPr id="24" name="Shape 21"/>
           <p:cNvSpPr/>
           <p:nvPr/>
         </p:nvSpPr>
@@ -6170,7 +6131,7 @@
       </p:sp>
       <p:sp>
         <p:nvSpPr>
-          <p:cNvPr id="26" name="Text 23"/>
+          <p:cNvPr id="25" name="Text 22"/>
           <p:cNvSpPr/>
           <p:nvPr/>
         </p:nvSpPr>
@@ -6209,7 +6170,7 @@
       </p:sp>
       <p:sp>
         <p:nvSpPr>
-          <p:cNvPr id="27" name="Text 24"/>
+          <p:cNvPr id="26" name="Text 23"/>
           <p:cNvSpPr/>
           <p:nvPr/>
         </p:nvSpPr>
@@ -6248,7 +6209,7 @@
       </p:sp>
       <p:sp>
         <p:nvSpPr>
-          <p:cNvPr id="28" name="Text 25"/>
+          <p:cNvPr id="27" name="Text 24"/>
           <p:cNvSpPr/>
           <p:nvPr/>
         </p:nvSpPr>
@@ -6287,7 +6248,7 @@
       </p:sp>
       <p:sp>
         <p:nvSpPr>
-          <p:cNvPr id="29" name="Text 26"/>
+          <p:cNvPr id="28" name="Text 25"/>
           <p:cNvSpPr/>
           <p:nvPr/>
         </p:nvSpPr>
@@ -6326,7 +6287,7 @@
       </p:sp>
       <p:sp>
         <p:nvSpPr>
-          <p:cNvPr id="30" name="Shape 27"/>
+          <p:cNvPr id="29" name="Shape 26"/>
           <p:cNvSpPr/>
           <p:nvPr/>
         </p:nvSpPr>
@@ -6346,14 +6307,53 @@
       </p:sp>
       <p:sp>
         <p:nvSpPr>
+          <p:cNvPr id="30" name="Text 27"/>
+          <p:cNvSpPr/>
+          <p:nvPr/>
+        </p:nvSpPr>
+        <p:spPr>
+          <a:xfrm>
+            <a:off x="4447032" y="3474720"/>
+            <a:ext cx="3294888" cy="365760"/>
+          </a:xfrm>
+          <a:prstGeom prst="rect">
+            <a:avLst/>
+          </a:prstGeom>
+          <a:noFill/>
+          <a:ln/>
+        </p:spPr>
+        <p:txBody>
+          <a:bodyPr wrap="square" rtlCol="0" anchor="ctr"/>
+          <a:lstStyle/>
+          <a:p>
+            <a:pPr indent="0" marL="0">
+              <a:buNone/>
+            </a:pPr>
+            <a:r>
+              <a:rPr lang="en-US" sz="1100" dirty="0">
+                <a:solidFill>
+                  <a:srgbClr val="444444"/>
+                </a:solidFill>
+                <a:latin typeface="微軟正黑體" pitchFamily="34" charset="0"/>
+                <a:ea typeface="微軟正黑體" pitchFamily="34" charset="-122"/>
+                <a:cs typeface="微軟正黑體" pitchFamily="34" charset="-120"/>
+              </a:rPr>
+              <a:t>▸  51+ LLM 模型統一入口</a:t>
+            </a:r>
+            <a:endParaRPr lang="en-US" sz="1100" dirty="0"/>
+          </a:p>
+        </p:txBody>
+      </p:sp>
+      <p:sp>
+        <p:nvSpPr>
           <p:cNvPr id="31" name="Text 28"/>
           <p:cNvSpPr/>
           <p:nvPr/>
         </p:nvSpPr>
         <p:spPr>
           <a:xfrm>
-            <a:off x="4447032" y="3474720"/>
-            <a:ext cx="3294888" cy="457200"/>
+            <a:off x="4447032" y="3886200"/>
+            <a:ext cx="3294888" cy="365760"/>
           </a:xfrm>
           <a:prstGeom prst="rect">
             <a:avLst/>
@@ -6377,7 +6377,7 @@
                 <a:ea typeface="微軟正黑體" pitchFamily="34" charset="-122"/>
                 <a:cs typeface="微軟正黑體" pitchFamily="34" charset="-120"/>
               </a:rPr>
-              <a:t>▸  51+ LLM 模型統一入口</a:t>
+              <a:t>▸  API Key 由 Gateway 後端保管</a:t>
             </a:r>
             <a:endParaRPr lang="en-US" sz="1100" dirty="0"/>
           </a:p>
@@ -6391,8 +6391,8 @@
         </p:nvSpPr>
         <p:spPr>
           <a:xfrm>
-            <a:off x="4447032" y="3977640"/>
-            <a:ext cx="3294888" cy="457200"/>
+            <a:off x="4447032" y="4297680"/>
+            <a:ext cx="3294888" cy="365760"/>
           </a:xfrm>
           <a:prstGeom prst="rect">
             <a:avLst/>
@@ -6416,7 +6416,7 @@
                 <a:ea typeface="微軟正黑體" pitchFamily="34" charset="-122"/>
                 <a:cs typeface="微軟正黑體" pitchFamily="34" charset="-120"/>
               </a:rPr>
-              <a:t>▸  API Key 由 Gateway 後端保管</a:t>
+              <a:t>▸  Policy Engine 部門/職級控管</a:t>
             </a:r>
             <a:endParaRPr lang="en-US" sz="1100" dirty="0"/>
           </a:p>
@@ -6430,8 +6430,8 @@
         </p:nvSpPr>
         <p:spPr>
           <a:xfrm>
-            <a:off x="4447032" y="4480560"/>
-            <a:ext cx="3294888" cy="457200"/>
+            <a:off x="4447032" y="4709160"/>
+            <a:ext cx="3294888" cy="365760"/>
           </a:xfrm>
           <a:prstGeom prst="rect">
             <a:avLst/>
@@ -6455,7 +6455,7 @@
                 <a:ea typeface="微軟正黑體" pitchFamily="34" charset="-122"/>
                 <a:cs typeface="微軟正黑體" pitchFamily="34" charset="-120"/>
               </a:rPr>
-              <a:t>▸  Policy Engine 部門/職級控管</a:t>
+              <a:t>▸  Guardrails 自動偵測 PII</a:t>
             </a:r>
             <a:endParaRPr lang="en-US" sz="1100" dirty="0"/>
           </a:p>
@@ -6463,92 +6463,14 @@
       </p:sp>
       <p:sp>
         <p:nvSpPr>
-          <p:cNvPr id="34" name="Text 31"/>
-          <p:cNvSpPr/>
-          <p:nvPr/>
-        </p:nvSpPr>
-        <p:spPr>
-          <a:xfrm>
-            <a:off x="4447032" y="4983480"/>
-            <a:ext cx="3294888" cy="457200"/>
-          </a:xfrm>
-          <a:prstGeom prst="rect">
-            <a:avLst/>
-          </a:prstGeom>
-          <a:noFill/>
-          <a:ln/>
-        </p:spPr>
-        <p:txBody>
-          <a:bodyPr wrap="square" rtlCol="0" anchor="ctr"/>
-          <a:lstStyle/>
-          <a:p>
-            <a:pPr indent="0" marL="0">
-              <a:buNone/>
-            </a:pPr>
-            <a:r>
-              <a:rPr lang="en-US" sz="1100" dirty="0">
-                <a:solidFill>
-                  <a:srgbClr val="444444"/>
-                </a:solidFill>
-                <a:latin typeface="微軟正黑體" pitchFamily="34" charset="0"/>
-                <a:ea typeface="微軟正黑體" pitchFamily="34" charset="-122"/>
-                <a:cs typeface="微軟正黑體" pitchFamily="34" charset="-120"/>
-              </a:rPr>
-              <a:t>▸  Guardrails 自動偵測 PII</a:t>
-            </a:r>
-            <a:endParaRPr lang="en-US" sz="1100" dirty="0"/>
-          </a:p>
-        </p:txBody>
-      </p:sp>
-      <p:sp>
-        <p:nvSpPr>
-          <p:cNvPr id="35" name="Text 32"/>
-          <p:cNvSpPr/>
-          <p:nvPr/>
-        </p:nvSpPr>
-        <p:spPr>
-          <a:xfrm>
-            <a:off x="4447032" y="5486400"/>
-            <a:ext cx="3294888" cy="457200"/>
-          </a:xfrm>
-          <a:prstGeom prst="rect">
-            <a:avLst/>
-          </a:prstGeom>
-          <a:noFill/>
-          <a:ln/>
-        </p:spPr>
-        <p:txBody>
-          <a:bodyPr wrap="square" rtlCol="0" anchor="ctr"/>
-          <a:lstStyle/>
-          <a:p>
-            <a:pPr indent="0" marL="0">
-              <a:buNone/>
-            </a:pPr>
-            <a:r>
-              <a:rPr lang="en-US" sz="1100" dirty="0">
-                <a:solidFill>
-                  <a:srgbClr val="444444"/>
-                </a:solidFill>
-                <a:latin typeface="微軟正黑體" pitchFamily="34" charset="0"/>
-                <a:ea typeface="微軟正黑體" pitchFamily="34" charset="-122"/>
-                <a:cs typeface="微軟正黑體" pitchFamily="34" charset="-120"/>
-              </a:rPr>
-              <a:t>▸  完整 Logs / Analytics 儀表板</a:t>
-            </a:r>
-            <a:endParaRPr lang="en-US" sz="1100" dirty="0"/>
-          </a:p>
-        </p:txBody>
-      </p:sp>
-      <p:sp>
-        <p:nvSpPr>
-          <p:cNvPr id="36" name="Shape 33"/>
-          <p:cNvSpPr/>
-          <p:nvPr/>
-        </p:nvSpPr>
-        <p:spPr>
-          <a:xfrm>
-            <a:off x="4447032" y="5029200"/>
-            <a:ext cx="3294888" cy="658368"/>
+          <p:cNvPr id="34" name="Shape 31"/>
+          <p:cNvSpPr/>
+          <p:nvPr/>
+        </p:nvSpPr>
+        <p:spPr>
+          <a:xfrm>
+            <a:off x="4447032" y="5212080"/>
+            <a:ext cx="3294888" cy="502920"/>
           </a:xfrm>
           <a:prstGeom prst="rect">
             <a:avLst/>
@@ -6561,14 +6483,14 @@
       </p:sp>
       <p:sp>
         <p:nvSpPr>
-          <p:cNvPr id="37" name="Text 34"/>
-          <p:cNvSpPr/>
-          <p:nvPr/>
-        </p:nvSpPr>
-        <p:spPr>
-          <a:xfrm>
-            <a:off x="4447032" y="5029200"/>
-            <a:ext cx="3294888" cy="384048"/>
+          <p:cNvPr id="35" name="Text 32"/>
+          <p:cNvSpPr/>
+          <p:nvPr/>
+        </p:nvSpPr>
+        <p:spPr>
+          <a:xfrm>
+            <a:off x="4447032" y="5212080"/>
+            <a:ext cx="3294888" cy="292608"/>
           </a:xfrm>
           <a:prstGeom prst="rect">
             <a:avLst/>
@@ -6584,7 +6506,7 @@
               <a:buNone/>
             </a:pPr>
             <a:r>
-              <a:rPr lang="en-US" sz="1800" b="1" dirty="0">
+              <a:rPr lang="en-US" sz="1600" b="1" dirty="0">
                 <a:solidFill>
                   <a:srgbClr val="FFFFFF"/>
                 </a:solidFill>
@@ -6594,20 +6516,20 @@
               </a:rPr>
               <a:t>51+</a:t>
             </a:r>
-            <a:endParaRPr lang="en-US" sz="1800" dirty="0"/>
-          </a:p>
-        </p:txBody>
-      </p:sp>
-      <p:sp>
-        <p:nvSpPr>
-          <p:cNvPr id="38" name="Text 35"/>
-          <p:cNvSpPr/>
-          <p:nvPr/>
-        </p:nvSpPr>
-        <p:spPr>
-          <a:xfrm>
-            <a:off x="4447032" y="5394960"/>
-            <a:ext cx="3294888" cy="292608"/>
+            <a:endParaRPr lang="en-US" sz="1600" dirty="0"/>
+          </a:p>
+        </p:txBody>
+      </p:sp>
+      <p:sp>
+        <p:nvSpPr>
+          <p:cNvPr id="36" name="Text 33"/>
+          <p:cNvSpPr/>
+          <p:nvPr/>
+        </p:nvSpPr>
+        <p:spPr>
+          <a:xfrm>
+            <a:off x="4447032" y="5486400"/>
+            <a:ext cx="3294888" cy="237744"/>
           </a:xfrm>
           <a:prstGeom prst="rect">
             <a:avLst/>
@@ -6623,7 +6545,7 @@
               <a:buNone/>
             </a:pPr>
             <a:r>
-              <a:rPr lang="en-US" sz="1000" dirty="0">
+              <a:rPr lang="en-US" sz="900" dirty="0">
                 <a:solidFill>
                   <a:srgbClr val="FFFFFF"/>
                 </a:solidFill>
@@ -6633,20 +6555,20 @@
               </a:rPr>
               <a:t>可管理模型數</a:t>
             </a:r>
-            <a:endParaRPr lang="en-US" sz="1000" dirty="0"/>
-          </a:p>
-        </p:txBody>
-      </p:sp>
-      <p:sp>
-        <p:nvSpPr>
-          <p:cNvPr id="39" name="Shape 36"/>
-          <p:cNvSpPr/>
-          <p:nvPr/>
-        </p:nvSpPr>
-        <p:spPr>
-          <a:xfrm>
-            <a:off x="5180076" y="1371600"/>
-            <a:ext cx="1828800" cy="320040"/>
+            <a:endParaRPr lang="en-US" sz="900" dirty="0"/>
+          </a:p>
+        </p:txBody>
+      </p:sp>
+      <p:sp>
+        <p:nvSpPr>
+          <p:cNvPr id="37" name="Shape 34"/>
+          <p:cNvSpPr/>
+          <p:nvPr/>
+        </p:nvSpPr>
+        <p:spPr>
+          <a:xfrm>
+            <a:off x="5180076" y="1508760"/>
+            <a:ext cx="1828800" cy="274320"/>
           </a:xfrm>
           <a:prstGeom prst="rect">
             <a:avLst/>
@@ -6659,14 +6581,14 @@
       </p:sp>
       <p:sp>
         <p:nvSpPr>
-          <p:cNvPr id="40" name="Text 37"/>
-          <p:cNvSpPr/>
-          <p:nvPr/>
-        </p:nvSpPr>
-        <p:spPr>
-          <a:xfrm>
-            <a:off x="5180076" y="1371600"/>
-            <a:ext cx="1828800" cy="320040"/>
+          <p:cNvPr id="38" name="Text 35"/>
+          <p:cNvSpPr/>
+          <p:nvPr/>
+        </p:nvSpPr>
+        <p:spPr>
+          <a:xfrm>
+            <a:off x="5180076" y="1508760"/>
+            <a:ext cx="1828800" cy="274320"/>
           </a:xfrm>
           <a:prstGeom prst="rect">
             <a:avLst/>
@@ -6698,7 +6620,7 @@
       </p:sp>
       <p:sp>
         <p:nvSpPr>
-          <p:cNvPr id="41" name="Shape 38"/>
+          <p:cNvPr id="39" name="Shape 36"/>
           <p:cNvSpPr/>
           <p:nvPr/>
         </p:nvSpPr>
@@ -6723,7 +6645,7 @@
       </p:sp>
       <p:sp>
         <p:nvSpPr>
-          <p:cNvPr id="42" name="Shape 39"/>
+          <p:cNvPr id="40" name="Shape 37"/>
           <p:cNvSpPr/>
           <p:nvPr/>
         </p:nvSpPr>
@@ -6743,7 +6665,7 @@
       </p:sp>
       <p:sp>
         <p:nvSpPr>
-          <p:cNvPr id="43" name="Text 40"/>
+          <p:cNvPr id="41" name="Text 38"/>
           <p:cNvSpPr/>
           <p:nvPr/>
         </p:nvSpPr>
@@ -6782,7 +6704,7 @@
       </p:sp>
       <p:sp>
         <p:nvSpPr>
-          <p:cNvPr id="44" name="Text 41"/>
+          <p:cNvPr id="42" name="Text 39"/>
           <p:cNvSpPr/>
           <p:nvPr/>
         </p:nvSpPr>
@@ -6821,7 +6743,7 @@
       </p:sp>
       <p:sp>
         <p:nvSpPr>
-          <p:cNvPr id="45" name="Text 42"/>
+          <p:cNvPr id="43" name="Text 40"/>
           <p:cNvSpPr/>
           <p:nvPr/>
         </p:nvSpPr>
@@ -6860,7 +6782,7 @@
       </p:sp>
       <p:sp>
         <p:nvSpPr>
-          <p:cNvPr id="46" name="Text 43"/>
+          <p:cNvPr id="44" name="Text 41"/>
           <p:cNvSpPr/>
           <p:nvPr/>
         </p:nvSpPr>
@@ -6899,7 +6821,7 @@
       </p:sp>
       <p:sp>
         <p:nvSpPr>
-          <p:cNvPr id="47" name="Shape 44"/>
+          <p:cNvPr id="45" name="Shape 42"/>
           <p:cNvSpPr/>
           <p:nvPr/>
         </p:nvSpPr>
@@ -6919,14 +6841,92 @@
       </p:sp>
       <p:sp>
         <p:nvSpPr>
+          <p:cNvPr id="46" name="Text 43"/>
+          <p:cNvSpPr/>
+          <p:nvPr/>
+        </p:nvSpPr>
+        <p:spPr>
+          <a:xfrm>
+            <a:off x="8253984" y="3474720"/>
+            <a:ext cx="3294888" cy="365760"/>
+          </a:xfrm>
+          <a:prstGeom prst="rect">
+            <a:avLst/>
+          </a:prstGeom>
+          <a:noFill/>
+          <a:ln/>
+        </p:spPr>
+        <p:txBody>
+          <a:bodyPr wrap="square" rtlCol="0" anchor="ctr"/>
+          <a:lstStyle/>
+          <a:p>
+            <a:pPr indent="0" marL="0">
+              <a:buNone/>
+            </a:pPr>
+            <a:r>
+              <a:rPr lang="en-US" sz="1100" dirty="0">
+                <a:solidFill>
+                  <a:srgbClr val="444444"/>
+                </a:solidFill>
+                <a:latin typeface="微軟正黑體" pitchFamily="34" charset="0"/>
+                <a:ea typeface="微軟正黑體" pitchFamily="34" charset="-122"/>
+                <a:cs typeface="微軟正黑體" pitchFamily="34" charset="-120"/>
+              </a:rPr>
+              <a:t>▸  MCP 標準工具呼叫協議</a:t>
+            </a:r>
+            <a:endParaRPr lang="en-US" sz="1100" dirty="0"/>
+          </a:p>
+        </p:txBody>
+      </p:sp>
+      <p:sp>
+        <p:nvSpPr>
+          <p:cNvPr id="47" name="Text 44"/>
+          <p:cNvSpPr/>
+          <p:nvPr/>
+        </p:nvSpPr>
+        <p:spPr>
+          <a:xfrm>
+            <a:off x="8253984" y="3886200"/>
+            <a:ext cx="3294888" cy="365760"/>
+          </a:xfrm>
+          <a:prstGeom prst="rect">
+            <a:avLst/>
+          </a:prstGeom>
+          <a:noFill/>
+          <a:ln/>
+        </p:spPr>
+        <p:txBody>
+          <a:bodyPr wrap="square" rtlCol="0" anchor="ctr"/>
+          <a:lstStyle/>
+          <a:p>
+            <a:pPr indent="0" marL="0">
+              <a:buNone/>
+            </a:pPr>
+            <a:r>
+              <a:rPr lang="en-US" sz="1100" dirty="0">
+                <a:solidFill>
+                  <a:srgbClr val="444444"/>
+                </a:solidFill>
+                <a:latin typeface="微軟正黑體" pitchFamily="34" charset="0"/>
+                <a:ea typeface="微軟正黑體" pitchFamily="34" charset="-122"/>
+                <a:cs typeface="微軟正黑體" pitchFamily="34" charset="-120"/>
+              </a:rPr>
+              <a:t>▸  相容 OpenAI / Anthropic / Google</a:t>
+            </a:r>
+            <a:endParaRPr lang="en-US" sz="1100" dirty="0"/>
+          </a:p>
+        </p:txBody>
+      </p:sp>
+      <p:sp>
+        <p:nvSpPr>
           <p:cNvPr id="48" name="Text 45"/>
           <p:cNvSpPr/>
           <p:nvPr/>
         </p:nvSpPr>
         <p:spPr>
           <a:xfrm>
-            <a:off x="8253984" y="3474720"/>
-            <a:ext cx="3294888" cy="457200"/>
+            <a:off x="8253984" y="4297680"/>
+            <a:ext cx="3294888" cy="365760"/>
           </a:xfrm>
           <a:prstGeom prst="rect">
             <a:avLst/>
@@ -6950,7 +6950,7 @@
                 <a:ea typeface="微軟正黑體" pitchFamily="34" charset="-122"/>
                 <a:cs typeface="微軟正黑體" pitchFamily="34" charset="-120"/>
               </a:rPr>
-              <a:t>▸  MCP 標準工具呼叫協議</a:t>
+              <a:t>▸  Workers AI 邊緣推論一併使用</a:t>
             </a:r>
             <a:endParaRPr lang="en-US" sz="1100" dirty="0"/>
           </a:p>
@@ -6964,8 +6964,8 @@
         </p:nvSpPr>
         <p:spPr>
           <a:xfrm>
-            <a:off x="8253984" y="3977640"/>
-            <a:ext cx="3294888" cy="457200"/>
+            <a:off x="8253984" y="4709160"/>
+            <a:ext cx="3294888" cy="365760"/>
           </a:xfrm>
           <a:prstGeom prst="rect">
             <a:avLst/>
@@ -6989,7 +6989,7 @@
                 <a:ea typeface="微軟正黑體" pitchFamily="34" charset="-122"/>
                 <a:cs typeface="微軟正黑體" pitchFamily="34" charset="-120"/>
               </a:rPr>
-              <a:t>▸  相容 OpenAI / Anthropic / Google</a:t>
+              <a:t>▸  完整官方文件 + 教學範例</a:t>
             </a:r>
             <a:endParaRPr lang="en-US" sz="1100" dirty="0"/>
           </a:p>
@@ -6997,131 +6997,14 @@
       </p:sp>
       <p:sp>
         <p:nvSpPr>
-          <p:cNvPr id="50" name="Text 47"/>
-          <p:cNvSpPr/>
-          <p:nvPr/>
-        </p:nvSpPr>
-        <p:spPr>
-          <a:xfrm>
-            <a:off x="8253984" y="4480560"/>
-            <a:ext cx="3294888" cy="457200"/>
-          </a:xfrm>
-          <a:prstGeom prst="rect">
-            <a:avLst/>
-          </a:prstGeom>
-          <a:noFill/>
-          <a:ln/>
-        </p:spPr>
-        <p:txBody>
-          <a:bodyPr wrap="square" rtlCol="0" anchor="ctr"/>
-          <a:lstStyle/>
-          <a:p>
-            <a:pPr indent="0" marL="0">
-              <a:buNone/>
-            </a:pPr>
-            <a:r>
-              <a:rPr lang="en-US" sz="1100" dirty="0">
-                <a:solidFill>
-                  <a:srgbClr val="444444"/>
-                </a:solidFill>
-                <a:latin typeface="微軟正黑體" pitchFamily="34" charset="0"/>
-                <a:ea typeface="微軟正黑體" pitchFamily="34" charset="-122"/>
-                <a:cs typeface="微軟正黑體" pitchFamily="34" charset="-120"/>
-              </a:rPr>
-              <a:t>▸  Workers AI 邊緣推論一併使用</a:t>
-            </a:r>
-            <a:endParaRPr lang="en-US" sz="1100" dirty="0"/>
-          </a:p>
-        </p:txBody>
-      </p:sp>
-      <p:sp>
-        <p:nvSpPr>
-          <p:cNvPr id="51" name="Text 48"/>
-          <p:cNvSpPr/>
-          <p:nvPr/>
-        </p:nvSpPr>
-        <p:spPr>
-          <a:xfrm>
-            <a:off x="8253984" y="4983480"/>
-            <a:ext cx="3294888" cy="457200"/>
-          </a:xfrm>
-          <a:prstGeom prst="rect">
-            <a:avLst/>
-          </a:prstGeom>
-          <a:noFill/>
-          <a:ln/>
-        </p:spPr>
-        <p:txBody>
-          <a:bodyPr wrap="square" rtlCol="0" anchor="ctr"/>
-          <a:lstStyle/>
-          <a:p>
-            <a:pPr indent="0" marL="0">
-              <a:buNone/>
-            </a:pPr>
-            <a:r>
-              <a:rPr lang="en-US" sz="1100" dirty="0">
-                <a:solidFill>
-                  <a:srgbClr val="444444"/>
-                </a:solidFill>
-                <a:latin typeface="微軟正黑體" pitchFamily="34" charset="0"/>
-                <a:ea typeface="微軟正黑體" pitchFamily="34" charset="-122"/>
-                <a:cs typeface="微軟正黑體" pitchFamily="34" charset="-120"/>
-              </a:rPr>
-              <a:t>▸  工具開發者社群活躍</a:t>
-            </a:r>
-            <a:endParaRPr lang="en-US" sz="1100" dirty="0"/>
-          </a:p>
-        </p:txBody>
-      </p:sp>
-      <p:sp>
-        <p:nvSpPr>
-          <p:cNvPr id="52" name="Text 49"/>
-          <p:cNvSpPr/>
-          <p:nvPr/>
-        </p:nvSpPr>
-        <p:spPr>
-          <a:xfrm>
-            <a:off x="8253984" y="5486400"/>
-            <a:ext cx="3294888" cy="457200"/>
-          </a:xfrm>
-          <a:prstGeom prst="rect">
-            <a:avLst/>
-          </a:prstGeom>
-          <a:noFill/>
-          <a:ln/>
-        </p:spPr>
-        <p:txBody>
-          <a:bodyPr wrap="square" rtlCol="0" anchor="ctr"/>
-          <a:lstStyle/>
-          <a:p>
-            <a:pPr indent="0" marL="0">
-              <a:buNone/>
-            </a:pPr>
-            <a:r>
-              <a:rPr lang="en-US" sz="1100" dirty="0">
-                <a:solidFill>
-                  <a:srgbClr val="444444"/>
-                </a:solidFill>
-                <a:latin typeface="微軟正黑體" pitchFamily="34" charset="0"/>
-                <a:ea typeface="微軟正黑體" pitchFamily="34" charset="-122"/>
-                <a:cs typeface="微軟正黑體" pitchFamily="34" charset="-120"/>
-              </a:rPr>
-              <a:t>▸  完整官方文件 + 教學範例</a:t>
-            </a:r>
-            <a:endParaRPr lang="en-US" sz="1100" dirty="0"/>
-          </a:p>
-        </p:txBody>
-      </p:sp>
-      <p:sp>
-        <p:nvSpPr>
-          <p:cNvPr id="53" name="Shape 50"/>
-          <p:cNvSpPr/>
-          <p:nvPr/>
-        </p:nvSpPr>
-        <p:spPr>
-          <a:xfrm>
-            <a:off x="8253984" y="5029200"/>
-            <a:ext cx="3294888" cy="658368"/>
+          <p:cNvPr id="50" name="Shape 47"/>
+          <p:cNvSpPr/>
+          <p:nvPr/>
+        </p:nvSpPr>
+        <p:spPr>
+          <a:xfrm>
+            <a:off x="8253984" y="5212080"/>
+            <a:ext cx="3294888" cy="502920"/>
           </a:xfrm>
           <a:prstGeom prst="rect">
             <a:avLst/>
@@ -7134,14 +7017,14 @@
       </p:sp>
       <p:sp>
         <p:nvSpPr>
-          <p:cNvPr id="54" name="Text 51"/>
-          <p:cNvSpPr/>
-          <p:nvPr/>
-        </p:nvSpPr>
-        <p:spPr>
-          <a:xfrm>
-            <a:off x="8253984" y="5029200"/>
-            <a:ext cx="3294888" cy="384048"/>
+          <p:cNvPr id="51" name="Text 48"/>
+          <p:cNvSpPr/>
+          <p:nvPr/>
+        </p:nvSpPr>
+        <p:spPr>
+          <a:xfrm>
+            <a:off x="8253984" y="5212080"/>
+            <a:ext cx="3294888" cy="292608"/>
           </a:xfrm>
           <a:prstGeom prst="rect">
             <a:avLst/>
@@ -7157,7 +7040,7 @@
               <a:buNone/>
             </a:pPr>
             <a:r>
-              <a:rPr lang="en-US" sz="1800" b="1" dirty="0">
+              <a:rPr lang="en-US" sz="1600" b="1" dirty="0">
                 <a:solidFill>
                   <a:srgbClr val="FFFFFF"/>
                 </a:solidFill>
@@ -7167,20 +7050,20 @@
               </a:rPr>
               <a:t>MCP</a:t>
             </a:r>
-            <a:endParaRPr lang="en-US" sz="1800" dirty="0"/>
-          </a:p>
-        </p:txBody>
-      </p:sp>
-      <p:sp>
-        <p:nvSpPr>
-          <p:cNvPr id="55" name="Text 52"/>
-          <p:cNvSpPr/>
-          <p:nvPr/>
-        </p:nvSpPr>
-        <p:spPr>
-          <a:xfrm>
-            <a:off x="8253984" y="5394960"/>
-            <a:ext cx="3294888" cy="292608"/>
+            <a:endParaRPr lang="en-US" sz="1600" dirty="0"/>
+          </a:p>
+        </p:txBody>
+      </p:sp>
+      <p:sp>
+        <p:nvSpPr>
+          <p:cNvPr id="52" name="Text 49"/>
+          <p:cNvSpPr/>
+          <p:nvPr/>
+        </p:nvSpPr>
+        <p:spPr>
+          <a:xfrm>
+            <a:off x="8253984" y="5486400"/>
+            <a:ext cx="3294888" cy="237744"/>
           </a:xfrm>
           <a:prstGeom prst="rect">
             <a:avLst/>
@@ -7196,7 +7079,7 @@
               <a:buNone/>
             </a:pPr>
             <a:r>
-              <a:rPr lang="en-US" sz="1000" dirty="0">
+              <a:rPr lang="en-US" sz="900" dirty="0">
                 <a:solidFill>
                   <a:srgbClr val="FFFFFF"/>
                 </a:solidFill>
@@ -7206,13 +7089,13 @@
               </a:rPr>
               <a:t>開放協議</a:t>
             </a:r>
-            <a:endParaRPr lang="en-US" sz="1000" dirty="0"/>
-          </a:p>
-        </p:txBody>
-      </p:sp>
-      <p:sp>
-        <p:nvSpPr>
-          <p:cNvPr id="56" name="Shape 53"/>
+            <a:endParaRPr lang="en-US" sz="900" dirty="0"/>
+          </a:p>
+        </p:txBody>
+      </p:sp>
+      <p:sp>
+        <p:nvSpPr>
+          <p:cNvPr id="53" name="Shape 50"/>
           <p:cNvSpPr/>
           <p:nvPr/>
         </p:nvSpPr>
@@ -7234,7 +7117,7 @@
       </p:sp>
       <p:sp>
         <p:nvSpPr>
-          <p:cNvPr id="57" name="Shape 54"/>
+          <p:cNvPr id="54" name="Shape 51"/>
           <p:cNvSpPr/>
           <p:nvPr/>
         </p:nvSpPr>
@@ -7254,7 +7137,7 @@
       </p:sp>
       <p:sp>
         <p:nvSpPr>
-          <p:cNvPr id="58" name="Text 55"/>
+          <p:cNvPr id="55" name="Text 52"/>
           <p:cNvSpPr/>
           <p:nvPr/>
         </p:nvSpPr>
